--- a/exports/pptx/lessons/middle-module-04-doshas/day-05-dosha-clock.pptx
+++ b/exports/pptx/lessons/middle-module-04-doshas/day-05-dosha-clock.pptx
@@ -4881,7 +4881,7 @@
         </p:nvSpPr>
         <p:spPr>
           <a:xfrm>
-            <a:off x="406301" y="4177010"/>
+            <a:off x="406301" y="1460004"/>
             <a:ext cx="8498026" cy="213271"/>
           </a:xfrm>
           <a:prstGeom prst="rect">
@@ -4915,7 +4915,7 @@
                 <a:ea typeface="Arial" pitchFamily="34" charset="-122"/>
                 <a:cs typeface="Arial" pitchFamily="34" charset="-120"/>
               </a:rPr>
-              <a:t>"Each doṣa shows up twice — once during the day, once at night."</a:t>
+              <a:t>Each row: Window · Time · Dominant doṣa · Why.</a:t>
             </a:r>
             <a:endParaRPr lang="en-US" sz="1200" dirty="0"/>
           </a:p>
@@ -4929,7 +4929,581 @@
         </p:nvSpPr>
         <p:spPr>
           <a:xfrm>
-            <a:off x="634901" y="4479131"/>
+            <a:off x="634901" y="1762125"/>
+            <a:ext cx="8102798" cy="1706463"/>
+          </a:xfrm>
+          <a:prstGeom prst="rect">
+            <a:avLst/>
+          </a:prstGeom>
+          <a:noFill/>
+          <a:ln/>
+        </p:spPr>
+        <p:txBody>
+          <a:bodyPr wrap="square" lIns="0" tIns="0" rIns="0" bIns="0" rtlCol="0" anchor="t"/>
+          <a:lstStyle/>
+          <a:p>
+            <a:pPr algn="l" marL="342900" indent="-342900">
+              <a:lnSpc>
+                <a:spcPts val="1620"/>
+              </a:lnSpc>
+              <a:spcAft>
+                <a:spcPts val="300"/>
+              </a:spcAft>
+              <a:buSzPct val="100000"/>
+              <a:buChar char="•"/>
+            </a:pPr>
+            <a:r>
+              <a:rPr lang="en-US" sz="1200" b="1" dirty="0">
+                <a:solidFill>
+                  <a:srgbClr val="1C2833"/>
+                </a:solidFill>
+                <a:latin typeface="Arial" pitchFamily="34" charset="0"/>
+                <a:ea typeface="Arial" pitchFamily="34" charset="-122"/>
+                <a:cs typeface="Arial" pitchFamily="34" charset="-120"/>
+              </a:rPr>
+              <a:t>1</a:t>
+            </a:r>
+            <a:pPr algn="l" indent="0" marL="0">
+              <a:lnSpc>
+                <a:spcPts val="1620"/>
+              </a:lnSpc>
+              <a:spcAft>
+                <a:spcPts val="300"/>
+              </a:spcAft>
+              <a:buNone/>
+            </a:pPr>
+            <a:r>
+              <a:rPr lang="en-US" sz="1200" dirty="0">
+                <a:solidFill>
+                  <a:srgbClr val="1C2833"/>
+                </a:solidFill>
+                <a:latin typeface="Arial" pitchFamily="34" charset="0"/>
+                <a:ea typeface="Arial" pitchFamily="34" charset="-122"/>
+                <a:cs typeface="Arial" pitchFamily="34" charset="-120"/>
+              </a:rPr>
+              <a:t> — 6 am – 10 am · </a:t>
+            </a:r>
+            <a:pPr algn="l" indent="0" marL="0">
+              <a:lnSpc>
+                <a:spcPts val="1620"/>
+              </a:lnSpc>
+              <a:spcAft>
+                <a:spcPts val="300"/>
+              </a:spcAft>
+              <a:buNone/>
+            </a:pPr>
+            <a:r>
+              <a:rPr lang="en-US" sz="1200" i="1" dirty="0">
+                <a:solidFill>
+                  <a:srgbClr val="1C2833"/>
+                </a:solidFill>
+                <a:latin typeface="Arial" pitchFamily="34" charset="0"/>
+                <a:ea typeface="Arial" pitchFamily="34" charset="-122"/>
+                <a:cs typeface="Arial" pitchFamily="34" charset="-120"/>
+              </a:rPr>
+              <a:t>kapha</a:t>
+            </a:r>
+            <a:pPr algn="l" indent="0" marL="0">
+              <a:lnSpc>
+                <a:spcPts val="1620"/>
+              </a:lnSpc>
+              <a:spcAft>
+                <a:spcPts val="300"/>
+              </a:spcAft>
+              <a:buNone/>
+            </a:pPr>
+            <a:r>
+              <a:rPr lang="en-US" sz="1200" dirty="0">
+                <a:solidFill>
+                  <a:srgbClr val="1C2833"/>
+                </a:solidFill>
+                <a:latin typeface="Arial" pitchFamily="34" charset="0"/>
+                <a:ea typeface="Arial" pitchFamily="34" charset="-122"/>
+                <a:cs typeface="Arial" pitchFamily="34" charset="-120"/>
+              </a:rPr>
+              <a:t> · Body is heavy, slow to start — heavy mucus, deep tissue. Best for solid breakfast, mild exercise.</a:t>
+            </a:r>
+            <a:endParaRPr lang="en-US" sz="1200" dirty="0"/>
+          </a:p>
+          <a:p>
+            <a:pPr algn="l" marL="342900" indent="-342900">
+              <a:lnSpc>
+                <a:spcPts val="1620"/>
+              </a:lnSpc>
+              <a:spcAft>
+                <a:spcPts val="300"/>
+              </a:spcAft>
+              <a:buSzPct val="100000"/>
+              <a:buChar char="•"/>
+            </a:pPr>
+            <a:r>
+              <a:rPr lang="en-US" sz="1200" b="1" dirty="0">
+                <a:solidFill>
+                  <a:srgbClr val="1C2833"/>
+                </a:solidFill>
+                <a:latin typeface="Arial" pitchFamily="34" charset="0"/>
+                <a:ea typeface="Arial" pitchFamily="34" charset="-122"/>
+                <a:cs typeface="Arial" pitchFamily="34" charset="-120"/>
+              </a:rPr>
+              <a:t>2</a:t>
+            </a:r>
+            <a:pPr algn="l" indent="0" marL="0">
+              <a:lnSpc>
+                <a:spcPts val="1620"/>
+              </a:lnSpc>
+              <a:spcAft>
+                <a:spcPts val="300"/>
+              </a:spcAft>
+              <a:buNone/>
+            </a:pPr>
+            <a:r>
+              <a:rPr lang="en-US" sz="1200" dirty="0">
+                <a:solidFill>
+                  <a:srgbClr val="1C2833"/>
+                </a:solidFill>
+                <a:latin typeface="Arial" pitchFamily="34" charset="0"/>
+                <a:ea typeface="Arial" pitchFamily="34" charset="-122"/>
+                <a:cs typeface="Arial" pitchFamily="34" charset="-120"/>
+              </a:rPr>
+              <a:t> — 10 am – 2 pm · </a:t>
+            </a:r>
+            <a:pPr algn="l" indent="0" marL="0">
+              <a:lnSpc>
+                <a:spcPts val="1620"/>
+              </a:lnSpc>
+              <a:spcAft>
+                <a:spcPts val="300"/>
+              </a:spcAft>
+              <a:buNone/>
+            </a:pPr>
+            <a:r>
+              <a:rPr lang="en-US" sz="1200" i="1" dirty="0">
+                <a:solidFill>
+                  <a:srgbClr val="1C2833"/>
+                </a:solidFill>
+                <a:latin typeface="Arial" pitchFamily="34" charset="0"/>
+                <a:ea typeface="Arial" pitchFamily="34" charset="-122"/>
+                <a:cs typeface="Arial" pitchFamily="34" charset="-120"/>
+              </a:rPr>
+              <a:t>pitta</a:t>
+            </a:r>
+            <a:pPr algn="l" indent="0" marL="0">
+              <a:lnSpc>
+                <a:spcPts val="1620"/>
+              </a:lnSpc>
+              <a:spcAft>
+                <a:spcPts val="300"/>
+              </a:spcAft>
+              <a:buNone/>
+            </a:pPr>
+            <a:r>
+              <a:rPr lang="en-US" sz="1200" dirty="0">
+                <a:solidFill>
+                  <a:srgbClr val="1C2833"/>
+                </a:solidFill>
+                <a:latin typeface="Arial" pitchFamily="34" charset="0"/>
+                <a:ea typeface="Arial" pitchFamily="34" charset="-122"/>
+                <a:cs typeface="Arial" pitchFamily="34" charset="-120"/>
+              </a:rPr>
+              <a:t> · Digestive fire peaks at noon. Best for the main meal of the day.</a:t>
+            </a:r>
+            <a:endParaRPr lang="en-US" sz="1200" dirty="0"/>
+          </a:p>
+          <a:p>
+            <a:pPr algn="l" marL="342900" indent="-342900">
+              <a:lnSpc>
+                <a:spcPts val="1620"/>
+              </a:lnSpc>
+              <a:spcAft>
+                <a:spcPts val="300"/>
+              </a:spcAft>
+              <a:buSzPct val="100000"/>
+              <a:buChar char="•"/>
+            </a:pPr>
+            <a:r>
+              <a:rPr lang="en-US" sz="1200" b="1" dirty="0">
+                <a:solidFill>
+                  <a:srgbClr val="1C2833"/>
+                </a:solidFill>
+                <a:latin typeface="Arial" pitchFamily="34" charset="0"/>
+                <a:ea typeface="Arial" pitchFamily="34" charset="-122"/>
+                <a:cs typeface="Arial" pitchFamily="34" charset="-120"/>
+              </a:rPr>
+              <a:t>3</a:t>
+            </a:r>
+            <a:pPr algn="l" indent="0" marL="0">
+              <a:lnSpc>
+                <a:spcPts val="1620"/>
+              </a:lnSpc>
+              <a:spcAft>
+                <a:spcPts val="300"/>
+              </a:spcAft>
+              <a:buNone/>
+            </a:pPr>
+            <a:r>
+              <a:rPr lang="en-US" sz="1200" dirty="0">
+                <a:solidFill>
+                  <a:srgbClr val="1C2833"/>
+                </a:solidFill>
+                <a:latin typeface="Arial" pitchFamily="34" charset="0"/>
+                <a:ea typeface="Arial" pitchFamily="34" charset="-122"/>
+                <a:cs typeface="Arial" pitchFamily="34" charset="-120"/>
+              </a:rPr>
+              <a:t> — 2 pm – 6 pm · </a:t>
+            </a:r>
+            <a:pPr algn="l" indent="0" marL="0">
+              <a:lnSpc>
+                <a:spcPts val="1620"/>
+              </a:lnSpc>
+              <a:spcAft>
+                <a:spcPts val="300"/>
+              </a:spcAft>
+              <a:buNone/>
+            </a:pPr>
+            <a:r>
+              <a:rPr lang="en-US" sz="1200" i="1" dirty="0">
+                <a:solidFill>
+                  <a:srgbClr val="1C2833"/>
+                </a:solidFill>
+                <a:latin typeface="Arial" pitchFamily="34" charset="0"/>
+                <a:ea typeface="Arial" pitchFamily="34" charset="-122"/>
+                <a:cs typeface="Arial" pitchFamily="34" charset="-120"/>
+              </a:rPr>
+              <a:t>vāta</a:t>
+            </a:r>
+            <a:pPr algn="l" indent="0" marL="0">
+              <a:lnSpc>
+                <a:spcPts val="1620"/>
+              </a:lnSpc>
+              <a:spcAft>
+                <a:spcPts val="300"/>
+              </a:spcAft>
+              <a:buNone/>
+            </a:pPr>
+            <a:r>
+              <a:rPr lang="en-US" sz="1200" dirty="0">
+                <a:solidFill>
+                  <a:srgbClr val="1C2833"/>
+                </a:solidFill>
+                <a:latin typeface="Arial" pitchFamily="34" charset="0"/>
+                <a:ea typeface="Arial" pitchFamily="34" charset="-122"/>
+                <a:cs typeface="Arial" pitchFamily="34" charset="-120"/>
+              </a:rPr>
+              <a:t> · Energy is bursty, mind active, body lighter. Best for focused work, short snacks.</a:t>
+            </a:r>
+            <a:endParaRPr lang="en-US" sz="1200" dirty="0"/>
+          </a:p>
+          <a:p>
+            <a:pPr algn="l" marL="342900" indent="-342900">
+              <a:lnSpc>
+                <a:spcPts val="1620"/>
+              </a:lnSpc>
+              <a:spcAft>
+                <a:spcPts val="300"/>
+              </a:spcAft>
+              <a:buSzPct val="100000"/>
+              <a:buChar char="•"/>
+            </a:pPr>
+            <a:r>
+              <a:rPr lang="en-US" sz="1200" b="1" dirty="0">
+                <a:solidFill>
+                  <a:srgbClr val="1C2833"/>
+                </a:solidFill>
+                <a:latin typeface="Arial" pitchFamily="34" charset="0"/>
+                <a:ea typeface="Arial" pitchFamily="34" charset="-122"/>
+                <a:cs typeface="Arial" pitchFamily="34" charset="-120"/>
+              </a:rPr>
+              <a:t>4</a:t>
+            </a:r>
+            <a:pPr algn="l" indent="0" marL="0">
+              <a:lnSpc>
+                <a:spcPts val="1620"/>
+              </a:lnSpc>
+              <a:spcAft>
+                <a:spcPts val="300"/>
+              </a:spcAft>
+              <a:buNone/>
+            </a:pPr>
+            <a:r>
+              <a:rPr lang="en-US" sz="1200" dirty="0">
+                <a:solidFill>
+                  <a:srgbClr val="1C2833"/>
+                </a:solidFill>
+                <a:latin typeface="Arial" pitchFamily="34" charset="0"/>
+                <a:ea typeface="Arial" pitchFamily="34" charset="-122"/>
+                <a:cs typeface="Arial" pitchFamily="34" charset="-120"/>
+              </a:rPr>
+              <a:t> — 6 pm – 10 pm · </a:t>
+            </a:r>
+            <a:pPr algn="l" indent="0" marL="0">
+              <a:lnSpc>
+                <a:spcPts val="1620"/>
+              </a:lnSpc>
+              <a:spcAft>
+                <a:spcPts val="300"/>
+              </a:spcAft>
+              <a:buNone/>
+            </a:pPr>
+            <a:r>
+              <a:rPr lang="en-US" sz="1200" i="1" dirty="0">
+                <a:solidFill>
+                  <a:srgbClr val="1C2833"/>
+                </a:solidFill>
+                <a:latin typeface="Arial" pitchFamily="34" charset="0"/>
+                <a:ea typeface="Arial" pitchFamily="34" charset="-122"/>
+                <a:cs typeface="Arial" pitchFamily="34" charset="-120"/>
+              </a:rPr>
+              <a:t>kapha</a:t>
+            </a:r>
+            <a:pPr algn="l" indent="0" marL="0">
+              <a:lnSpc>
+                <a:spcPts val="1620"/>
+              </a:lnSpc>
+              <a:spcAft>
+                <a:spcPts val="300"/>
+              </a:spcAft>
+              <a:buNone/>
+            </a:pPr>
+            <a:r>
+              <a:rPr lang="en-US" sz="1200" dirty="0">
+                <a:solidFill>
+                  <a:srgbClr val="1C2833"/>
+                </a:solidFill>
+                <a:latin typeface="Arial" pitchFamily="34" charset="0"/>
+                <a:ea typeface="Arial" pitchFamily="34" charset="-122"/>
+                <a:cs typeface="Arial" pitchFamily="34" charset="-120"/>
+              </a:rPr>
+              <a:t> · Body slows for sleep. Best for light dinner, calming activity.</a:t>
+            </a:r>
+            <a:endParaRPr lang="en-US" sz="1200" dirty="0"/>
+          </a:p>
+          <a:p>
+            <a:pPr algn="l" marL="342900" indent="-342900">
+              <a:lnSpc>
+                <a:spcPts val="1620"/>
+              </a:lnSpc>
+              <a:spcAft>
+                <a:spcPts val="300"/>
+              </a:spcAft>
+              <a:buSzPct val="100000"/>
+              <a:buChar char="•"/>
+            </a:pPr>
+            <a:r>
+              <a:rPr lang="en-US" sz="1200" b="1" dirty="0">
+                <a:solidFill>
+                  <a:srgbClr val="1C2833"/>
+                </a:solidFill>
+                <a:latin typeface="Arial" pitchFamily="34" charset="0"/>
+                <a:ea typeface="Arial" pitchFamily="34" charset="-122"/>
+                <a:cs typeface="Arial" pitchFamily="34" charset="-120"/>
+              </a:rPr>
+              <a:t>5</a:t>
+            </a:r>
+            <a:pPr algn="l" indent="0" marL="0">
+              <a:lnSpc>
+                <a:spcPts val="1620"/>
+              </a:lnSpc>
+              <a:spcAft>
+                <a:spcPts val="300"/>
+              </a:spcAft>
+              <a:buNone/>
+            </a:pPr>
+            <a:r>
+              <a:rPr lang="en-US" sz="1200" dirty="0">
+                <a:solidFill>
+                  <a:srgbClr val="1C2833"/>
+                </a:solidFill>
+                <a:latin typeface="Arial" pitchFamily="34" charset="0"/>
+                <a:ea typeface="Arial" pitchFamily="34" charset="-122"/>
+                <a:cs typeface="Arial" pitchFamily="34" charset="-120"/>
+              </a:rPr>
+              <a:t> — 10 pm – 2 am · </a:t>
+            </a:r>
+            <a:pPr algn="l" indent="0" marL="0">
+              <a:lnSpc>
+                <a:spcPts val="1620"/>
+              </a:lnSpc>
+              <a:spcAft>
+                <a:spcPts val="300"/>
+              </a:spcAft>
+              <a:buNone/>
+            </a:pPr>
+            <a:r>
+              <a:rPr lang="en-US" sz="1200" i="1" dirty="0">
+                <a:solidFill>
+                  <a:srgbClr val="1C2833"/>
+                </a:solidFill>
+                <a:latin typeface="Arial" pitchFamily="34" charset="0"/>
+                <a:ea typeface="Arial" pitchFamily="34" charset="-122"/>
+                <a:cs typeface="Arial" pitchFamily="34" charset="-120"/>
+              </a:rPr>
+              <a:t>pitta</a:t>
+            </a:r>
+            <a:pPr algn="l" indent="0" marL="0">
+              <a:lnSpc>
+                <a:spcPts val="1620"/>
+              </a:lnSpc>
+              <a:spcAft>
+                <a:spcPts val="300"/>
+              </a:spcAft>
+              <a:buNone/>
+            </a:pPr>
+            <a:r>
+              <a:rPr lang="en-US" sz="1200" dirty="0">
+                <a:solidFill>
+                  <a:srgbClr val="1C2833"/>
+                </a:solidFill>
+                <a:latin typeface="Arial" pitchFamily="34" charset="0"/>
+                <a:ea typeface="Arial" pitchFamily="34" charset="-122"/>
+                <a:cs typeface="Arial" pitchFamily="34" charset="-120"/>
+              </a:rPr>
+              <a:t> · Body's deep repair (liver, metabolism). Best for actual sleep — don't snack now.</a:t>
+            </a:r>
+            <a:endParaRPr lang="en-US" sz="1200" dirty="0"/>
+          </a:p>
+          <a:p>
+            <a:pPr algn="l" marL="342900" indent="-342900">
+              <a:lnSpc>
+                <a:spcPts val="1620"/>
+              </a:lnSpc>
+              <a:spcAft>
+                <a:spcPts val="300"/>
+              </a:spcAft>
+              <a:buSzPct val="100000"/>
+              <a:buChar char="•"/>
+            </a:pPr>
+            <a:r>
+              <a:rPr lang="en-US" sz="1200" b="1" dirty="0">
+                <a:solidFill>
+                  <a:srgbClr val="1C2833"/>
+                </a:solidFill>
+                <a:latin typeface="Arial" pitchFamily="34" charset="0"/>
+                <a:ea typeface="Arial" pitchFamily="34" charset="-122"/>
+                <a:cs typeface="Arial" pitchFamily="34" charset="-120"/>
+              </a:rPr>
+              <a:t>6</a:t>
+            </a:r>
+            <a:pPr algn="l" indent="0" marL="0">
+              <a:lnSpc>
+                <a:spcPts val="1620"/>
+              </a:lnSpc>
+              <a:spcAft>
+                <a:spcPts val="300"/>
+              </a:spcAft>
+              <a:buNone/>
+            </a:pPr>
+            <a:r>
+              <a:rPr lang="en-US" sz="1200" dirty="0">
+                <a:solidFill>
+                  <a:srgbClr val="1C2833"/>
+                </a:solidFill>
+                <a:latin typeface="Arial" pitchFamily="34" charset="0"/>
+                <a:ea typeface="Arial" pitchFamily="34" charset="-122"/>
+                <a:cs typeface="Arial" pitchFamily="34" charset="-120"/>
+              </a:rPr>
+              <a:t> — 2 am – 6 am · </a:t>
+            </a:r>
+            <a:pPr algn="l" indent="0" marL="0">
+              <a:lnSpc>
+                <a:spcPts val="1620"/>
+              </a:lnSpc>
+              <a:spcAft>
+                <a:spcPts val="300"/>
+              </a:spcAft>
+              <a:buNone/>
+            </a:pPr>
+            <a:r>
+              <a:rPr lang="en-US" sz="1200" i="1" dirty="0">
+                <a:solidFill>
+                  <a:srgbClr val="1C2833"/>
+                </a:solidFill>
+                <a:latin typeface="Arial" pitchFamily="34" charset="0"/>
+                <a:ea typeface="Arial" pitchFamily="34" charset="-122"/>
+                <a:cs typeface="Arial" pitchFamily="34" charset="-120"/>
+              </a:rPr>
+              <a:t>vāta</a:t>
+            </a:r>
+            <a:pPr algn="l" indent="0" marL="0">
+              <a:lnSpc>
+                <a:spcPts val="1620"/>
+              </a:lnSpc>
+              <a:spcAft>
+                <a:spcPts val="300"/>
+              </a:spcAft>
+              <a:buNone/>
+            </a:pPr>
+            <a:r>
+              <a:rPr lang="en-US" sz="1200" dirty="0">
+                <a:solidFill>
+                  <a:srgbClr val="1C2833"/>
+                </a:solidFill>
+                <a:latin typeface="Arial" pitchFamily="34" charset="0"/>
+                <a:ea typeface="Arial" pitchFamily="34" charset="-122"/>
+                <a:cs typeface="Arial" pitchFamily="34" charset="-120"/>
+              </a:rPr>
+              <a:t> · Light sleep, dreams; body cycles toward waking. Wake at end of window.</a:t>
+            </a:r>
+            <a:endParaRPr lang="en-US" sz="1200" dirty="0"/>
+          </a:p>
+        </p:txBody>
+      </p:sp>
+      <p:sp>
+        <p:nvSpPr>
+          <p:cNvPr id="7" name="Text 5"/>
+          <p:cNvSpPr/>
+          <p:nvPr/>
+        </p:nvSpPr>
+        <p:spPr>
+          <a:xfrm>
+            <a:off x="406301" y="3557439"/>
+            <a:ext cx="8498026" cy="213271"/>
+          </a:xfrm>
+          <a:prstGeom prst="rect">
+            <a:avLst/>
+          </a:prstGeom>
+          <a:noFill/>
+          <a:ln/>
+        </p:spPr>
+        <p:txBody>
+          <a:bodyPr wrap="square" lIns="0" tIns="0" rIns="0" bIns="0" rtlCol="0" anchor="t"/>
+          <a:lstStyle/>
+          <a:p>
+            <a:pPr algn="l" indent="0" marL="0">
+              <a:lnSpc>
+                <a:spcPts val="1680"/>
+              </a:lnSpc>
+              <a:spcBef>
+                <a:spcPts val="300"/>
+              </a:spcBef>
+              <a:spcAft>
+                <a:spcPts val="300"/>
+              </a:spcAft>
+              <a:buNone/>
+            </a:pPr>
+            <a:r>
+              <a:rPr lang="en-US" sz="1200" i="1" dirty="0">
+                <a:solidFill>
+                  <a:srgbClr val="1C2833"/>
+                </a:solidFill>
+                <a:latin typeface="Arial" pitchFamily="34" charset="0"/>
+                <a:ea typeface="Arial" pitchFamily="34" charset="-122"/>
+                <a:cs typeface="Arial" pitchFamily="34" charset="-120"/>
+              </a:rPr>
+              <a:t>"Each doṣa shows up twice — once during the day, once at night."</a:t>
+            </a:r>
+            <a:endParaRPr lang="en-US" sz="1200" dirty="0"/>
+          </a:p>
+        </p:txBody>
+      </p:sp>
+      <p:sp>
+        <p:nvSpPr>
+          <p:cNvPr id="8" name="Text 6"/>
+          <p:cNvSpPr/>
+          <p:nvPr/>
+        </p:nvSpPr>
+        <p:spPr>
+          <a:xfrm>
+            <a:off x="634901" y="3859560"/>
             <a:ext cx="8102798" cy="281880"/>
           </a:xfrm>
           <a:prstGeom prst="rect">
@@ -4989,13 +5563,13 @@
       </p:sp>
       <p:sp>
         <p:nvSpPr>
-          <p:cNvPr id="7" name="Text 5"/>
+          <p:cNvPr id="9" name="Text 7"/>
           <p:cNvSpPr/>
           <p:nvPr/>
         </p:nvSpPr>
         <p:spPr>
           <a:xfrm>
-            <a:off x="406301" y="4849862"/>
+            <a:off x="406301" y="4230291"/>
             <a:ext cx="8498026" cy="426541"/>
           </a:xfrm>
           <a:prstGeom prst="rect">
@@ -5083,13 +5657,13 @@
       </p:sp>
       <p:sp>
         <p:nvSpPr>
-          <p:cNvPr id="8" name="Text 6"/>
+          <p:cNvPr id="10" name="Text 8"/>
           <p:cNvSpPr/>
           <p:nvPr/>
         </p:nvSpPr>
         <p:spPr>
           <a:xfrm>
-            <a:off x="634901" y="5365254"/>
+            <a:off x="634901" y="4745682"/>
             <a:ext cx="8102798" cy="281880"/>
           </a:xfrm>
           <a:prstGeom prst="rect">
@@ -5129,13 +5703,13 @@
       </p:sp>
       <p:sp>
         <p:nvSpPr>
-          <p:cNvPr id="9" name="Text 7"/>
+          <p:cNvPr id="11" name="Text 9"/>
           <p:cNvSpPr/>
           <p:nvPr/>
         </p:nvSpPr>
         <p:spPr>
           <a:xfrm>
-            <a:off x="406301" y="5735985"/>
+            <a:off x="406301" y="5116413"/>
             <a:ext cx="8498026" cy="853083"/>
           </a:xfrm>
           <a:prstGeom prst="rect">
@@ -5361,13 +5935,13 @@
       </p:sp>
       <p:sp>
         <p:nvSpPr>
-          <p:cNvPr id="10" name="Text 8"/>
+          <p:cNvPr id="12" name="Text 10"/>
           <p:cNvSpPr/>
           <p:nvPr/>
         </p:nvSpPr>
         <p:spPr>
           <a:xfrm>
-            <a:off x="634901" y="6677918"/>
+            <a:off x="634901" y="6058346"/>
             <a:ext cx="8102798" cy="281880"/>
           </a:xfrm>
           <a:prstGeom prst="rect">
@@ -5427,13 +6001,13 @@
       </p:sp>
       <p:sp>
         <p:nvSpPr>
-          <p:cNvPr id="11" name="Text 9"/>
+          <p:cNvPr id="13" name="Text 11"/>
           <p:cNvSpPr/>
           <p:nvPr/>
         </p:nvSpPr>
         <p:spPr>
           <a:xfrm>
-            <a:off x="406301" y="7048649"/>
+            <a:off x="406301" y="6429077"/>
             <a:ext cx="8498026" cy="1066354"/>
           </a:xfrm>
           <a:prstGeom prst="rect">
@@ -5567,13 +6141,13 @@
       </p:sp>
       <p:sp>
         <p:nvSpPr>
-          <p:cNvPr id="12" name="Text 10"/>
+          <p:cNvPr id="14" name="Text 12"/>
           <p:cNvSpPr/>
           <p:nvPr/>
         </p:nvSpPr>
         <p:spPr>
           <a:xfrm>
-            <a:off x="406301" y="8191202"/>
+            <a:off x="406301" y="7571631"/>
             <a:ext cx="8498026" cy="426541"/>
           </a:xfrm>
           <a:prstGeom prst="rect">
@@ -5730,13 +6304,13 @@
       </p:sp>
       <p:sp>
         <p:nvSpPr>
-          <p:cNvPr id="13" name="Text 11"/>
+          <p:cNvPr id="15" name="Text 13"/>
           <p:cNvSpPr/>
           <p:nvPr/>
         </p:nvSpPr>
         <p:spPr>
           <a:xfrm>
-            <a:off x="406301" y="8770144"/>
+            <a:off x="406301" y="8150572"/>
             <a:ext cx="8498026" cy="213271"/>
           </a:xfrm>
           <a:prstGeom prst="rect">

--- a/exports/pptx/lessons/middle-module-04-doshas/day-05-dosha-clock.pptx
+++ b/exports/pptx/lessons/middle-module-04-doshas/day-05-dosha-clock.pptx
@@ -18,9 +18,17 @@
     <p:sldId id="266" r:id="rId12"/>
     <p:sldId id="267" r:id="rId13"/>
     <p:sldId id="268" r:id="rId14"/>
+    <p:sldId id="269" r:id="rId15"/>
+    <p:sldId id="270" r:id="rId16"/>
+    <p:sldId id="271" r:id="rId17"/>
+    <p:sldId id="272" r:id="rId18"/>
+    <p:sldId id="273" r:id="rId19"/>
+    <p:sldId id="274" r:id="rId20"/>
+    <p:sldId id="275" r:id="rId21"/>
+    <p:sldId id="276" r:id="rId22"/>
   </p:sldIdLst>
   <p:notesMasterIdLst>
-    <p:notesMasterId r:id="rId15"/>
+    <p:notesMasterId r:id="rId23"/>
   </p:notesMasterIdLst>
   <p:sldSz cx="9144000" cy="5143500"/>
   <p:notesSz cx="5143500" cy="9144000"/>
@@ -908,6 +916,534 @@
 </p:notes>
 </file>
 
+<file path=ppt/notesSlides/notesSlide14.xml><?xml version="1.0" encoding="utf-8"?>
+<p:notes xmlns:a="http://schemas.openxmlformats.org/drawingml/2006/main" xmlns:r="http://schemas.openxmlformats.org/officeDocument/2006/relationships" xmlns:p="http://schemas.openxmlformats.org/presentationml/2006/main">
+  <p:cSld>
+    <p:spTree>
+      <p:nvGrpSpPr>
+        <p:cNvPr id="1" name=""/>
+        <p:cNvGrpSpPr/>
+        <p:nvPr/>
+      </p:nvGrpSpPr>
+      <p:grpSpPr>
+        <a:xfrm>
+          <a:off x="0" y="0"/>
+          <a:ext cx="0" cy="0"/>
+          <a:chOff x="0" y="0"/>
+          <a:chExt cx="0" cy="0"/>
+        </a:xfrm>
+      </p:grpSpPr>
+      <p:sp>
+        <p:nvSpPr>
+          <p:cNvPr id="2" name="Slide Image Placeholder 1"/>
+          <p:cNvSpPr>
+            <a:spLocks noGrp="1" noRot="1" noChangeAspect="1"/>
+          </p:cNvSpPr>
+          <p:nvPr>
+            <p:ph type="sldImg"/>
+          </p:nvPr>
+        </p:nvSpPr>
+        <p:spPr/>
+      </p:sp>
+      <p:sp>
+        <p:nvSpPr>
+          <p:cNvPr id="3" name="Notes Placeholder 2"/>
+          <p:cNvSpPr>
+            <a:spLocks noGrp="1"/>
+          </p:cNvSpPr>
+          <p:nvPr>
+            <p:ph type="body" idx="1"/>
+          </p:nvPr>
+        </p:nvSpPr>
+        <p:spPr/>
+        <p:txBody>
+          <a:bodyPr/>
+          <a:lstStyle/>
+          <a:p>
+            <a:r>
+              <a:rPr lang="en-US" dirty="0"/>
+              <a:t/>
+            </a:r>
+            <a:endParaRPr lang="en-US" dirty="0"/>
+          </a:p>
+        </p:txBody>
+      </p:sp>
+      <p:sp>
+        <p:nvSpPr>
+          <p:cNvPr id="4" name="Slide Number Placeholder 3"/>
+          <p:cNvSpPr>
+            <a:spLocks noGrp="1"/>
+          </p:cNvSpPr>
+          <p:nvPr>
+            <p:ph type="sldNum" sz="quarter" idx="10"/>
+          </p:nvPr>
+        </p:nvSpPr>
+        <p:spPr/>
+        <p:txBody>
+          <a:bodyPr/>
+          <a:lstStyle/>
+          <a:p>
+            <a:fld id="{F7021451-1387-4CA6-816F-3879F97B5CBC}" type="slidenum">
+              <a:rPr lang="en-US"/>
+              <a:t>14</a:t>
+            </a:fld>
+            <a:endParaRPr lang="en-US"/>
+          </a:p>
+        </p:txBody>
+      </p:sp>
+    </p:spTree>
+    <p:extLst>
+      <p:ext uri="{BB962C8B-B14F-4D97-AF65-F5344CB8AC3E}">
+        <p14:creationId xmlns:p14="http://schemas.microsoft.com/office/powerpoint/2010/main" val="1024086991"/>
+      </p:ext>
+    </p:extLst>
+  </p:cSld>
+  <p:clrMapOvr>
+    <a:masterClrMapping/>
+  </p:clrMapOvr>
+</p:notes>
+</file>
+
+<file path=ppt/notesSlides/notesSlide15.xml><?xml version="1.0" encoding="utf-8"?>
+<p:notes xmlns:a="http://schemas.openxmlformats.org/drawingml/2006/main" xmlns:r="http://schemas.openxmlformats.org/officeDocument/2006/relationships" xmlns:p="http://schemas.openxmlformats.org/presentationml/2006/main">
+  <p:cSld>
+    <p:spTree>
+      <p:nvGrpSpPr>
+        <p:cNvPr id="1" name=""/>
+        <p:cNvGrpSpPr/>
+        <p:nvPr/>
+      </p:nvGrpSpPr>
+      <p:grpSpPr>
+        <a:xfrm>
+          <a:off x="0" y="0"/>
+          <a:ext cx="0" cy="0"/>
+          <a:chOff x="0" y="0"/>
+          <a:chExt cx="0" cy="0"/>
+        </a:xfrm>
+      </p:grpSpPr>
+      <p:sp>
+        <p:nvSpPr>
+          <p:cNvPr id="2" name="Slide Image Placeholder 1"/>
+          <p:cNvSpPr>
+            <a:spLocks noGrp="1" noRot="1" noChangeAspect="1"/>
+          </p:cNvSpPr>
+          <p:nvPr>
+            <p:ph type="sldImg"/>
+          </p:nvPr>
+        </p:nvSpPr>
+        <p:spPr/>
+      </p:sp>
+      <p:sp>
+        <p:nvSpPr>
+          <p:cNvPr id="3" name="Notes Placeholder 2"/>
+          <p:cNvSpPr>
+            <a:spLocks noGrp="1"/>
+          </p:cNvSpPr>
+          <p:nvPr>
+            <p:ph type="body" idx="1"/>
+          </p:nvPr>
+        </p:nvSpPr>
+        <p:spPr/>
+        <p:txBody>
+          <a:bodyPr/>
+          <a:lstStyle/>
+          <a:p>
+            <a:r>
+              <a:rPr lang="en-US" dirty="0"/>
+              <a:t/>
+            </a:r>
+            <a:endParaRPr lang="en-US" dirty="0"/>
+          </a:p>
+        </p:txBody>
+      </p:sp>
+      <p:sp>
+        <p:nvSpPr>
+          <p:cNvPr id="4" name="Slide Number Placeholder 3"/>
+          <p:cNvSpPr>
+            <a:spLocks noGrp="1"/>
+          </p:cNvSpPr>
+          <p:nvPr>
+            <p:ph type="sldNum" sz="quarter" idx="10"/>
+          </p:nvPr>
+        </p:nvSpPr>
+        <p:spPr/>
+        <p:txBody>
+          <a:bodyPr/>
+          <a:lstStyle/>
+          <a:p>
+            <a:fld id="{F7021451-1387-4CA6-816F-3879F97B5CBC}" type="slidenum">
+              <a:rPr lang="en-US"/>
+              <a:t>15</a:t>
+            </a:fld>
+            <a:endParaRPr lang="en-US"/>
+          </a:p>
+        </p:txBody>
+      </p:sp>
+    </p:spTree>
+    <p:extLst>
+      <p:ext uri="{BB962C8B-B14F-4D97-AF65-F5344CB8AC3E}">
+        <p14:creationId xmlns:p14="http://schemas.microsoft.com/office/powerpoint/2010/main" val="1024086991"/>
+      </p:ext>
+    </p:extLst>
+  </p:cSld>
+  <p:clrMapOvr>
+    <a:masterClrMapping/>
+  </p:clrMapOvr>
+</p:notes>
+</file>
+
+<file path=ppt/notesSlides/notesSlide16.xml><?xml version="1.0" encoding="utf-8"?>
+<p:notes xmlns:a="http://schemas.openxmlformats.org/drawingml/2006/main" xmlns:r="http://schemas.openxmlformats.org/officeDocument/2006/relationships" xmlns:p="http://schemas.openxmlformats.org/presentationml/2006/main">
+  <p:cSld>
+    <p:spTree>
+      <p:nvGrpSpPr>
+        <p:cNvPr id="1" name=""/>
+        <p:cNvGrpSpPr/>
+        <p:nvPr/>
+      </p:nvGrpSpPr>
+      <p:grpSpPr>
+        <a:xfrm>
+          <a:off x="0" y="0"/>
+          <a:ext cx="0" cy="0"/>
+          <a:chOff x="0" y="0"/>
+          <a:chExt cx="0" cy="0"/>
+        </a:xfrm>
+      </p:grpSpPr>
+      <p:sp>
+        <p:nvSpPr>
+          <p:cNvPr id="2" name="Slide Image Placeholder 1"/>
+          <p:cNvSpPr>
+            <a:spLocks noGrp="1" noRot="1" noChangeAspect="1"/>
+          </p:cNvSpPr>
+          <p:nvPr>
+            <p:ph type="sldImg"/>
+          </p:nvPr>
+        </p:nvSpPr>
+        <p:spPr/>
+      </p:sp>
+      <p:sp>
+        <p:nvSpPr>
+          <p:cNvPr id="3" name="Notes Placeholder 2"/>
+          <p:cNvSpPr>
+            <a:spLocks noGrp="1"/>
+          </p:cNvSpPr>
+          <p:nvPr>
+            <p:ph type="body" idx="1"/>
+          </p:nvPr>
+        </p:nvSpPr>
+        <p:spPr/>
+        <p:txBody>
+          <a:bodyPr/>
+          <a:lstStyle/>
+          <a:p>
+            <a:r>
+              <a:rPr lang="en-US" dirty="0"/>
+              <a:t/>
+            </a:r>
+            <a:endParaRPr lang="en-US" dirty="0"/>
+          </a:p>
+        </p:txBody>
+      </p:sp>
+      <p:sp>
+        <p:nvSpPr>
+          <p:cNvPr id="4" name="Slide Number Placeholder 3"/>
+          <p:cNvSpPr>
+            <a:spLocks noGrp="1"/>
+          </p:cNvSpPr>
+          <p:nvPr>
+            <p:ph type="sldNum" sz="quarter" idx="10"/>
+          </p:nvPr>
+        </p:nvSpPr>
+        <p:spPr/>
+        <p:txBody>
+          <a:bodyPr/>
+          <a:lstStyle/>
+          <a:p>
+            <a:fld id="{F7021451-1387-4CA6-816F-3879F97B5CBC}" type="slidenum">
+              <a:rPr lang="en-US"/>
+              <a:t>16</a:t>
+            </a:fld>
+            <a:endParaRPr lang="en-US"/>
+          </a:p>
+        </p:txBody>
+      </p:sp>
+    </p:spTree>
+    <p:extLst>
+      <p:ext uri="{BB962C8B-B14F-4D97-AF65-F5344CB8AC3E}">
+        <p14:creationId xmlns:p14="http://schemas.microsoft.com/office/powerpoint/2010/main" val="1024086991"/>
+      </p:ext>
+    </p:extLst>
+  </p:cSld>
+  <p:clrMapOvr>
+    <a:masterClrMapping/>
+  </p:clrMapOvr>
+</p:notes>
+</file>
+
+<file path=ppt/notesSlides/notesSlide17.xml><?xml version="1.0" encoding="utf-8"?>
+<p:notes xmlns:a="http://schemas.openxmlformats.org/drawingml/2006/main" xmlns:r="http://schemas.openxmlformats.org/officeDocument/2006/relationships" xmlns:p="http://schemas.openxmlformats.org/presentationml/2006/main">
+  <p:cSld>
+    <p:spTree>
+      <p:nvGrpSpPr>
+        <p:cNvPr id="1" name=""/>
+        <p:cNvGrpSpPr/>
+        <p:nvPr/>
+      </p:nvGrpSpPr>
+      <p:grpSpPr>
+        <a:xfrm>
+          <a:off x="0" y="0"/>
+          <a:ext cx="0" cy="0"/>
+          <a:chOff x="0" y="0"/>
+          <a:chExt cx="0" cy="0"/>
+        </a:xfrm>
+      </p:grpSpPr>
+      <p:sp>
+        <p:nvSpPr>
+          <p:cNvPr id="2" name="Slide Image Placeholder 1"/>
+          <p:cNvSpPr>
+            <a:spLocks noGrp="1" noRot="1" noChangeAspect="1"/>
+          </p:cNvSpPr>
+          <p:nvPr>
+            <p:ph type="sldImg"/>
+          </p:nvPr>
+        </p:nvSpPr>
+        <p:spPr/>
+      </p:sp>
+      <p:sp>
+        <p:nvSpPr>
+          <p:cNvPr id="3" name="Notes Placeholder 2"/>
+          <p:cNvSpPr>
+            <a:spLocks noGrp="1"/>
+          </p:cNvSpPr>
+          <p:nvPr>
+            <p:ph type="body" idx="1"/>
+          </p:nvPr>
+        </p:nvSpPr>
+        <p:spPr/>
+        <p:txBody>
+          <a:bodyPr/>
+          <a:lstStyle/>
+          <a:p>
+            <a:r>
+              <a:rPr lang="en-US" dirty="0"/>
+              <a:t/>
+            </a:r>
+            <a:endParaRPr lang="en-US" dirty="0"/>
+          </a:p>
+        </p:txBody>
+      </p:sp>
+      <p:sp>
+        <p:nvSpPr>
+          <p:cNvPr id="4" name="Slide Number Placeholder 3"/>
+          <p:cNvSpPr>
+            <a:spLocks noGrp="1"/>
+          </p:cNvSpPr>
+          <p:nvPr>
+            <p:ph type="sldNum" sz="quarter" idx="10"/>
+          </p:nvPr>
+        </p:nvSpPr>
+        <p:spPr/>
+        <p:txBody>
+          <a:bodyPr/>
+          <a:lstStyle/>
+          <a:p>
+            <a:fld id="{F7021451-1387-4CA6-816F-3879F97B5CBC}" type="slidenum">
+              <a:rPr lang="en-US"/>
+              <a:t>17</a:t>
+            </a:fld>
+            <a:endParaRPr lang="en-US"/>
+          </a:p>
+        </p:txBody>
+      </p:sp>
+    </p:spTree>
+    <p:extLst>
+      <p:ext uri="{BB962C8B-B14F-4D97-AF65-F5344CB8AC3E}">
+        <p14:creationId xmlns:p14="http://schemas.microsoft.com/office/powerpoint/2010/main" val="1024086991"/>
+      </p:ext>
+    </p:extLst>
+  </p:cSld>
+  <p:clrMapOvr>
+    <a:masterClrMapping/>
+  </p:clrMapOvr>
+</p:notes>
+</file>
+
+<file path=ppt/notesSlides/notesSlide18.xml><?xml version="1.0" encoding="utf-8"?>
+<p:notes xmlns:a="http://schemas.openxmlformats.org/drawingml/2006/main" xmlns:r="http://schemas.openxmlformats.org/officeDocument/2006/relationships" xmlns:p="http://schemas.openxmlformats.org/presentationml/2006/main">
+  <p:cSld>
+    <p:spTree>
+      <p:nvGrpSpPr>
+        <p:cNvPr id="1" name=""/>
+        <p:cNvGrpSpPr/>
+        <p:nvPr/>
+      </p:nvGrpSpPr>
+      <p:grpSpPr>
+        <a:xfrm>
+          <a:off x="0" y="0"/>
+          <a:ext cx="0" cy="0"/>
+          <a:chOff x="0" y="0"/>
+          <a:chExt cx="0" cy="0"/>
+        </a:xfrm>
+      </p:grpSpPr>
+      <p:sp>
+        <p:nvSpPr>
+          <p:cNvPr id="2" name="Slide Image Placeholder 1"/>
+          <p:cNvSpPr>
+            <a:spLocks noGrp="1" noRot="1" noChangeAspect="1"/>
+          </p:cNvSpPr>
+          <p:nvPr>
+            <p:ph type="sldImg"/>
+          </p:nvPr>
+        </p:nvSpPr>
+        <p:spPr/>
+      </p:sp>
+      <p:sp>
+        <p:nvSpPr>
+          <p:cNvPr id="3" name="Notes Placeholder 2"/>
+          <p:cNvSpPr>
+            <a:spLocks noGrp="1"/>
+          </p:cNvSpPr>
+          <p:nvPr>
+            <p:ph type="body" idx="1"/>
+          </p:nvPr>
+        </p:nvSpPr>
+        <p:spPr/>
+        <p:txBody>
+          <a:bodyPr/>
+          <a:lstStyle/>
+          <a:p>
+            <a:r>
+              <a:rPr lang="en-US" dirty="0"/>
+              <a:t/>
+            </a:r>
+            <a:endParaRPr lang="en-US" dirty="0"/>
+          </a:p>
+        </p:txBody>
+      </p:sp>
+      <p:sp>
+        <p:nvSpPr>
+          <p:cNvPr id="4" name="Slide Number Placeholder 3"/>
+          <p:cNvSpPr>
+            <a:spLocks noGrp="1"/>
+          </p:cNvSpPr>
+          <p:nvPr>
+            <p:ph type="sldNum" sz="quarter" idx="10"/>
+          </p:nvPr>
+        </p:nvSpPr>
+        <p:spPr/>
+        <p:txBody>
+          <a:bodyPr/>
+          <a:lstStyle/>
+          <a:p>
+            <a:fld id="{F7021451-1387-4CA6-816F-3879F97B5CBC}" type="slidenum">
+              <a:rPr lang="en-US"/>
+              <a:t>18</a:t>
+            </a:fld>
+            <a:endParaRPr lang="en-US"/>
+          </a:p>
+        </p:txBody>
+      </p:sp>
+    </p:spTree>
+    <p:extLst>
+      <p:ext uri="{BB962C8B-B14F-4D97-AF65-F5344CB8AC3E}">
+        <p14:creationId xmlns:p14="http://schemas.microsoft.com/office/powerpoint/2010/main" val="1024086991"/>
+      </p:ext>
+    </p:extLst>
+  </p:cSld>
+  <p:clrMapOvr>
+    <a:masterClrMapping/>
+  </p:clrMapOvr>
+</p:notes>
+</file>
+
+<file path=ppt/notesSlides/notesSlide19.xml><?xml version="1.0" encoding="utf-8"?>
+<p:notes xmlns:a="http://schemas.openxmlformats.org/drawingml/2006/main" xmlns:r="http://schemas.openxmlformats.org/officeDocument/2006/relationships" xmlns:p="http://schemas.openxmlformats.org/presentationml/2006/main">
+  <p:cSld>
+    <p:spTree>
+      <p:nvGrpSpPr>
+        <p:cNvPr id="1" name=""/>
+        <p:cNvGrpSpPr/>
+        <p:nvPr/>
+      </p:nvGrpSpPr>
+      <p:grpSpPr>
+        <a:xfrm>
+          <a:off x="0" y="0"/>
+          <a:ext cx="0" cy="0"/>
+          <a:chOff x="0" y="0"/>
+          <a:chExt cx="0" cy="0"/>
+        </a:xfrm>
+      </p:grpSpPr>
+      <p:sp>
+        <p:nvSpPr>
+          <p:cNvPr id="2" name="Slide Image Placeholder 1"/>
+          <p:cNvSpPr>
+            <a:spLocks noGrp="1" noRot="1" noChangeAspect="1"/>
+          </p:cNvSpPr>
+          <p:nvPr>
+            <p:ph type="sldImg"/>
+          </p:nvPr>
+        </p:nvSpPr>
+        <p:spPr/>
+      </p:sp>
+      <p:sp>
+        <p:nvSpPr>
+          <p:cNvPr id="3" name="Notes Placeholder 2"/>
+          <p:cNvSpPr>
+            <a:spLocks noGrp="1"/>
+          </p:cNvSpPr>
+          <p:nvPr>
+            <p:ph type="body" idx="1"/>
+          </p:nvPr>
+        </p:nvSpPr>
+        <p:spPr/>
+        <p:txBody>
+          <a:bodyPr/>
+          <a:lstStyle/>
+          <a:p>
+            <a:r>
+              <a:rPr lang="en-US" dirty="0"/>
+              <a:t/>
+            </a:r>
+            <a:endParaRPr lang="en-US" dirty="0"/>
+          </a:p>
+        </p:txBody>
+      </p:sp>
+      <p:sp>
+        <p:nvSpPr>
+          <p:cNvPr id="4" name="Slide Number Placeholder 3"/>
+          <p:cNvSpPr>
+            <a:spLocks noGrp="1"/>
+          </p:cNvSpPr>
+          <p:nvPr>
+            <p:ph type="sldNum" sz="quarter" idx="10"/>
+          </p:nvPr>
+        </p:nvSpPr>
+        <p:spPr/>
+        <p:txBody>
+          <a:bodyPr/>
+          <a:lstStyle/>
+          <a:p>
+            <a:fld id="{F7021451-1387-4CA6-816F-3879F97B5CBC}" type="slidenum">
+              <a:rPr lang="en-US"/>
+              <a:t>19</a:t>
+            </a:fld>
+            <a:endParaRPr lang="en-US"/>
+          </a:p>
+        </p:txBody>
+      </p:sp>
+    </p:spTree>
+    <p:extLst>
+      <p:ext uri="{BB962C8B-B14F-4D97-AF65-F5344CB8AC3E}">
+        <p14:creationId xmlns:p14="http://schemas.microsoft.com/office/powerpoint/2010/main" val="1024086991"/>
+      </p:ext>
+    </p:extLst>
+  </p:cSld>
+  <p:clrMapOvr>
+    <a:masterClrMapping/>
+  </p:clrMapOvr>
+</p:notes>
+</file>
+
 <file path=ppt/notesSlides/notesSlide2.xml><?xml version="1.0" encoding="utf-8"?>
 <p:notes xmlns:a="http://schemas.openxmlformats.org/drawingml/2006/main" xmlns:r="http://schemas.openxmlformats.org/officeDocument/2006/relationships" xmlns:p="http://schemas.openxmlformats.org/presentationml/2006/main">
   <p:cSld>
@@ -978,6 +1514,182 @@
             <a:fld id="{F7021451-1387-4CA6-816F-3879F97B5CBC}" type="slidenum">
               <a:rPr lang="en-US"/>
               <a:t>2</a:t>
+            </a:fld>
+            <a:endParaRPr lang="en-US"/>
+          </a:p>
+        </p:txBody>
+      </p:sp>
+    </p:spTree>
+    <p:extLst>
+      <p:ext uri="{BB962C8B-B14F-4D97-AF65-F5344CB8AC3E}">
+        <p14:creationId xmlns:p14="http://schemas.microsoft.com/office/powerpoint/2010/main" val="1024086991"/>
+      </p:ext>
+    </p:extLst>
+  </p:cSld>
+  <p:clrMapOvr>
+    <a:masterClrMapping/>
+  </p:clrMapOvr>
+</p:notes>
+</file>
+
+<file path=ppt/notesSlides/notesSlide20.xml><?xml version="1.0" encoding="utf-8"?>
+<p:notes xmlns:a="http://schemas.openxmlformats.org/drawingml/2006/main" xmlns:r="http://schemas.openxmlformats.org/officeDocument/2006/relationships" xmlns:p="http://schemas.openxmlformats.org/presentationml/2006/main">
+  <p:cSld>
+    <p:spTree>
+      <p:nvGrpSpPr>
+        <p:cNvPr id="1" name=""/>
+        <p:cNvGrpSpPr/>
+        <p:nvPr/>
+      </p:nvGrpSpPr>
+      <p:grpSpPr>
+        <a:xfrm>
+          <a:off x="0" y="0"/>
+          <a:ext cx="0" cy="0"/>
+          <a:chOff x="0" y="0"/>
+          <a:chExt cx="0" cy="0"/>
+        </a:xfrm>
+      </p:grpSpPr>
+      <p:sp>
+        <p:nvSpPr>
+          <p:cNvPr id="2" name="Slide Image Placeholder 1"/>
+          <p:cNvSpPr>
+            <a:spLocks noGrp="1" noRot="1" noChangeAspect="1"/>
+          </p:cNvSpPr>
+          <p:nvPr>
+            <p:ph type="sldImg"/>
+          </p:nvPr>
+        </p:nvSpPr>
+        <p:spPr/>
+      </p:sp>
+      <p:sp>
+        <p:nvSpPr>
+          <p:cNvPr id="3" name="Notes Placeholder 2"/>
+          <p:cNvSpPr>
+            <a:spLocks noGrp="1"/>
+          </p:cNvSpPr>
+          <p:nvPr>
+            <p:ph type="body" idx="1"/>
+          </p:nvPr>
+        </p:nvSpPr>
+        <p:spPr/>
+        <p:txBody>
+          <a:bodyPr/>
+          <a:lstStyle/>
+          <a:p>
+            <a:r>
+              <a:rPr lang="en-US" dirty="0"/>
+              <a:t/>
+            </a:r>
+            <a:endParaRPr lang="en-US" dirty="0"/>
+          </a:p>
+        </p:txBody>
+      </p:sp>
+      <p:sp>
+        <p:nvSpPr>
+          <p:cNvPr id="4" name="Slide Number Placeholder 3"/>
+          <p:cNvSpPr>
+            <a:spLocks noGrp="1"/>
+          </p:cNvSpPr>
+          <p:nvPr>
+            <p:ph type="sldNum" sz="quarter" idx="10"/>
+          </p:nvPr>
+        </p:nvSpPr>
+        <p:spPr/>
+        <p:txBody>
+          <a:bodyPr/>
+          <a:lstStyle/>
+          <a:p>
+            <a:fld id="{F7021451-1387-4CA6-816F-3879F97B5CBC}" type="slidenum">
+              <a:rPr lang="en-US"/>
+              <a:t>20</a:t>
+            </a:fld>
+            <a:endParaRPr lang="en-US"/>
+          </a:p>
+        </p:txBody>
+      </p:sp>
+    </p:spTree>
+    <p:extLst>
+      <p:ext uri="{BB962C8B-B14F-4D97-AF65-F5344CB8AC3E}">
+        <p14:creationId xmlns:p14="http://schemas.microsoft.com/office/powerpoint/2010/main" val="1024086991"/>
+      </p:ext>
+    </p:extLst>
+  </p:cSld>
+  <p:clrMapOvr>
+    <a:masterClrMapping/>
+  </p:clrMapOvr>
+</p:notes>
+</file>
+
+<file path=ppt/notesSlides/notesSlide21.xml><?xml version="1.0" encoding="utf-8"?>
+<p:notes xmlns:a="http://schemas.openxmlformats.org/drawingml/2006/main" xmlns:r="http://schemas.openxmlformats.org/officeDocument/2006/relationships" xmlns:p="http://schemas.openxmlformats.org/presentationml/2006/main">
+  <p:cSld>
+    <p:spTree>
+      <p:nvGrpSpPr>
+        <p:cNvPr id="1" name=""/>
+        <p:cNvGrpSpPr/>
+        <p:nvPr/>
+      </p:nvGrpSpPr>
+      <p:grpSpPr>
+        <a:xfrm>
+          <a:off x="0" y="0"/>
+          <a:ext cx="0" cy="0"/>
+          <a:chOff x="0" y="0"/>
+          <a:chExt cx="0" cy="0"/>
+        </a:xfrm>
+      </p:grpSpPr>
+      <p:sp>
+        <p:nvSpPr>
+          <p:cNvPr id="2" name="Slide Image Placeholder 1"/>
+          <p:cNvSpPr>
+            <a:spLocks noGrp="1" noRot="1" noChangeAspect="1"/>
+          </p:cNvSpPr>
+          <p:nvPr>
+            <p:ph type="sldImg"/>
+          </p:nvPr>
+        </p:nvSpPr>
+        <p:spPr/>
+      </p:sp>
+      <p:sp>
+        <p:nvSpPr>
+          <p:cNvPr id="3" name="Notes Placeholder 2"/>
+          <p:cNvSpPr>
+            <a:spLocks noGrp="1"/>
+          </p:cNvSpPr>
+          <p:nvPr>
+            <p:ph type="body" idx="1"/>
+          </p:nvPr>
+        </p:nvSpPr>
+        <p:spPr/>
+        <p:txBody>
+          <a:bodyPr/>
+          <a:lstStyle/>
+          <a:p>
+            <a:r>
+              <a:rPr lang="en-US" dirty="0"/>
+              <a:t/>
+            </a:r>
+            <a:endParaRPr lang="en-US" dirty="0"/>
+          </a:p>
+        </p:txBody>
+      </p:sp>
+      <p:sp>
+        <p:nvSpPr>
+          <p:cNvPr id="4" name="Slide Number Placeholder 3"/>
+          <p:cNvSpPr>
+            <a:spLocks noGrp="1"/>
+          </p:cNvSpPr>
+          <p:nvPr>
+            <p:ph type="sldNum" sz="quarter" idx="10"/>
+          </p:nvPr>
+        </p:nvSpPr>
+        <p:spPr/>
+        <p:txBody>
+          <a:bodyPr/>
+          <a:lstStyle/>
+          <a:p>
+            <a:fld id="{F7021451-1387-4CA6-816F-3879F97B5CBC}" type="slidenum">
+              <a:rPr lang="en-US"/>
+              <a:t>21</a:t>
             </a:fld>
             <a:endParaRPr lang="en-US"/>
           </a:p>
@@ -2189,286 +2901,6 @@
         </p:nvSpPr>
         <p:spPr>
           <a:xfrm>
-            <a:off x="406301" y="1223963"/>
-            <a:ext cx="8498026" cy="274290"/>
-          </a:xfrm>
-          <a:prstGeom prst="rect">
-            <a:avLst/>
-          </a:prstGeom>
-          <a:noFill/>
-          <a:ln/>
-        </p:spPr>
-        <p:txBody>
-          <a:bodyPr wrap="square" lIns="0" tIns="0" rIns="0" bIns="0" rtlCol="0" anchor="t"/>
-          <a:lstStyle/>
-          <a:p>
-            <a:pPr algn="l" indent="0" marL="0">
-              <a:lnSpc>
-                <a:spcPts val="2160"/>
-              </a:lnSpc>
-              <a:spcBef>
-                <a:spcPts val="600"/>
-              </a:spcBef>
-              <a:spcAft>
-                <a:spcPts val="800"/>
-              </a:spcAft>
-              <a:buNone/>
-            </a:pPr>
-            <a:r>
-              <a:rPr lang="en-US" sz="1800" b="1" dirty="0">
-                <a:solidFill>
-                  <a:srgbClr val="FE4447"/>
-                </a:solidFill>
-                <a:latin typeface="Georgia" pitchFamily="34" charset="0"/>
-                <a:ea typeface="Georgia" pitchFamily="34" charset="-122"/>
-                <a:cs typeface="Georgia" pitchFamily="34" charset="-120"/>
-              </a:rPr>
-              <a:t>Learning objective</a:t>
-            </a:r>
-            <a:endParaRPr lang="en-US" sz="1800" dirty="0"/>
-          </a:p>
-        </p:txBody>
-      </p:sp>
-      <p:sp>
-        <p:nvSpPr>
-          <p:cNvPr id="6" name="Text 4"/>
-          <p:cNvSpPr/>
-          <p:nvPr/>
-        </p:nvSpPr>
-        <p:spPr>
-          <a:xfrm>
-            <a:off x="406301" y="1637854"/>
-            <a:ext cx="8498026" cy="426541"/>
-          </a:xfrm>
-          <a:prstGeom prst="rect">
-            <a:avLst/>
-          </a:prstGeom>
-          <a:noFill/>
-          <a:ln/>
-        </p:spPr>
-        <p:txBody>
-          <a:bodyPr wrap="square" lIns="0" tIns="0" rIns="0" bIns="0" rtlCol="0" anchor="t"/>
-          <a:lstStyle/>
-          <a:p>
-            <a:pPr algn="l" indent="0" marL="0">
-              <a:lnSpc>
-                <a:spcPts val="1680"/>
-              </a:lnSpc>
-              <a:spcBef>
-                <a:spcPts val="300"/>
-              </a:spcBef>
-              <a:spcAft>
-                <a:spcPts val="300"/>
-              </a:spcAft>
-              <a:buNone/>
-            </a:pPr>
-            <a:r>
-              <a:rPr lang="en-US" sz="1200" dirty="0">
-                <a:solidFill>
-                  <a:srgbClr val="1C2833"/>
-                </a:solidFill>
-                <a:latin typeface="Arial" pitchFamily="34" charset="0"/>
-                <a:ea typeface="Arial" pitchFamily="34" charset="-122"/>
-                <a:cs typeface="Arial" pitchFamily="34" charset="-120"/>
-              </a:rPr>
-              <a:t>By the end of this lesson, students name the six 4-hour windows of the </a:t>
-            </a:r>
-            <a:pPr algn="l" indent="0" marL="0">
-              <a:lnSpc>
-                <a:spcPts val="1680"/>
-              </a:lnSpc>
-              <a:spcBef>
-                <a:spcPts val="300"/>
-              </a:spcBef>
-              <a:spcAft>
-                <a:spcPts val="300"/>
-              </a:spcAft>
-              <a:buNone/>
-            </a:pPr>
-            <a:r>
-              <a:rPr lang="en-US" sz="1200" i="1" dirty="0">
-                <a:solidFill>
-                  <a:srgbClr val="1C2833"/>
-                </a:solidFill>
-                <a:latin typeface="Arial" pitchFamily="34" charset="0"/>
-                <a:ea typeface="Arial" pitchFamily="34" charset="-122"/>
-                <a:cs typeface="Arial" pitchFamily="34" charset="-120"/>
-              </a:rPr>
-              <a:t>doṣa</a:t>
-            </a:r>
-            <a:pPr algn="l" indent="0" marL="0">
-              <a:lnSpc>
-                <a:spcPts val="1680"/>
-              </a:lnSpc>
-              <a:spcBef>
-                <a:spcPts val="300"/>
-              </a:spcBef>
-              <a:spcAft>
-                <a:spcPts val="300"/>
-              </a:spcAft>
-              <a:buNone/>
-            </a:pPr>
-            <a:r>
-              <a:rPr lang="en-US" sz="1200" dirty="0">
-                <a:solidFill>
-                  <a:srgbClr val="1C2833"/>
-                </a:solidFill>
-                <a:latin typeface="Arial" pitchFamily="34" charset="0"/>
-                <a:ea typeface="Arial" pitchFamily="34" charset="-122"/>
-                <a:cs typeface="Arial" pitchFamily="34" charset="-120"/>
-              </a:rPr>
-              <a:t> day-clock with their dominant </a:t>
-            </a:r>
-            <a:pPr algn="l" indent="0" marL="0">
-              <a:lnSpc>
-                <a:spcPts val="1680"/>
-              </a:lnSpc>
-              <a:spcBef>
-                <a:spcPts val="300"/>
-              </a:spcBef>
-              <a:spcAft>
-                <a:spcPts val="300"/>
-              </a:spcAft>
-              <a:buNone/>
-            </a:pPr>
-            <a:r>
-              <a:rPr lang="en-US" sz="1200" i="1" dirty="0">
-                <a:solidFill>
-                  <a:srgbClr val="1C2833"/>
-                </a:solidFill>
-                <a:latin typeface="Arial" pitchFamily="34" charset="0"/>
-                <a:ea typeface="Arial" pitchFamily="34" charset="-122"/>
-                <a:cs typeface="Arial" pitchFamily="34" charset="-120"/>
-              </a:rPr>
-              <a:t>doṣa</a:t>
-            </a:r>
-            <a:pPr algn="l" indent="0" marL="0">
-              <a:lnSpc>
-                <a:spcPts val="1680"/>
-              </a:lnSpc>
-              <a:spcBef>
-                <a:spcPts val="300"/>
-              </a:spcBef>
-              <a:spcAft>
-                <a:spcPts val="300"/>
-              </a:spcAft>
-              <a:buNone/>
-            </a:pPr>
-            <a:r>
-              <a:rPr lang="en-US" sz="1200" dirty="0">
-                <a:solidFill>
-                  <a:srgbClr val="1C2833"/>
-                </a:solidFill>
-                <a:latin typeface="Arial" pitchFamily="34" charset="0"/>
-                <a:ea typeface="Arial" pitchFamily="34" charset="-122"/>
-                <a:cs typeface="Arial" pitchFamily="34" charset="-120"/>
-              </a:rPr>
-              <a:t>, explain </a:t>
-            </a:r>
-            <a:pPr algn="l" indent="0" marL="0">
-              <a:lnSpc>
-                <a:spcPts val="1680"/>
-              </a:lnSpc>
-              <a:spcBef>
-                <a:spcPts val="300"/>
-              </a:spcBef>
-              <a:spcAft>
-                <a:spcPts val="300"/>
-              </a:spcAft>
-              <a:buNone/>
-            </a:pPr>
-            <a:r>
-              <a:rPr lang="en-US" sz="1200" i="1" dirty="0">
-                <a:solidFill>
-                  <a:srgbClr val="1C2833"/>
-                </a:solidFill>
-                <a:latin typeface="Arial" pitchFamily="34" charset="0"/>
-                <a:ea typeface="Arial" pitchFamily="34" charset="-122"/>
-                <a:cs typeface="Arial" pitchFamily="34" charset="-120"/>
-              </a:rPr>
-              <a:t>why</a:t>
-            </a:r>
-            <a:pPr algn="l" indent="0" marL="0">
-              <a:lnSpc>
-                <a:spcPts val="1680"/>
-              </a:lnSpc>
-              <a:spcBef>
-                <a:spcPts val="300"/>
-              </a:spcBef>
-              <a:spcAft>
-                <a:spcPts val="300"/>
-              </a:spcAft>
-              <a:buNone/>
-            </a:pPr>
-            <a:r>
-              <a:rPr lang="en-US" sz="1200" dirty="0">
-                <a:solidFill>
-                  <a:srgbClr val="1C2833"/>
-                </a:solidFill>
-                <a:latin typeface="Arial" pitchFamily="34" charset="0"/>
-                <a:ea typeface="Arial" pitchFamily="34" charset="-122"/>
-                <a:cs typeface="Arial" pitchFamily="34" charset="-120"/>
-              </a:rPr>
-              <a:t> each </a:t>
-            </a:r>
-            <a:pPr algn="l" indent="0" marL="0">
-              <a:lnSpc>
-                <a:spcPts val="1680"/>
-              </a:lnSpc>
-              <a:spcBef>
-                <a:spcPts val="300"/>
-              </a:spcBef>
-              <a:spcAft>
-                <a:spcPts val="300"/>
-              </a:spcAft>
-              <a:buNone/>
-            </a:pPr>
-            <a:r>
-              <a:rPr lang="en-US" sz="1200" i="1" dirty="0">
-                <a:solidFill>
-                  <a:srgbClr val="1C2833"/>
-                </a:solidFill>
-                <a:latin typeface="Arial" pitchFamily="34" charset="0"/>
-                <a:ea typeface="Arial" pitchFamily="34" charset="-122"/>
-                <a:cs typeface="Arial" pitchFamily="34" charset="-120"/>
-              </a:rPr>
-              <a:t>doṣa</a:t>
-            </a:r>
-            <a:pPr algn="l" indent="0" marL="0">
-              <a:lnSpc>
-                <a:spcPts val="1680"/>
-              </a:lnSpc>
-              <a:spcBef>
-                <a:spcPts val="300"/>
-              </a:spcBef>
-              <a:spcAft>
-                <a:spcPts val="300"/>
-              </a:spcAft>
-              <a:buNone/>
-            </a:pPr>
-            <a:r>
-              <a:rPr lang="en-US" sz="1200" dirty="0">
-                <a:solidFill>
-                  <a:srgbClr val="1C2833"/>
-                </a:solidFill>
-                <a:latin typeface="Arial" pitchFamily="34" charset="0"/>
-                <a:ea typeface="Arial" pitchFamily="34" charset="-122"/>
-                <a:cs typeface="Arial" pitchFamily="34" charset="-120"/>
-              </a:rPr>
-              <a:t> dominates at that time, and connect this to one modern observation about circadian biology.</a:t>
-            </a:r>
-            <a:endParaRPr lang="en-US" sz="1200" dirty="0"/>
-          </a:p>
-        </p:txBody>
-      </p:sp>
-      <p:sp>
-        <p:nvSpPr>
-          <p:cNvPr id="7" name="Text 5"/>
-          <p:cNvSpPr/>
-          <p:nvPr/>
-        </p:nvSpPr>
-        <p:spPr>
-          <a:xfrm>
             <a:off x="406301" y="4434929"/>
             <a:ext cx="8498026" cy="213271"/>
           </a:xfrm>
@@ -2613,7 +3045,7 @@
                 <a:ea typeface="Georgia" pitchFamily="34" charset="-122"/>
                 <a:cs typeface="Georgia" pitchFamily="34" charset="-120"/>
               </a:rPr>
-              <a:t>Homework</a:t>
+              <a:t>Core (20 min) (cont.)</a:t>
             </a:r>
             <a:endParaRPr lang="en-US" sz="1800" dirty="0"/>
           </a:p>
@@ -2627,8 +3059,61 @@
         </p:nvSpPr>
         <p:spPr>
           <a:xfrm>
-            <a:off x="406301" y="870942"/>
-            <a:ext cx="8498026" cy="426541"/>
+            <a:off x="406301" y="883593"/>
+            <a:ext cx="8331398" cy="842963"/>
+          </a:xfrm>
+          <a:prstGeom prst="rect">
+            <a:avLst/>
+          </a:prstGeom>
+          <a:solidFill>
+            <a:srgbClr val="F4F8F9"/>
+          </a:solidFill>
+          <a:ln/>
+        </p:spPr>
+        <p:txBody>
+          <a:bodyPr wrap="square" rtlCol="0" anchor="ctr"/>
+          <a:lstStyle/>
+          <a:p>
+            <a:pPr indent="0" marL="0">
+              <a:buNone/>
+            </a:pPr>
+            <a:endParaRPr lang="en-US" dirty="0"/>
+          </a:p>
+        </p:txBody>
+      </p:sp>
+      <p:sp>
+        <p:nvSpPr>
+          <p:cNvPr id="5" name="Shape 3"/>
+          <p:cNvSpPr/>
+          <p:nvPr/>
+        </p:nvSpPr>
+        <p:spPr>
+          <a:xfrm>
+            <a:off x="434876" y="883593"/>
+            <a:ext cx="0" cy="842963"/>
+          </a:xfrm>
+          <a:prstGeom prst="line">
+            <a:avLst/>
+          </a:prstGeom>
+          <a:noFill/>
+          <a:ln w="57150">
+            <a:solidFill>
+              <a:srgbClr val="FE4447"/>
+            </a:solidFill>
+            <a:prstDash val="solid"/>
+          </a:ln>
+        </p:spPr>
+      </p:sp>
+      <p:sp>
+        <p:nvSpPr>
+          <p:cNvPr id="6" name="Text 4"/>
+          <p:cNvSpPr/>
+          <p:nvPr/>
+        </p:nvSpPr>
+        <p:spPr>
+          <a:xfrm>
+            <a:off x="692051" y="1074093"/>
+            <a:ext cx="7973389" cy="461963"/>
           </a:xfrm>
           <a:prstGeom prst="rect">
             <a:avLst/>
@@ -2642,7 +3127,7 @@
           <a:p>
             <a:pPr algn="l" indent="0" marL="0">
               <a:lnSpc>
-                <a:spcPts val="1680"/>
+                <a:spcPts val="1820"/>
               </a:lnSpc>
               <a:spcBef>
                 <a:spcPts val="300"/>
@@ -2653,23 +3138,69 @@
               <a:buNone/>
             </a:pPr>
             <a:r>
-              <a:rPr lang="en-US" sz="1200" dirty="0">
-                <a:solidFill>
-                  <a:srgbClr val="1C2833"/>
-                </a:solidFill>
-                <a:latin typeface="Arial" pitchFamily="34" charset="0"/>
-                <a:ea typeface="Arial" pitchFamily="34" charset="-122"/>
-                <a:cs typeface="Arial" pitchFamily="34" charset="-120"/>
-              </a:rPr>
-              <a:t>– Tonight, note your bedtime. Tomorrow morning, note your wake time. Then write: which doṣa-window did each fall into? Was your sleep aligned with the recommended pattern?</a:t>
-            </a:r>
-            <a:endParaRPr lang="en-US" sz="1200" dirty="0"/>
-          </a:p>
-        </p:txBody>
-      </p:sp>
-      <p:sp>
-        <p:nvSpPr>
-          <p:cNvPr id="5" name="Text 3"/>
+              <a:rPr lang="en-US" sz="1300" dirty="0">
+                <a:solidFill>
+                  <a:srgbClr val="1C2833"/>
+                </a:solidFill>
+                <a:latin typeface="Georgia" pitchFamily="34" charset="0"/>
+                <a:ea typeface="Georgia" pitchFamily="34" charset="-122"/>
+                <a:cs typeface="Georgia" pitchFamily="34" charset="-120"/>
+              </a:rPr>
+              <a:t>"The doṣas have their own times — kapha in the morning and early night, pitta at midday and midnight, vāta in the afternoon and pre-dawn." — paraphrased from Aṣṭāṅga Hṛdaya, </a:t>
+            </a:r>
+            <a:pPr algn="l" indent="0" marL="0">
+              <a:lnSpc>
+                <a:spcPts val="1820"/>
+              </a:lnSpc>
+              <a:spcBef>
+                <a:spcPts val="300"/>
+              </a:spcBef>
+              <a:spcAft>
+                <a:spcPts val="300"/>
+              </a:spcAft>
+              <a:buNone/>
+            </a:pPr>
+            <a:r>
+              <a:rPr lang="en-US" sz="1300" i="1" dirty="0">
+                <a:solidFill>
+                  <a:srgbClr val="1C2833"/>
+                </a:solidFill>
+                <a:latin typeface="Georgia" pitchFamily="34" charset="0"/>
+                <a:ea typeface="Georgia" pitchFamily="34" charset="-122"/>
+                <a:cs typeface="Georgia" pitchFamily="34" charset="-120"/>
+              </a:rPr>
+              <a:t>Sūtrasthāna</a:t>
+            </a:r>
+            <a:pPr algn="l" indent="0" marL="0">
+              <a:lnSpc>
+                <a:spcPts val="1820"/>
+              </a:lnSpc>
+              <a:spcBef>
+                <a:spcPts val="300"/>
+              </a:spcBef>
+              <a:spcAft>
+                <a:spcPts val="300"/>
+              </a:spcAft>
+              <a:buNone/>
+            </a:pPr>
+            <a:r>
+              <a:rPr lang="en-US" sz="1300" dirty="0">
+                <a:solidFill>
+                  <a:srgbClr val="1C2833"/>
+                </a:solidFill>
+                <a:latin typeface="Georgia" pitchFamily="34" charset="0"/>
+                <a:ea typeface="Georgia" pitchFamily="34" charset="-122"/>
+                <a:cs typeface="Georgia" pitchFamily="34" charset="-120"/>
+              </a:rPr>
+              <a:t> 1 (Vāgbhaṭa)</a:t>
+            </a:r>
+            <a:endParaRPr lang="en-US" sz="1300" dirty="0"/>
+          </a:p>
+        </p:txBody>
+      </p:sp>
+      <p:sp>
+        <p:nvSpPr>
+          <p:cNvPr id="7" name="Text 5"/>
           <p:cNvSpPr/>
           <p:nvPr/>
         </p:nvSpPr>
@@ -2819,7 +3350,7 @@
                 <a:ea typeface="Georgia" pitchFamily="34" charset="-122"/>
                 <a:cs typeface="Georgia" pitchFamily="34" charset="-120"/>
               </a:rPr>
-              <a:t>Differentiation</a:t>
+              <a:t>Core (20 min) (cont.)</a:t>
             </a:r>
             <a:endParaRPr lang="en-US" sz="1800" dirty="0"/>
           </a:p>
@@ -2834,7 +3365,7 @@
         <p:spPr>
           <a:xfrm>
             <a:off x="634901" y="883593"/>
-            <a:ext cx="8102798" cy="937022"/>
+            <a:ext cx="8102798" cy="281880"/>
           </a:xfrm>
           <a:prstGeom prst="rect">
             <a:avLst/>
@@ -2865,70 +3396,32 @@
                 <a:ea typeface="Arial" pitchFamily="34" charset="-122"/>
                 <a:cs typeface="Arial" pitchFamily="34" charset="-120"/>
               </a:rPr>
-              <a:t>One tier up:</a:t>
-            </a:r>
-            <a:pPr algn="l" indent="0" marL="0">
-              <a:lnSpc>
-                <a:spcPts val="1620"/>
-              </a:lnSpc>
-              <a:spcAft>
-                <a:spcPts val="300"/>
-              </a:spcAft>
-              <a:buNone/>
-            </a:pPr>
-            <a:r>
-              <a:rPr lang="en-US" sz="1200" dirty="0">
-                <a:solidFill>
-                  <a:srgbClr val="1C2833"/>
-                </a:solidFill>
-                <a:latin typeface="Arial" pitchFamily="34" charset="0"/>
-                <a:ea typeface="Arial" pitchFamily="34" charset="-122"/>
-                <a:cs typeface="Arial" pitchFamily="34" charset="-120"/>
-              </a:rPr>
-              <a:t> Look up "circadian rhythm" and write one sentence on the mechanism (light → SCN → melatonin/cortisol). How does the modern picture differ from the </a:t>
-            </a:r>
-            <a:pPr algn="l" indent="0" marL="0">
-              <a:lnSpc>
-                <a:spcPts val="1620"/>
-              </a:lnSpc>
-              <a:spcAft>
-                <a:spcPts val="300"/>
-              </a:spcAft>
-              <a:buNone/>
-            </a:pPr>
-            <a:r>
-              <a:rPr lang="en-US" sz="1200" i="1" dirty="0">
-                <a:solidFill>
-                  <a:srgbClr val="1C2833"/>
-                </a:solidFill>
-                <a:latin typeface="Arial" pitchFamily="34" charset="0"/>
-                <a:ea typeface="Arial" pitchFamily="34" charset="-122"/>
-                <a:cs typeface="Arial" pitchFamily="34" charset="-120"/>
-              </a:rPr>
-              <a:t>doṣa</a:t>
-            </a:r>
-            <a:pPr algn="l" indent="0" marL="0">
-              <a:lnSpc>
-                <a:spcPts val="1620"/>
-              </a:lnSpc>
-              <a:spcAft>
-                <a:spcPts val="300"/>
-              </a:spcAft>
-              <a:buNone/>
-            </a:pPr>
-            <a:r>
-              <a:rPr lang="en-US" sz="1200" dirty="0">
-                <a:solidFill>
-                  <a:srgbClr val="1C2833"/>
-                </a:solidFill>
-                <a:latin typeface="Arial" pitchFamily="34" charset="0"/>
-                <a:ea typeface="Arial" pitchFamily="34" charset="-122"/>
-                <a:cs typeface="Arial" pitchFamily="34" charset="-120"/>
-              </a:rPr>
-              <a:t>-clock?</a:t>
+              <a:t>Why this matters in practice (Ayurveda's claim):</a:t>
             </a:r>
             <a:endParaRPr lang="en-US" sz="1200" dirty="0"/>
           </a:p>
+        </p:txBody>
+      </p:sp>
+      <p:sp>
+        <p:nvSpPr>
+          <p:cNvPr id="5" name="Text 3"/>
+          <p:cNvSpPr/>
+          <p:nvPr/>
+        </p:nvSpPr>
+        <p:spPr>
+          <a:xfrm>
+            <a:off x="634901" y="1266974"/>
+            <a:ext cx="8102798" cy="1218902"/>
+          </a:xfrm>
+          <a:prstGeom prst="rect">
+            <a:avLst/>
+          </a:prstGeom>
+          <a:noFill/>
+          <a:ln/>
+        </p:spPr>
+        <p:txBody>
+          <a:bodyPr wrap="square" lIns="0" tIns="0" rIns="0" bIns="0" rtlCol="0" anchor="t"/>
+          <a:lstStyle/>
           <a:p>
             <a:pPr algn="l" marL="342900" indent="-342900">
               <a:lnSpc>
@@ -2941,26 +3434,6 @@
               <a:buChar char="•"/>
             </a:pPr>
             <a:r>
-              <a:rPr lang="en-US" sz="1200" b="1" dirty="0">
-                <a:solidFill>
-                  <a:srgbClr val="1C2833"/>
-                </a:solidFill>
-                <a:latin typeface="Arial" pitchFamily="34" charset="0"/>
-                <a:ea typeface="Arial" pitchFamily="34" charset="-122"/>
-                <a:cs typeface="Arial" pitchFamily="34" charset="-120"/>
-              </a:rPr>
-              <a:t>One tier down:</a:t>
-            </a:r>
-            <a:pPr algn="l" indent="0" marL="0">
-              <a:lnSpc>
-                <a:spcPts val="1620"/>
-              </a:lnSpc>
-              <a:spcAft>
-                <a:spcPts val="300"/>
-              </a:spcAft>
-              <a:buNone/>
-            </a:pPr>
-            <a:r>
               <a:rPr lang="en-US" sz="1200" dirty="0">
                 <a:solidFill>
                   <a:srgbClr val="1C2833"/>
@@ -2969,15 +3442,247 @@
                 <a:ea typeface="Arial" pitchFamily="34" charset="-122"/>
                 <a:cs typeface="Arial" pitchFamily="34" charset="-120"/>
               </a:rPr>
-              <a:t> Memorise just the three midday/midnight windows: 10–2 (day) and 10–2 (night) — both pitta. That's the spine of the clock.</a:t>
+              <a:t>Heavy meal at </a:t>
+            </a:r>
+            <a:pPr algn="l" indent="0" marL="0">
+              <a:lnSpc>
+                <a:spcPts val="1620"/>
+              </a:lnSpc>
+              <a:spcAft>
+                <a:spcPts val="300"/>
+              </a:spcAft>
+              <a:buNone/>
+            </a:pPr>
+            <a:r>
+              <a:rPr lang="en-US" sz="1200" i="1" dirty="0">
+                <a:solidFill>
+                  <a:srgbClr val="1C2833"/>
+                </a:solidFill>
+                <a:latin typeface="Arial" pitchFamily="34" charset="0"/>
+                <a:ea typeface="Arial" pitchFamily="34" charset="-122"/>
+                <a:cs typeface="Arial" pitchFamily="34" charset="-120"/>
+              </a:rPr>
+              <a:t>kapha</a:t>
+            </a:r>
+            <a:pPr algn="l" indent="0" marL="0">
+              <a:lnSpc>
+                <a:spcPts val="1620"/>
+              </a:lnSpc>
+              <a:spcAft>
+                <a:spcPts val="300"/>
+              </a:spcAft>
+              <a:buNone/>
+            </a:pPr>
+            <a:r>
+              <a:rPr lang="en-US" sz="1200" dirty="0">
+                <a:solidFill>
+                  <a:srgbClr val="1C2833"/>
+                </a:solidFill>
+                <a:latin typeface="Arial" pitchFamily="34" charset="0"/>
+                <a:ea typeface="Arial" pitchFamily="34" charset="-122"/>
+                <a:cs typeface="Arial" pitchFamily="34" charset="-120"/>
+              </a:rPr>
+              <a:t> time (6–10 pm) sits heavy and disrupts sleep.</a:t>
             </a:r>
             <a:endParaRPr lang="en-US" sz="1200" dirty="0"/>
           </a:p>
-        </p:txBody>
-      </p:sp>
-      <p:sp>
-        <p:nvSpPr>
-          <p:cNvPr id="5" name="Text 3"/>
+          <a:p>
+            <a:pPr algn="l" marL="342900" indent="-342900">
+              <a:lnSpc>
+                <a:spcPts val="1620"/>
+              </a:lnSpc>
+              <a:spcAft>
+                <a:spcPts val="300"/>
+              </a:spcAft>
+              <a:buSzPct val="100000"/>
+              <a:buChar char="•"/>
+            </a:pPr>
+            <a:r>
+              <a:rPr lang="en-US" sz="1200" dirty="0">
+                <a:solidFill>
+                  <a:srgbClr val="1C2833"/>
+                </a:solidFill>
+                <a:latin typeface="Arial" pitchFamily="34" charset="0"/>
+                <a:ea typeface="Arial" pitchFamily="34" charset="-122"/>
+                <a:cs typeface="Arial" pitchFamily="34" charset="-120"/>
+              </a:rPr>
+              <a:t>Heavy meal at </a:t>
+            </a:r>
+            <a:pPr algn="l" indent="0" marL="0">
+              <a:lnSpc>
+                <a:spcPts val="1620"/>
+              </a:lnSpc>
+              <a:spcAft>
+                <a:spcPts val="300"/>
+              </a:spcAft>
+              <a:buNone/>
+            </a:pPr>
+            <a:r>
+              <a:rPr lang="en-US" sz="1200" i="1" dirty="0">
+                <a:solidFill>
+                  <a:srgbClr val="1C2833"/>
+                </a:solidFill>
+                <a:latin typeface="Arial" pitchFamily="34" charset="0"/>
+                <a:ea typeface="Arial" pitchFamily="34" charset="-122"/>
+                <a:cs typeface="Arial" pitchFamily="34" charset="-120"/>
+              </a:rPr>
+              <a:t>pitta</a:t>
+            </a:r>
+            <a:pPr algn="l" indent="0" marL="0">
+              <a:lnSpc>
+                <a:spcPts val="1620"/>
+              </a:lnSpc>
+              <a:spcAft>
+                <a:spcPts val="300"/>
+              </a:spcAft>
+              <a:buNone/>
+            </a:pPr>
+            <a:r>
+              <a:rPr lang="en-US" sz="1200" dirty="0">
+                <a:solidFill>
+                  <a:srgbClr val="1C2833"/>
+                </a:solidFill>
+                <a:latin typeface="Arial" pitchFamily="34" charset="0"/>
+                <a:ea typeface="Arial" pitchFamily="34" charset="-122"/>
+                <a:cs typeface="Arial" pitchFamily="34" charset="-120"/>
+              </a:rPr>
+              <a:t> time (10 am – 2 pm) digests well.</a:t>
+            </a:r>
+            <a:endParaRPr lang="en-US" sz="1200" dirty="0"/>
+          </a:p>
+          <a:p>
+            <a:pPr algn="l" marL="342900" indent="-342900">
+              <a:lnSpc>
+                <a:spcPts val="1620"/>
+              </a:lnSpc>
+              <a:spcAft>
+                <a:spcPts val="300"/>
+              </a:spcAft>
+              <a:buSzPct val="100000"/>
+              <a:buChar char="•"/>
+            </a:pPr>
+            <a:r>
+              <a:rPr lang="en-US" sz="1200" dirty="0">
+                <a:solidFill>
+                  <a:srgbClr val="1C2833"/>
+                </a:solidFill>
+                <a:latin typeface="Arial" pitchFamily="34" charset="0"/>
+                <a:ea typeface="Arial" pitchFamily="34" charset="-122"/>
+                <a:cs typeface="Arial" pitchFamily="34" charset="-120"/>
+              </a:rPr>
+              <a:t>Trying to sleep deeply at </a:t>
+            </a:r>
+            <a:pPr algn="l" indent="0" marL="0">
+              <a:lnSpc>
+                <a:spcPts val="1620"/>
+              </a:lnSpc>
+              <a:spcAft>
+                <a:spcPts val="300"/>
+              </a:spcAft>
+              <a:buNone/>
+            </a:pPr>
+            <a:r>
+              <a:rPr lang="en-US" sz="1200" i="1" dirty="0">
+                <a:solidFill>
+                  <a:srgbClr val="1C2833"/>
+                </a:solidFill>
+                <a:latin typeface="Arial" pitchFamily="34" charset="0"/>
+                <a:ea typeface="Arial" pitchFamily="34" charset="-122"/>
+                <a:cs typeface="Arial" pitchFamily="34" charset="-120"/>
+              </a:rPr>
+              <a:t>vāta</a:t>
+            </a:r>
+            <a:pPr algn="l" indent="0" marL="0">
+              <a:lnSpc>
+                <a:spcPts val="1620"/>
+              </a:lnSpc>
+              <a:spcAft>
+                <a:spcPts val="300"/>
+              </a:spcAft>
+              <a:buNone/>
+            </a:pPr>
+            <a:r>
+              <a:rPr lang="en-US" sz="1200" dirty="0">
+                <a:solidFill>
+                  <a:srgbClr val="1C2833"/>
+                </a:solidFill>
+                <a:latin typeface="Arial" pitchFamily="34" charset="0"/>
+                <a:ea typeface="Arial" pitchFamily="34" charset="-122"/>
+                <a:cs typeface="Arial" pitchFamily="34" charset="-120"/>
+              </a:rPr>
+              <a:t> time (2–6 am) is hard — that's why you wake at 4 am even if you went to bed late.</a:t>
+            </a:r>
+            <a:endParaRPr lang="en-US" sz="1200" dirty="0"/>
+          </a:p>
+          <a:p>
+            <a:pPr algn="l" marL="342900" indent="-342900">
+              <a:lnSpc>
+                <a:spcPts val="1620"/>
+              </a:lnSpc>
+              <a:spcAft>
+                <a:spcPts val="300"/>
+              </a:spcAft>
+              <a:buSzPct val="100000"/>
+              <a:buChar char="•"/>
+            </a:pPr>
+            <a:r>
+              <a:rPr lang="en-US" sz="1200" dirty="0">
+                <a:solidFill>
+                  <a:srgbClr val="1C2833"/>
+                </a:solidFill>
+                <a:latin typeface="Arial" pitchFamily="34" charset="0"/>
+                <a:ea typeface="Arial" pitchFamily="34" charset="-122"/>
+                <a:cs typeface="Arial" pitchFamily="34" charset="-120"/>
+              </a:rPr>
+              <a:t>Skipping the </a:t>
+            </a:r>
+            <a:pPr algn="l" indent="0" marL="0">
+              <a:lnSpc>
+                <a:spcPts val="1620"/>
+              </a:lnSpc>
+              <a:spcAft>
+                <a:spcPts val="300"/>
+              </a:spcAft>
+              <a:buNone/>
+            </a:pPr>
+            <a:r>
+              <a:rPr lang="en-US" sz="1200" i="1" dirty="0">
+                <a:solidFill>
+                  <a:srgbClr val="1C2833"/>
+                </a:solidFill>
+                <a:latin typeface="Arial" pitchFamily="34" charset="0"/>
+                <a:ea typeface="Arial" pitchFamily="34" charset="-122"/>
+                <a:cs typeface="Arial" pitchFamily="34" charset="-120"/>
+              </a:rPr>
+              <a:t>kapha</a:t>
+            </a:r>
+            <a:pPr algn="l" indent="0" marL="0">
+              <a:lnSpc>
+                <a:spcPts val="1620"/>
+              </a:lnSpc>
+              <a:spcAft>
+                <a:spcPts val="300"/>
+              </a:spcAft>
+              <a:buNone/>
+            </a:pPr>
+            <a:r>
+              <a:rPr lang="en-US" sz="1200" dirty="0">
+                <a:solidFill>
+                  <a:srgbClr val="1C2833"/>
+                </a:solidFill>
+                <a:latin typeface="Arial" pitchFamily="34" charset="0"/>
+                <a:ea typeface="Arial" pitchFamily="34" charset="-122"/>
+                <a:cs typeface="Arial" pitchFamily="34" charset="-120"/>
+              </a:rPr>
+              <a:t> morning window (sleeping in until 11 am) leaves you groggy — the body needed to wake before the kapha window closed.</a:t>
+            </a:r>
+            <a:endParaRPr lang="en-US" sz="1200" dirty="0"/>
+          </a:p>
+        </p:txBody>
+      </p:sp>
+      <p:sp>
+        <p:nvSpPr>
+          <p:cNvPr id="6" name="Text 4"/>
           <p:cNvSpPr/>
           <p:nvPr/>
         </p:nvSpPr>
@@ -3127,7 +3832,7 @@
                 <a:ea typeface="Georgia" pitchFamily="34" charset="-122"/>
                 <a:cs typeface="Georgia" pitchFamily="34" charset="-120"/>
               </a:rPr>
-              <a:t>Teacher notes</a:t>
+              <a:t>Core (20 min) (cont.)</a:t>
             </a:r>
             <a:endParaRPr lang="en-US" sz="1800" dirty="0"/>
           </a:p>
@@ -3141,8 +3846,8 @@
         </p:nvSpPr>
         <p:spPr>
           <a:xfrm>
-            <a:off x="406301" y="870942"/>
-            <a:ext cx="8498026" cy="853083"/>
+            <a:off x="634901" y="883593"/>
+            <a:ext cx="8102798" cy="281880"/>
           </a:xfrm>
           <a:prstGeom prst="rect">
             <a:avLst/>
@@ -3154,13 +3859,31 @@
           <a:bodyPr wrap="square" lIns="0" tIns="0" rIns="0" bIns="0" rtlCol="0" anchor="t"/>
           <a:lstStyle/>
           <a:p>
-            <a:pPr algn="l" indent="0" marL="0">
-              <a:lnSpc>
-                <a:spcPts val="1680"/>
-              </a:lnSpc>
-              <a:spcBef>
-                <a:spcPts val="300"/>
-              </a:spcBef>
+            <a:pPr algn="l" marL="342900" indent="-342900">
+              <a:lnSpc>
+                <a:spcPts val="1620"/>
+              </a:lnSpc>
+              <a:spcAft>
+                <a:spcPts val="300"/>
+              </a:spcAft>
+              <a:buSzPct val="100000"/>
+              <a:buChar char="•"/>
+            </a:pPr>
+            <a:r>
+              <a:rPr lang="en-US" sz="1200" b="1" dirty="0">
+                <a:solidFill>
+                  <a:srgbClr val="1C2833"/>
+                </a:solidFill>
+                <a:latin typeface="Arial" pitchFamily="34" charset="0"/>
+                <a:ea typeface="Arial" pitchFamily="34" charset="-122"/>
+                <a:cs typeface="Arial" pitchFamily="34" charset="-120"/>
+              </a:rPr>
+              <a:t>The modern parallel — chronobiology</a:t>
+            </a:r>
+            <a:pPr algn="l" indent="0" marL="0">
+              <a:lnSpc>
+                <a:spcPts val="1620"/>
+              </a:lnSpc>
               <a:spcAft>
                 <a:spcPts val="300"/>
               </a:spcAft>
@@ -3175,15 +3898,170 @@
                 <a:ea typeface="Arial" pitchFamily="34" charset="-122"/>
                 <a:cs typeface="Arial" pitchFamily="34" charset="-120"/>
               </a:rPr>
-              <a:t>– Some students will say their family's dinner is at 9 pm. Don't shame them. Note the principle; don't prescribe. – The clock is an </a:t>
-            </a:r>
-            <a:pPr algn="l" indent="0" marL="0">
-              <a:lnSpc>
-                <a:spcPts val="1680"/>
-              </a:lnSpc>
-              <a:spcBef>
-                <a:spcPts val="300"/>
-              </a:spcBef>
+              <a:t> (state, don't overstate):</a:t>
+            </a:r>
+            <a:endParaRPr lang="en-US" sz="1200" dirty="0"/>
+          </a:p>
+        </p:txBody>
+      </p:sp>
+      <p:sp>
+        <p:nvSpPr>
+          <p:cNvPr id="5" name="Text 3"/>
+          <p:cNvSpPr/>
+          <p:nvPr/>
+        </p:nvSpPr>
+        <p:spPr>
+          <a:xfrm>
+            <a:off x="634901" y="1266974"/>
+            <a:ext cx="8102798" cy="1630263"/>
+          </a:xfrm>
+          <a:prstGeom prst="rect">
+            <a:avLst/>
+          </a:prstGeom>
+          <a:noFill/>
+          <a:ln/>
+        </p:spPr>
+        <p:txBody>
+          <a:bodyPr wrap="square" lIns="0" tIns="0" rIns="0" bIns="0" rtlCol="0" anchor="t"/>
+          <a:lstStyle/>
+          <a:p>
+            <a:pPr algn="l" marL="342900" indent="-342900">
+              <a:lnSpc>
+                <a:spcPts val="1620"/>
+              </a:lnSpc>
+              <a:spcAft>
+                <a:spcPts val="300"/>
+              </a:spcAft>
+              <a:buSzPct val="100000"/>
+              <a:buChar char="•"/>
+            </a:pPr>
+            <a:r>
+              <a:rPr lang="en-US" sz="1200" dirty="0">
+                <a:solidFill>
+                  <a:srgbClr val="1C2833"/>
+                </a:solidFill>
+                <a:latin typeface="Arial" pitchFamily="34" charset="0"/>
+                <a:ea typeface="Arial" pitchFamily="34" charset="-122"/>
+                <a:cs typeface="Arial" pitchFamily="34" charset="-120"/>
+              </a:rPr>
+              <a:t>Modern science: the body has a </a:t>
+            </a:r>
+            <a:pPr algn="l" indent="0" marL="0">
+              <a:lnSpc>
+                <a:spcPts val="1620"/>
+              </a:lnSpc>
+              <a:spcAft>
+                <a:spcPts val="300"/>
+              </a:spcAft>
+              <a:buNone/>
+            </a:pPr>
+            <a:r>
+              <a:rPr lang="en-US" sz="1200" b="1" dirty="0">
+                <a:solidFill>
+                  <a:srgbClr val="1C2833"/>
+                </a:solidFill>
+                <a:latin typeface="Arial" pitchFamily="34" charset="0"/>
+                <a:ea typeface="Arial" pitchFamily="34" charset="-122"/>
+                <a:cs typeface="Arial" pitchFamily="34" charset="-120"/>
+              </a:rPr>
+              <a:t>circadian rhythm</a:t>
+            </a:r>
+            <a:pPr algn="l" indent="0" marL="0">
+              <a:lnSpc>
+                <a:spcPts val="1620"/>
+              </a:lnSpc>
+              <a:spcAft>
+                <a:spcPts val="300"/>
+              </a:spcAft>
+              <a:buNone/>
+            </a:pPr>
+            <a:r>
+              <a:rPr lang="en-US" sz="1200" dirty="0">
+                <a:solidFill>
+                  <a:srgbClr val="1C2833"/>
+                </a:solidFill>
+                <a:latin typeface="Arial" pitchFamily="34" charset="0"/>
+                <a:ea typeface="Arial" pitchFamily="34" charset="-122"/>
+                <a:cs typeface="Arial" pitchFamily="34" charset="-120"/>
+              </a:rPr>
+              <a:t> controlled by the suprachiasmatic nucleus in the brain, driven by light exposure.</a:t>
+            </a:r>
+            <a:endParaRPr lang="en-US" sz="1200" dirty="0"/>
+          </a:p>
+          <a:p>
+            <a:pPr algn="l" marL="342900" indent="-342900">
+              <a:lnSpc>
+                <a:spcPts val="1620"/>
+              </a:lnSpc>
+              <a:spcAft>
+                <a:spcPts val="300"/>
+              </a:spcAft>
+              <a:buSzPct val="100000"/>
+              <a:buChar char="•"/>
+            </a:pPr>
+            <a:r>
+              <a:rPr lang="en-US" sz="1200" dirty="0">
+                <a:solidFill>
+                  <a:srgbClr val="1C2833"/>
+                </a:solidFill>
+                <a:latin typeface="Arial" pitchFamily="34" charset="0"/>
+                <a:ea typeface="Arial" pitchFamily="34" charset="-122"/>
+                <a:cs typeface="Arial" pitchFamily="34" charset="-120"/>
+              </a:rPr>
+              <a:t>Insulin sensitivity (how well you handle sugar): higher in the morning, lower at night. Big dinner late = worse glucose handling. (Real effect; see Panda 2012.)</a:t>
+            </a:r>
+            <a:endParaRPr lang="en-US" sz="1200" dirty="0"/>
+          </a:p>
+          <a:p>
+            <a:pPr algn="l" marL="342900" indent="-342900">
+              <a:lnSpc>
+                <a:spcPts val="1620"/>
+              </a:lnSpc>
+              <a:spcAft>
+                <a:spcPts val="300"/>
+              </a:spcAft>
+              <a:buSzPct val="100000"/>
+              <a:buChar char="•"/>
+            </a:pPr>
+            <a:r>
+              <a:rPr lang="en-US" sz="1200" dirty="0">
+                <a:solidFill>
+                  <a:srgbClr val="1C2833"/>
+                </a:solidFill>
+                <a:latin typeface="Arial" pitchFamily="34" charset="0"/>
+                <a:ea typeface="Arial" pitchFamily="34" charset="-122"/>
+                <a:cs typeface="Arial" pitchFamily="34" charset="-120"/>
+              </a:rPr>
+              <a:t>Cortisol (stress hormone): peaks ~6–8 am, drops through the day. That's why morning is mentally "harder to start" if you slept badly.</a:t>
+            </a:r>
+            <a:endParaRPr lang="en-US" sz="1200" dirty="0"/>
+          </a:p>
+          <a:p>
+            <a:pPr algn="l" marL="342900" indent="-342900">
+              <a:lnSpc>
+                <a:spcPts val="1620"/>
+              </a:lnSpc>
+              <a:spcAft>
+                <a:spcPts val="300"/>
+              </a:spcAft>
+              <a:buSzPct val="100000"/>
+              <a:buChar char="•"/>
+            </a:pPr>
+            <a:r>
+              <a:rPr lang="en-US" sz="1200" dirty="0">
+                <a:solidFill>
+                  <a:srgbClr val="1C2833"/>
+                </a:solidFill>
+                <a:latin typeface="Arial" pitchFamily="34" charset="0"/>
+                <a:ea typeface="Arial" pitchFamily="34" charset="-122"/>
+                <a:cs typeface="Arial" pitchFamily="34" charset="-120"/>
+              </a:rPr>
+              <a:t>Body temperature: lowest around 4–5 am, peaks late afternoon. Matches </a:t>
+            </a:r>
+            <a:pPr algn="l" indent="0" marL="0">
+              <a:lnSpc>
+                <a:spcPts val="1620"/>
+              </a:lnSpc>
               <a:spcAft>
                 <a:spcPts val="300"/>
               </a:spcAft>
@@ -3198,15 +4076,12 @@
                 <a:ea typeface="Arial" pitchFamily="34" charset="-122"/>
                 <a:cs typeface="Arial" pitchFamily="34" charset="-120"/>
               </a:rPr>
-              <a:t>idealised pattern</a:t>
-            </a:r>
-            <a:pPr algn="l" indent="0" marL="0">
-              <a:lnSpc>
-                <a:spcPts val="1680"/>
-              </a:lnSpc>
-              <a:spcBef>
-                <a:spcPts val="300"/>
-              </a:spcBef>
+              <a:t>vāta</a:t>
+            </a:r>
+            <a:pPr algn="l" indent="0" marL="0">
+              <a:lnSpc>
+                <a:spcPts val="1620"/>
+              </a:lnSpc>
               <a:spcAft>
                 <a:spcPts val="300"/>
               </a:spcAft>
@@ -3221,99 +4096,7 @@
                 <a:ea typeface="Arial" pitchFamily="34" charset="-122"/>
                 <a:cs typeface="Arial" pitchFamily="34" charset="-120"/>
               </a:rPr>
-              <a:t>, not a rigid rule. Indian families dinner at all sorts of times for legitimate reasons. The point is to notice the </a:t>
-            </a:r>
-            <a:pPr algn="l" indent="0" marL="0">
-              <a:lnSpc>
-                <a:spcPts val="1680"/>
-              </a:lnSpc>
-              <a:spcBef>
-                <a:spcPts val="300"/>
-              </a:spcBef>
-              <a:spcAft>
-                <a:spcPts val="300"/>
-              </a:spcAft>
-              <a:buNone/>
-            </a:pPr>
-            <a:r>
-              <a:rPr lang="en-US" sz="1200" i="1" dirty="0">
-                <a:solidFill>
-                  <a:srgbClr val="1C2833"/>
-                </a:solidFill>
-                <a:latin typeface="Arial" pitchFamily="34" charset="0"/>
-                <a:ea typeface="Arial" pitchFamily="34" charset="-122"/>
-                <a:cs typeface="Arial" pitchFamily="34" charset="-120"/>
-              </a:rPr>
-              <a:t>trade-off</a:t>
-            </a:r>
-            <a:pPr algn="l" indent="0" marL="0">
-              <a:lnSpc>
-                <a:spcPts val="1680"/>
-              </a:lnSpc>
-              <a:spcBef>
-                <a:spcPts val="300"/>
-              </a:spcBef>
-              <a:spcAft>
-                <a:spcPts val="300"/>
-              </a:spcAft>
-              <a:buNone/>
-            </a:pPr>
-            <a:r>
-              <a:rPr lang="en-US" sz="1200" dirty="0">
-                <a:solidFill>
-                  <a:srgbClr val="1C2833"/>
-                </a:solidFill>
-                <a:latin typeface="Arial" pitchFamily="34" charset="0"/>
-                <a:ea typeface="Arial" pitchFamily="34" charset="-122"/>
-                <a:cs typeface="Arial" pitchFamily="34" charset="-120"/>
-              </a:rPr>
-              <a:t>, not to comply. – Don't conflate the </a:t>
-            </a:r>
-            <a:pPr algn="l" indent="0" marL="0">
-              <a:lnSpc>
-                <a:spcPts val="1680"/>
-              </a:lnSpc>
-              <a:spcBef>
-                <a:spcPts val="300"/>
-              </a:spcBef>
-              <a:spcAft>
-                <a:spcPts val="300"/>
-              </a:spcAft>
-              <a:buNone/>
-            </a:pPr>
-            <a:r>
-              <a:rPr lang="en-US" sz="1200" i="1" dirty="0">
-                <a:solidFill>
-                  <a:srgbClr val="1C2833"/>
-                </a:solidFill>
-                <a:latin typeface="Arial" pitchFamily="34" charset="0"/>
-                <a:ea typeface="Arial" pitchFamily="34" charset="-122"/>
-                <a:cs typeface="Arial" pitchFamily="34" charset="-120"/>
-              </a:rPr>
-              <a:t>doṣa</a:t>
-            </a:r>
-            <a:pPr algn="l" indent="0" marL="0">
-              <a:lnSpc>
-                <a:spcPts val="1680"/>
-              </a:lnSpc>
-              <a:spcBef>
-                <a:spcPts val="300"/>
-              </a:spcBef>
-              <a:spcAft>
-                <a:spcPts val="300"/>
-              </a:spcAft>
-              <a:buNone/>
-            </a:pPr>
-            <a:r>
-              <a:rPr lang="en-US" sz="1200" dirty="0">
-                <a:solidFill>
-                  <a:srgbClr val="1C2833"/>
-                </a:solidFill>
-                <a:latin typeface="Arial" pitchFamily="34" charset="0"/>
-                <a:ea typeface="Arial" pitchFamily="34" charset="-122"/>
-                <a:cs typeface="Arial" pitchFamily="34" charset="-120"/>
-              </a:rPr>
-              <a:t> clock with the modern circadian rhythm too tightly. They overlap in spirit, not in detail.</a:t>
+              <a:t> time roughly.</a:t>
             </a:r>
             <a:endParaRPr lang="en-US" sz="1200" dirty="0"/>
           </a:p>
@@ -3321,7 +4104,7 @@
       </p:sp>
       <p:sp>
         <p:nvSpPr>
-          <p:cNvPr id="5" name="Text 3"/>
+          <p:cNvPr id="6" name="Text 4"/>
           <p:cNvSpPr/>
           <p:nvPr/>
         </p:nvSpPr>
@@ -3471,7 +4254,7 @@
                 <a:ea typeface="Georgia" pitchFamily="34" charset="-122"/>
                 <a:cs typeface="Georgia" pitchFamily="34" charset="-120"/>
               </a:rPr>
-              <a:t>Citation(s) used in this lesson</a:t>
+              <a:t>Core (20 min) (cont.)</a:t>
             </a:r>
             <a:endParaRPr lang="en-US" sz="1800" dirty="0"/>
           </a:p>
@@ -3486,7 +4269,7 @@
         <p:spPr>
           <a:xfrm>
             <a:off x="406301" y="870942"/>
-            <a:ext cx="8498026" cy="436066"/>
+            <a:ext cx="8498026" cy="426541"/>
           </a:xfrm>
           <a:prstGeom prst="rect">
             <a:avLst/>
@@ -3511,6 +4294,29 @@
               <a:buNone/>
             </a:pPr>
             <a:r>
+              <a:rPr lang="en-US" sz="1200" b="1" dirty="0">
+                <a:solidFill>
+                  <a:srgbClr val="1C2833"/>
+                </a:solidFill>
+                <a:latin typeface="Arial" pitchFamily="34" charset="0"/>
+                <a:ea typeface="Arial" pitchFamily="34" charset="-122"/>
+                <a:cs typeface="Arial" pitchFamily="34" charset="-120"/>
+              </a:rPr>
+              <a:t>The honest framing:</a:t>
+            </a:r>
+            <a:pPr algn="l" indent="0" marL="0">
+              <a:lnSpc>
+                <a:spcPts val="1680"/>
+              </a:lnSpc>
+              <a:spcBef>
+                <a:spcPts val="300"/>
+              </a:spcBef>
+              <a:spcAft>
+                <a:spcPts val="300"/>
+              </a:spcAft>
+              <a:buNone/>
+            </a:pPr>
+            <a:r>
               <a:rPr lang="en-US" sz="1200" dirty="0">
                 <a:solidFill>
                   <a:srgbClr val="1C2833"/>
@@ -3519,7 +4325,7 @@
                 <a:ea typeface="Arial" pitchFamily="34" charset="-122"/>
                 <a:cs typeface="Arial" pitchFamily="34" charset="-120"/>
               </a:rPr>
-              <a:t>– Aṣṭāṅga Hṛdaya, </a:t>
+              <a:t> the </a:t>
             </a:r>
             <a:pPr algn="l" indent="0" marL="0">
               <a:lnSpc>
@@ -3542,7 +4348,7 @@
                 <a:ea typeface="Arial" pitchFamily="34" charset="-122"/>
                 <a:cs typeface="Arial" pitchFamily="34" charset="-120"/>
               </a:rPr>
-              <a:t>Sūtrasthāna</a:t>
+              <a:t>general principle</a:t>
             </a:r>
             <a:pPr algn="l" indent="0" marL="0">
               <a:lnSpc>
@@ -3565,7 +4371,7 @@
                 <a:ea typeface="Arial" pitchFamily="34" charset="-122"/>
                 <a:cs typeface="Arial" pitchFamily="34" charset="-120"/>
               </a:rPr>
-              <a:t> 1 (Vāgbhaṭa) — paraphrase on </a:t>
+              <a:t> (the body cycles through the day) is robust modern science. The </a:t>
             </a:r>
             <a:pPr algn="l" indent="0" marL="0">
               <a:lnSpc>
@@ -3588,15 +4394,2225 @@
                 <a:ea typeface="Arial" pitchFamily="34" charset="-122"/>
                 <a:cs typeface="Arial" pitchFamily="34" charset="-120"/>
               </a:rPr>
+              <a:t>specific doṣa-clock windows</a:t>
+            </a:r>
+            <a:pPr algn="l" indent="0" marL="0">
+              <a:lnSpc>
+                <a:spcPts val="1680"/>
+              </a:lnSpc>
+              <a:spcBef>
+                <a:spcPts val="300"/>
+              </a:spcBef>
+              <a:spcAft>
+                <a:spcPts val="300"/>
+              </a:spcAft>
+              <a:buNone/>
+            </a:pPr>
+            <a:r>
+              <a:rPr lang="en-US" sz="1200" dirty="0">
+                <a:solidFill>
+                  <a:srgbClr val="1C2833"/>
+                </a:solidFill>
+                <a:latin typeface="Arial" pitchFamily="34" charset="0"/>
+                <a:ea typeface="Arial" pitchFamily="34" charset="-122"/>
+                <a:cs typeface="Arial" pitchFamily="34" charset="-120"/>
+              </a:rPr>
+              <a:t> are an Ayurvedic codification — not a 1:1 match with modern timing studies, but a workable approximation.</a:t>
+            </a:r>
+            <a:endParaRPr lang="en-US" sz="1200" dirty="0"/>
+          </a:p>
+        </p:txBody>
+      </p:sp>
+      <p:sp>
+        <p:nvSpPr>
+          <p:cNvPr id="5" name="Text 3"/>
+          <p:cNvSpPr/>
+          <p:nvPr/>
+        </p:nvSpPr>
+        <p:spPr>
+          <a:xfrm>
+            <a:off x="406301" y="4434929"/>
+            <a:ext cx="8498026" cy="213271"/>
+          </a:xfrm>
+          <a:prstGeom prst="rect">
+            <a:avLst/>
+          </a:prstGeom>
+          <a:noFill/>
+          <a:ln/>
+        </p:spPr>
+        <p:txBody>
+          <a:bodyPr wrap="square" lIns="0" tIns="0" rIns="0" bIns="0" rtlCol="0" anchor="t"/>
+          <a:lstStyle/>
+          <a:p>
+            <a:pPr algn="l" indent="0" marL="0">
+              <a:lnSpc>
+                <a:spcPts val="1680"/>
+              </a:lnSpc>
+              <a:spcBef>
+                <a:spcPts val="300"/>
+              </a:spcBef>
+              <a:spcAft>
+                <a:spcPts val="300"/>
+              </a:spcAft>
+              <a:buNone/>
+            </a:pPr>
+            <a:r>
+              <a:rPr lang="en-US" sz="1200" dirty="0">
+                <a:solidFill>
+                  <a:srgbClr val="1C2833"/>
+                </a:solidFill>
+                <a:latin typeface="Arial" pitchFamily="34" charset="0"/>
+                <a:ea typeface="Arial" pitchFamily="34" charset="-122"/>
+                <a:cs typeface="Arial" pitchFamily="34" charset="-120"/>
+              </a:rPr>
+              <a:t>Middle ·  · IKS Curriculum</a:t>
+            </a:r>
+            <a:endParaRPr lang="en-US" sz="1200" dirty="0"/>
+          </a:p>
+        </p:txBody>
+      </p:sp>
+    </p:spTree>
+  </p:cSld>
+  <p:clrMapOvr>
+    <a:masterClrMapping/>
+  </p:clrMapOvr>
+</p:sld>
+</file>
+
+<file path=ppt/slides/slide14.xml><?xml version="1.0" encoding="utf-8"?>
+<p:sld xmlns:a="http://schemas.openxmlformats.org/drawingml/2006/main" xmlns:r="http://schemas.openxmlformats.org/officeDocument/2006/relationships" xmlns:p="http://schemas.openxmlformats.org/presentationml/2006/main">
+  <p:cSld name="Slide 14">
+    <p:bg>
+      <p:bgPr>
+        <a:solidFill>
+          <a:srgbClr val="FFFFFF"/>
+        </a:solidFill>
+      </p:bgPr>
+    </p:bg>
+    <p:spTree>
+      <p:nvGrpSpPr>
+        <p:cNvPr id="1" name=""/>
+        <p:cNvGrpSpPr/>
+        <p:nvPr/>
+      </p:nvGrpSpPr>
+      <p:grpSpPr>
+        <a:xfrm>
+          <a:off x="0" y="0"/>
+          <a:ext cx="0" cy="0"/>
+          <a:chOff x="0" y="0"/>
+          <a:chExt cx="0" cy="0"/>
+        </a:xfrm>
+      </p:grpSpPr>
+      <p:sp>
+        <p:nvSpPr>
+          <p:cNvPr id="2" name="Text 0"/>
+          <p:cNvSpPr/>
+          <p:nvPr/>
+        </p:nvSpPr>
+        <p:spPr>
+          <a:xfrm>
+            <a:off x="0" y="0"/>
+            <a:ext cx="9144000" cy="101501"/>
+          </a:xfrm>
+          <a:prstGeom prst="rect">
+            <a:avLst/>
+          </a:prstGeom>
+          <a:solidFill>
+            <a:srgbClr val="277884"/>
+          </a:solidFill>
+          <a:ln/>
+        </p:spPr>
+        <p:txBody>
+          <a:bodyPr wrap="square" rtlCol="0" anchor="ctr"/>
+          <a:lstStyle/>
+          <a:p>
+            <a:pPr indent="0" marL="0">
+              <a:buNone/>
+            </a:pPr>
+            <a:endParaRPr lang="en-US" dirty="0"/>
+          </a:p>
+        </p:txBody>
+      </p:sp>
+      <p:sp>
+        <p:nvSpPr>
+          <p:cNvPr id="3" name="Text 1"/>
+          <p:cNvSpPr/>
+          <p:nvPr/>
+        </p:nvSpPr>
+        <p:spPr>
+          <a:xfrm>
+            <a:off x="406301" y="457051"/>
+            <a:ext cx="8498026" cy="274290"/>
+          </a:xfrm>
+          <a:prstGeom prst="rect">
+            <a:avLst/>
+          </a:prstGeom>
+          <a:noFill/>
+          <a:ln/>
+        </p:spPr>
+        <p:txBody>
+          <a:bodyPr wrap="square" lIns="0" tIns="0" rIns="0" bIns="0" rtlCol="0" anchor="t"/>
+          <a:lstStyle/>
+          <a:p>
+            <a:pPr algn="l" indent="0" marL="0">
+              <a:lnSpc>
+                <a:spcPts val="2160"/>
+              </a:lnSpc>
+              <a:spcBef>
+                <a:spcPts val="600"/>
+              </a:spcBef>
+              <a:spcAft>
+                <a:spcPts val="800"/>
+              </a:spcAft>
+              <a:buNone/>
+            </a:pPr>
+            <a:r>
+              <a:rPr lang="en-US" sz="1800" b="1" dirty="0">
+                <a:solidFill>
+                  <a:srgbClr val="FE4447"/>
+                </a:solidFill>
+                <a:latin typeface="Georgia" pitchFamily="34" charset="0"/>
+                <a:ea typeface="Georgia" pitchFamily="34" charset="-122"/>
+                <a:cs typeface="Georgia" pitchFamily="34" charset="-120"/>
+              </a:rPr>
+              <a:t>Activity (15 min) — Map your day</a:t>
+            </a:r>
+            <a:endParaRPr lang="en-US" sz="1800" dirty="0"/>
+          </a:p>
+        </p:txBody>
+      </p:sp>
+      <p:sp>
+        <p:nvSpPr>
+          <p:cNvPr id="4" name="Text 2"/>
+          <p:cNvSpPr/>
+          <p:nvPr/>
+        </p:nvSpPr>
+        <p:spPr>
+          <a:xfrm>
+            <a:off x="634901" y="883593"/>
+            <a:ext cx="8102798" cy="1706463"/>
+          </a:xfrm>
+          <a:prstGeom prst="rect">
+            <a:avLst/>
+          </a:prstGeom>
+          <a:noFill/>
+          <a:ln/>
+        </p:spPr>
+        <p:txBody>
+          <a:bodyPr wrap="square" lIns="0" tIns="0" rIns="0" bIns="0" rtlCol="0" anchor="t"/>
+          <a:lstStyle/>
+          <a:p>
+            <a:pPr algn="l" marL="342900" indent="-342900">
+              <a:lnSpc>
+                <a:spcPts val="1620"/>
+              </a:lnSpc>
+              <a:spcAft>
+                <a:spcPts val="300"/>
+              </a:spcAft>
+              <a:buSzPct val="100000"/>
+              <a:buChar char="•"/>
+            </a:pPr>
+            <a:r>
+              <a:rPr lang="en-US" sz="1200" dirty="0">
+                <a:solidFill>
+                  <a:srgbClr val="1C2833"/>
+                </a:solidFill>
+                <a:latin typeface="Arial" pitchFamily="34" charset="0"/>
+                <a:ea typeface="Arial" pitchFamily="34" charset="-122"/>
+                <a:cs typeface="Arial" pitchFamily="34" charset="-120"/>
+              </a:rPr>
+              <a:t>Hand out the printed day-clock.</a:t>
+            </a:r>
+            <a:endParaRPr lang="en-US" sz="1200" dirty="0"/>
+          </a:p>
+          <a:p>
+            <a:pPr algn="l" marL="342900" indent="-342900">
+              <a:lnSpc>
+                <a:spcPts val="1620"/>
+              </a:lnSpc>
+              <a:spcAft>
+                <a:spcPts val="300"/>
+              </a:spcAft>
+              <a:buSzPct val="100000"/>
+              <a:buChar char="•"/>
+            </a:pPr>
+            <a:r>
+              <a:rPr lang="en-US" sz="1200" dirty="0">
+                <a:solidFill>
+                  <a:srgbClr val="1C2833"/>
+                </a:solidFill>
+                <a:latin typeface="Arial" pitchFamily="34" charset="0"/>
+                <a:ea typeface="Arial" pitchFamily="34" charset="-122"/>
+                <a:cs typeface="Arial" pitchFamily="34" charset="-120"/>
+              </a:rPr>
+              <a:t>Students annotate it with what they actually do at each window. (Wake 6:30, brush teeth, breakfast 7:30, school 8:30, lunch 12:30, etc.)</a:t>
+            </a:r>
+            <a:endParaRPr lang="en-US" sz="1200" dirty="0"/>
+          </a:p>
+          <a:p>
+            <a:pPr algn="l" marL="342900" indent="-342900">
+              <a:lnSpc>
+                <a:spcPts val="1620"/>
+              </a:lnSpc>
+              <a:spcAft>
+                <a:spcPts val="300"/>
+              </a:spcAft>
+              <a:buSzPct val="100000"/>
+              <a:buChar char="•"/>
+            </a:pPr>
+            <a:r>
+              <a:rPr lang="en-US" sz="1200" dirty="0">
+                <a:solidFill>
+                  <a:srgbClr val="1C2833"/>
+                </a:solidFill>
+                <a:latin typeface="Arial" pitchFamily="34" charset="0"/>
+                <a:ea typeface="Arial" pitchFamily="34" charset="-122"/>
+                <a:cs typeface="Arial" pitchFamily="34" charset="-120"/>
+              </a:rPr>
+              <a:t>For each entry, ask: </a:t>
+            </a:r>
+            <a:pPr algn="l" indent="0" marL="0">
+              <a:lnSpc>
+                <a:spcPts val="1620"/>
+              </a:lnSpc>
+              <a:spcAft>
+                <a:spcPts val="300"/>
+              </a:spcAft>
+              <a:buNone/>
+            </a:pPr>
+            <a:r>
+              <a:rPr lang="en-US" sz="1200" i="1" dirty="0">
+                <a:solidFill>
+                  <a:srgbClr val="1C2833"/>
+                </a:solidFill>
+                <a:latin typeface="Arial" pitchFamily="34" charset="0"/>
+                <a:ea typeface="Arial" pitchFamily="34" charset="-122"/>
+                <a:cs typeface="Arial" pitchFamily="34" charset="-120"/>
+              </a:rPr>
+              <a:t>"Is this activity matched to the dominant doṣa at this time?"</a:t>
+            </a:r>
+            <a:endParaRPr lang="en-US" sz="1200" dirty="0"/>
+          </a:p>
+          <a:p>
+            <a:pPr algn="l" marL="342900" indent="-342900">
+              <a:lnSpc>
+                <a:spcPts val="1620"/>
+              </a:lnSpc>
+              <a:spcAft>
+                <a:spcPts val="300"/>
+              </a:spcAft>
+              <a:buSzPct val="100000"/>
+              <a:buChar char="•"/>
+            </a:pPr>
+            <a:r>
+              <a:rPr lang="en-US" sz="1200" dirty="0">
+                <a:solidFill>
+                  <a:srgbClr val="1C2833"/>
+                </a:solidFill>
+                <a:latin typeface="Arial" pitchFamily="34" charset="0"/>
+                <a:ea typeface="Arial" pitchFamily="34" charset="-122"/>
+                <a:cs typeface="Arial" pitchFamily="34" charset="-120"/>
+              </a:rPr>
+              <a:t>Heavy lunch at noon (pitta time) — matched.</a:t>
+            </a:r>
+            <a:endParaRPr lang="en-US" sz="1200" dirty="0"/>
+          </a:p>
+          <a:p>
+            <a:pPr algn="l" marL="342900" indent="-342900">
+              <a:lnSpc>
+                <a:spcPts val="1620"/>
+              </a:lnSpc>
+              <a:spcAft>
+                <a:spcPts val="300"/>
+              </a:spcAft>
+              <a:buSzPct val="100000"/>
+              <a:buChar char="•"/>
+            </a:pPr>
+            <a:r>
+              <a:rPr lang="en-US" sz="1200" dirty="0">
+                <a:solidFill>
+                  <a:srgbClr val="1C2833"/>
+                </a:solidFill>
+                <a:latin typeface="Arial" pitchFamily="34" charset="0"/>
+                <a:ea typeface="Arial" pitchFamily="34" charset="-122"/>
+                <a:cs typeface="Arial" pitchFamily="34" charset="-120"/>
+              </a:rPr>
+              <a:t>Heavy dinner at 9 pm (kapha time) — mismatched.</a:t>
+            </a:r>
+            <a:endParaRPr lang="en-US" sz="1200" dirty="0"/>
+          </a:p>
+          <a:p>
+            <a:pPr algn="l" marL="342900" indent="-342900">
+              <a:lnSpc>
+                <a:spcPts val="1620"/>
+              </a:lnSpc>
+              <a:spcAft>
+                <a:spcPts val="300"/>
+              </a:spcAft>
+              <a:buSzPct val="100000"/>
+              <a:buChar char="•"/>
+            </a:pPr>
+            <a:r>
+              <a:rPr lang="en-US" sz="1200" dirty="0">
+                <a:solidFill>
+                  <a:srgbClr val="1C2833"/>
+                </a:solidFill>
+                <a:latin typeface="Arial" pitchFamily="34" charset="0"/>
+                <a:ea typeface="Arial" pitchFamily="34" charset="-122"/>
+                <a:cs typeface="Arial" pitchFamily="34" charset="-120"/>
+              </a:rPr>
+              <a:t>Heavy nap at 3 pm (vāta time) — mismatched.</a:t>
+            </a:r>
+            <a:endParaRPr lang="en-US" sz="1200" dirty="0"/>
+          </a:p>
+        </p:txBody>
+      </p:sp>
+      <p:sp>
+        <p:nvSpPr>
+          <p:cNvPr id="5" name="Text 3"/>
+          <p:cNvSpPr/>
+          <p:nvPr/>
+        </p:nvSpPr>
+        <p:spPr>
+          <a:xfrm>
+            <a:off x="406301" y="4434929"/>
+            <a:ext cx="8498026" cy="213271"/>
+          </a:xfrm>
+          <a:prstGeom prst="rect">
+            <a:avLst/>
+          </a:prstGeom>
+          <a:noFill/>
+          <a:ln/>
+        </p:spPr>
+        <p:txBody>
+          <a:bodyPr wrap="square" lIns="0" tIns="0" rIns="0" bIns="0" rtlCol="0" anchor="t"/>
+          <a:lstStyle/>
+          <a:p>
+            <a:pPr algn="l" indent="0" marL="0">
+              <a:lnSpc>
+                <a:spcPts val="1680"/>
+              </a:lnSpc>
+              <a:spcBef>
+                <a:spcPts val="300"/>
+              </a:spcBef>
+              <a:spcAft>
+                <a:spcPts val="300"/>
+              </a:spcAft>
+              <a:buNone/>
+            </a:pPr>
+            <a:r>
+              <a:rPr lang="en-US" sz="1200" dirty="0">
+                <a:solidFill>
+                  <a:srgbClr val="1C2833"/>
+                </a:solidFill>
+                <a:latin typeface="Arial" pitchFamily="34" charset="0"/>
+                <a:ea typeface="Arial" pitchFamily="34" charset="-122"/>
+                <a:cs typeface="Arial" pitchFamily="34" charset="-120"/>
+              </a:rPr>
+              <a:t>Middle ·  · IKS Curriculum</a:t>
+            </a:r>
+            <a:endParaRPr lang="en-US" sz="1200" dirty="0"/>
+          </a:p>
+        </p:txBody>
+      </p:sp>
+    </p:spTree>
+  </p:cSld>
+  <p:clrMapOvr>
+    <a:masterClrMapping/>
+  </p:clrMapOvr>
+</p:sld>
+</file>
+
+<file path=ppt/slides/slide15.xml><?xml version="1.0" encoding="utf-8"?>
+<p:sld xmlns:a="http://schemas.openxmlformats.org/drawingml/2006/main" xmlns:r="http://schemas.openxmlformats.org/officeDocument/2006/relationships" xmlns:p="http://schemas.openxmlformats.org/presentationml/2006/main">
+  <p:cSld name="Slide 15">
+    <p:bg>
+      <p:bgPr>
+        <a:solidFill>
+          <a:srgbClr val="FFFFFF"/>
+        </a:solidFill>
+      </p:bgPr>
+    </p:bg>
+    <p:spTree>
+      <p:nvGrpSpPr>
+        <p:cNvPr id="1" name=""/>
+        <p:cNvGrpSpPr/>
+        <p:nvPr/>
+      </p:nvGrpSpPr>
+      <p:grpSpPr>
+        <a:xfrm>
+          <a:off x="0" y="0"/>
+          <a:ext cx="0" cy="0"/>
+          <a:chOff x="0" y="0"/>
+          <a:chExt cx="0" cy="0"/>
+        </a:xfrm>
+      </p:grpSpPr>
+      <p:sp>
+        <p:nvSpPr>
+          <p:cNvPr id="2" name="Text 0"/>
+          <p:cNvSpPr/>
+          <p:nvPr/>
+        </p:nvSpPr>
+        <p:spPr>
+          <a:xfrm>
+            <a:off x="0" y="0"/>
+            <a:ext cx="9144000" cy="101501"/>
+          </a:xfrm>
+          <a:prstGeom prst="rect">
+            <a:avLst/>
+          </a:prstGeom>
+          <a:solidFill>
+            <a:srgbClr val="277884"/>
+          </a:solidFill>
+          <a:ln/>
+        </p:spPr>
+        <p:txBody>
+          <a:bodyPr wrap="square" rtlCol="0" anchor="ctr"/>
+          <a:lstStyle/>
+          <a:p>
+            <a:pPr indent="0" marL="0">
+              <a:buNone/>
+            </a:pPr>
+            <a:endParaRPr lang="en-US" dirty="0"/>
+          </a:p>
+        </p:txBody>
+      </p:sp>
+      <p:sp>
+        <p:nvSpPr>
+          <p:cNvPr id="3" name="Text 1"/>
+          <p:cNvSpPr/>
+          <p:nvPr/>
+        </p:nvSpPr>
+        <p:spPr>
+          <a:xfrm>
+            <a:off x="406301" y="457051"/>
+            <a:ext cx="8498026" cy="274290"/>
+          </a:xfrm>
+          <a:prstGeom prst="rect">
+            <a:avLst/>
+          </a:prstGeom>
+          <a:noFill/>
+          <a:ln/>
+        </p:spPr>
+        <p:txBody>
+          <a:bodyPr wrap="square" lIns="0" tIns="0" rIns="0" bIns="0" rtlCol="0" anchor="t"/>
+          <a:lstStyle/>
+          <a:p>
+            <a:pPr algn="l" indent="0" marL="0">
+              <a:lnSpc>
+                <a:spcPts val="2160"/>
+              </a:lnSpc>
+              <a:spcBef>
+                <a:spcPts val="600"/>
+              </a:spcBef>
+              <a:spcAft>
+                <a:spcPts val="800"/>
+              </a:spcAft>
+              <a:buNone/>
+            </a:pPr>
+            <a:r>
+              <a:rPr lang="en-US" sz="1800" b="1" dirty="0">
+                <a:solidFill>
+                  <a:srgbClr val="FE4447"/>
+                </a:solidFill>
+                <a:latin typeface="Georgia" pitchFamily="34" charset="0"/>
+                <a:ea typeface="Georgia" pitchFamily="34" charset="-122"/>
+                <a:cs typeface="Georgia" pitchFamily="34" charset="-120"/>
+              </a:rPr>
+              <a:t>Activity (15 min) — Map your day (cont.)</a:t>
+            </a:r>
+            <a:endParaRPr lang="en-US" sz="1800" dirty="0"/>
+          </a:p>
+        </p:txBody>
+      </p:sp>
+      <p:sp>
+        <p:nvSpPr>
+          <p:cNvPr id="4" name="Text 2"/>
+          <p:cNvSpPr/>
+          <p:nvPr/>
+        </p:nvSpPr>
+        <p:spPr>
+          <a:xfrm>
+            <a:off x="634901" y="883593"/>
+            <a:ext cx="8102798" cy="281880"/>
+          </a:xfrm>
+          <a:prstGeom prst="rect">
+            <a:avLst/>
+          </a:prstGeom>
+          <a:noFill/>
+          <a:ln/>
+        </p:spPr>
+        <p:txBody>
+          <a:bodyPr wrap="square" lIns="0" tIns="0" rIns="0" bIns="0" rtlCol="0" anchor="t"/>
+          <a:lstStyle/>
+          <a:p>
+            <a:pPr algn="l" marL="342900" indent="-342900">
+              <a:lnSpc>
+                <a:spcPts val="1620"/>
+              </a:lnSpc>
+              <a:spcAft>
+                <a:spcPts val="300"/>
+              </a:spcAft>
+              <a:buSzPct val="100000"/>
+              <a:buChar char="•"/>
+            </a:pPr>
+            <a:r>
+              <a:rPr lang="en-US" sz="1200" dirty="0">
+                <a:solidFill>
+                  <a:srgbClr val="1C2833"/>
+                </a:solidFill>
+                <a:latin typeface="Arial" pitchFamily="34" charset="0"/>
+                <a:ea typeface="Arial" pitchFamily="34" charset="-122"/>
+                <a:cs typeface="Arial" pitchFamily="34" charset="-120"/>
+              </a:rPr>
+              <a:t>Each student picks ONE mismatch and writes a one-line </a:t>
+            </a:r>
+            <a:pPr algn="l" indent="0" marL="0">
+              <a:lnSpc>
+                <a:spcPts val="1620"/>
+              </a:lnSpc>
+              <a:spcAft>
+                <a:spcPts val="300"/>
+              </a:spcAft>
+              <a:buNone/>
+            </a:pPr>
+            <a:r>
+              <a:rPr lang="en-US" sz="1200" i="1" dirty="0">
+                <a:solidFill>
+                  <a:srgbClr val="1C2833"/>
+                </a:solidFill>
+                <a:latin typeface="Arial" pitchFamily="34" charset="0"/>
+                <a:ea typeface="Arial" pitchFamily="34" charset="-122"/>
+                <a:cs typeface="Arial" pitchFamily="34" charset="-120"/>
+              </a:rPr>
+              <a:t>what would I change?</a:t>
+            </a:r>
+            <a:endParaRPr lang="en-US" sz="1200" dirty="0"/>
+          </a:p>
+        </p:txBody>
+      </p:sp>
+      <p:sp>
+        <p:nvSpPr>
+          <p:cNvPr id="5" name="Text 3"/>
+          <p:cNvSpPr/>
+          <p:nvPr/>
+        </p:nvSpPr>
+        <p:spPr>
+          <a:xfrm>
+            <a:off x="406301" y="4434929"/>
+            <a:ext cx="8498026" cy="213271"/>
+          </a:xfrm>
+          <a:prstGeom prst="rect">
+            <a:avLst/>
+          </a:prstGeom>
+          <a:noFill/>
+          <a:ln/>
+        </p:spPr>
+        <p:txBody>
+          <a:bodyPr wrap="square" lIns="0" tIns="0" rIns="0" bIns="0" rtlCol="0" anchor="t"/>
+          <a:lstStyle/>
+          <a:p>
+            <a:pPr algn="l" indent="0" marL="0">
+              <a:lnSpc>
+                <a:spcPts val="1680"/>
+              </a:lnSpc>
+              <a:spcBef>
+                <a:spcPts val="300"/>
+              </a:spcBef>
+              <a:spcAft>
+                <a:spcPts val="300"/>
+              </a:spcAft>
+              <a:buNone/>
+            </a:pPr>
+            <a:r>
+              <a:rPr lang="en-US" sz="1200" dirty="0">
+                <a:solidFill>
+                  <a:srgbClr val="1C2833"/>
+                </a:solidFill>
+                <a:latin typeface="Arial" pitchFamily="34" charset="0"/>
+                <a:ea typeface="Arial" pitchFamily="34" charset="-122"/>
+                <a:cs typeface="Arial" pitchFamily="34" charset="-120"/>
+              </a:rPr>
+              <a:t>Middle ·  · IKS Curriculum</a:t>
+            </a:r>
+            <a:endParaRPr lang="en-US" sz="1200" dirty="0"/>
+          </a:p>
+        </p:txBody>
+      </p:sp>
+    </p:spTree>
+  </p:cSld>
+  <p:clrMapOvr>
+    <a:masterClrMapping/>
+  </p:clrMapOvr>
+</p:sld>
+</file>
+
+<file path=ppt/slides/slide16.xml><?xml version="1.0" encoding="utf-8"?>
+<p:sld xmlns:a="http://schemas.openxmlformats.org/drawingml/2006/main" xmlns:r="http://schemas.openxmlformats.org/officeDocument/2006/relationships" xmlns:p="http://schemas.openxmlformats.org/presentationml/2006/main">
+  <p:cSld name="Slide 16">
+    <p:bg>
+      <p:bgPr>
+        <a:solidFill>
+          <a:srgbClr val="FFFFFF"/>
+        </a:solidFill>
+      </p:bgPr>
+    </p:bg>
+    <p:spTree>
+      <p:nvGrpSpPr>
+        <p:cNvPr id="1" name=""/>
+        <p:cNvGrpSpPr/>
+        <p:nvPr/>
+      </p:nvGrpSpPr>
+      <p:grpSpPr>
+        <a:xfrm>
+          <a:off x="0" y="0"/>
+          <a:ext cx="0" cy="0"/>
+          <a:chOff x="0" y="0"/>
+          <a:chExt cx="0" cy="0"/>
+        </a:xfrm>
+      </p:grpSpPr>
+      <p:sp>
+        <p:nvSpPr>
+          <p:cNvPr id="2" name="Text 0"/>
+          <p:cNvSpPr/>
+          <p:nvPr/>
+        </p:nvSpPr>
+        <p:spPr>
+          <a:xfrm>
+            <a:off x="0" y="0"/>
+            <a:ext cx="9144000" cy="101501"/>
+          </a:xfrm>
+          <a:prstGeom prst="rect">
+            <a:avLst/>
+          </a:prstGeom>
+          <a:solidFill>
+            <a:srgbClr val="277884"/>
+          </a:solidFill>
+          <a:ln/>
+        </p:spPr>
+        <p:txBody>
+          <a:bodyPr wrap="square" rtlCol="0" anchor="ctr"/>
+          <a:lstStyle/>
+          <a:p>
+            <a:pPr indent="0" marL="0">
+              <a:buNone/>
+            </a:pPr>
+            <a:endParaRPr lang="en-US" dirty="0"/>
+          </a:p>
+        </p:txBody>
+      </p:sp>
+      <p:sp>
+        <p:nvSpPr>
+          <p:cNvPr id="3" name="Text 1"/>
+          <p:cNvSpPr/>
+          <p:nvPr/>
+        </p:nvSpPr>
+        <p:spPr>
+          <a:xfrm>
+            <a:off x="406301" y="457051"/>
+            <a:ext cx="8498026" cy="274290"/>
+          </a:xfrm>
+          <a:prstGeom prst="rect">
+            <a:avLst/>
+          </a:prstGeom>
+          <a:noFill/>
+          <a:ln/>
+        </p:spPr>
+        <p:txBody>
+          <a:bodyPr wrap="square" lIns="0" tIns="0" rIns="0" bIns="0" rtlCol="0" anchor="t"/>
+          <a:lstStyle/>
+          <a:p>
+            <a:pPr algn="l" indent="0" marL="0">
+              <a:lnSpc>
+                <a:spcPts val="2160"/>
+              </a:lnSpc>
+              <a:spcBef>
+                <a:spcPts val="600"/>
+              </a:spcBef>
+              <a:spcAft>
+                <a:spcPts val="800"/>
+              </a:spcAft>
+              <a:buNone/>
+            </a:pPr>
+            <a:r>
+              <a:rPr lang="en-US" sz="1800" b="1" dirty="0">
+                <a:solidFill>
+                  <a:srgbClr val="FE4447"/>
+                </a:solidFill>
+                <a:latin typeface="Georgia" pitchFamily="34" charset="0"/>
+                <a:ea typeface="Georgia" pitchFamily="34" charset="-122"/>
+                <a:cs typeface="Georgia" pitchFamily="34" charset="-120"/>
+              </a:rPr>
+              <a:t>Wrap-up (5 min)</a:t>
+            </a:r>
+            <a:endParaRPr lang="en-US" sz="1800" dirty="0"/>
+          </a:p>
+        </p:txBody>
+      </p:sp>
+      <p:sp>
+        <p:nvSpPr>
+          <p:cNvPr id="4" name="Text 2"/>
+          <p:cNvSpPr/>
+          <p:nvPr/>
+        </p:nvSpPr>
+        <p:spPr>
+          <a:xfrm>
+            <a:off x="634901" y="883593"/>
+            <a:ext cx="8102798" cy="788491"/>
+          </a:xfrm>
+          <a:prstGeom prst="rect">
+            <a:avLst/>
+          </a:prstGeom>
+          <a:noFill/>
+          <a:ln/>
+        </p:spPr>
+        <p:txBody>
+          <a:bodyPr wrap="square" lIns="0" tIns="0" rIns="0" bIns="0" rtlCol="0" anchor="t"/>
+          <a:lstStyle/>
+          <a:p>
+            <a:pPr algn="l" marL="342900" indent="-342900">
+              <a:lnSpc>
+                <a:spcPts val="1620"/>
+              </a:lnSpc>
+              <a:spcAft>
+                <a:spcPts val="300"/>
+              </a:spcAft>
+              <a:buSzPct val="100000"/>
+              <a:buChar char="•"/>
+            </a:pPr>
+            <a:r>
+              <a:rPr lang="en-US" sz="1200" b="1" dirty="0">
+                <a:solidFill>
+                  <a:srgbClr val="1C2833"/>
+                </a:solidFill>
+                <a:latin typeface="Arial" pitchFamily="34" charset="0"/>
+                <a:ea typeface="Arial" pitchFamily="34" charset="-122"/>
+                <a:cs typeface="Arial" pitchFamily="34" charset="-120"/>
+              </a:rPr>
+              <a:t>Formative quiz, Part B</a:t>
+            </a:r>
+            <a:pPr algn="l" indent="0" marL="0">
+              <a:lnSpc>
+                <a:spcPts val="1620"/>
+              </a:lnSpc>
+              <a:spcAft>
+                <a:spcPts val="300"/>
+              </a:spcAft>
+              <a:buNone/>
+            </a:pPr>
+            <a:r>
+              <a:rPr lang="en-US" sz="1200" dirty="0">
+                <a:solidFill>
+                  <a:srgbClr val="1C2833"/>
+                </a:solidFill>
+                <a:latin typeface="Arial" pitchFamily="34" charset="0"/>
+                <a:ea typeface="Arial" pitchFamily="34" charset="-122"/>
+                <a:cs typeface="Arial" pitchFamily="34" charset="-120"/>
+              </a:rPr>
+              <a:t> (5 questions, 4 min) — see </a:t>
+            </a:r>
+            <a:pPr algn="l" indent="0" marL="0">
+              <a:lnSpc>
+                <a:spcPts val="1620"/>
+              </a:lnSpc>
+              <a:spcAft>
+                <a:spcPts val="300"/>
+              </a:spcAft>
+              <a:buNone/>
+            </a:pPr>
+            <a:r>
+              <a:rPr lang="en-US" sz="1200" dirty="0">
+                <a:solidFill>
+                  <a:srgbClr val="1C2833"/>
+                </a:solidFill>
+                <a:latin typeface="Arial" pitchFamily="34" charset="0"/>
+                <a:ea typeface="Arial" pitchFamily="34" charset="-122"/>
+                <a:cs typeface="Arial" pitchFamily="34" charset="-120"/>
+              </a:rPr>
+              <a:t>quizzes/formative.md</a:t>
+            </a:r>
+            <a:pPr algn="l" indent="0" marL="0">
+              <a:lnSpc>
+                <a:spcPts val="1620"/>
+              </a:lnSpc>
+              <a:spcAft>
+                <a:spcPts val="300"/>
+              </a:spcAft>
+              <a:buNone/>
+            </a:pPr>
+            <a:r>
+              <a:rPr lang="en-US" sz="1200" dirty="0">
+                <a:solidFill>
+                  <a:srgbClr val="1C2833"/>
+                </a:solidFill>
+                <a:latin typeface="Arial" pitchFamily="34" charset="0"/>
+                <a:ea typeface="Arial" pitchFamily="34" charset="-122"/>
+                <a:cs typeface="Arial" pitchFamily="34" charset="-120"/>
+              </a:rPr>
+              <a:t> Part B.</a:t>
+            </a:r>
+            <a:endParaRPr lang="en-US" sz="1200" dirty="0"/>
+          </a:p>
+          <a:p>
+            <a:pPr algn="l" marL="342900" indent="-342900">
+              <a:lnSpc>
+                <a:spcPts val="1620"/>
+              </a:lnSpc>
+              <a:spcAft>
+                <a:spcPts val="300"/>
+              </a:spcAft>
+              <a:buSzPct val="100000"/>
+              <a:buChar char="•"/>
+            </a:pPr>
+            <a:r>
+              <a:rPr lang="en-US" sz="1200" dirty="0">
+                <a:solidFill>
+                  <a:srgbClr val="1C2833"/>
+                </a:solidFill>
+                <a:latin typeface="Arial" pitchFamily="34" charset="0"/>
+                <a:ea typeface="Arial" pitchFamily="34" charset="-122"/>
+                <a:cs typeface="Arial" pitchFamily="34" charset="-120"/>
+              </a:rPr>
+              <a:t>Collect.</a:t>
+            </a:r>
+            <a:endParaRPr lang="en-US" sz="1200" dirty="0"/>
+          </a:p>
+          <a:p>
+            <a:pPr algn="l" marL="342900" indent="-342900">
+              <a:lnSpc>
+                <a:spcPts val="1620"/>
+              </a:lnSpc>
+              <a:spcAft>
+                <a:spcPts val="300"/>
+              </a:spcAft>
+              <a:buSzPct val="100000"/>
+              <a:buChar char="•"/>
+            </a:pPr>
+            <a:r>
+              <a:rPr lang="en-US" sz="1200" dirty="0">
+                <a:solidFill>
+                  <a:srgbClr val="1C2833"/>
+                </a:solidFill>
+                <a:latin typeface="Arial" pitchFamily="34" charset="0"/>
+                <a:ea typeface="Arial" pitchFamily="34" charset="-122"/>
+                <a:cs typeface="Arial" pitchFamily="34" charset="-120"/>
+              </a:rPr>
+              <a:t>Preview Day 6: </a:t>
+            </a:r>
+            <a:pPr algn="l" indent="0" marL="0">
+              <a:lnSpc>
+                <a:spcPts val="1620"/>
+              </a:lnSpc>
+              <a:spcAft>
+                <a:spcPts val="300"/>
+              </a:spcAft>
+              <a:buNone/>
+            </a:pPr>
+            <a:r>
+              <a:rPr lang="en-US" sz="1200" i="1" dirty="0">
+                <a:solidFill>
+                  <a:srgbClr val="1C2833"/>
+                </a:solidFill>
+                <a:latin typeface="Arial" pitchFamily="34" charset="0"/>
+                <a:ea typeface="Arial" pitchFamily="34" charset="-122"/>
+                <a:cs typeface="Arial" pitchFamily="34" charset="-120"/>
+              </a:rPr>
+              <a:t>"Tomorrow — the six tastes. Yes, we will taste things."</a:t>
+            </a:r>
+            <a:endParaRPr lang="en-US" sz="1200" dirty="0"/>
+          </a:p>
+        </p:txBody>
+      </p:sp>
+      <p:sp>
+        <p:nvSpPr>
+          <p:cNvPr id="5" name="Text 3"/>
+          <p:cNvSpPr/>
+          <p:nvPr/>
+        </p:nvSpPr>
+        <p:spPr>
+          <a:xfrm>
+            <a:off x="406301" y="4434929"/>
+            <a:ext cx="8498026" cy="213271"/>
+          </a:xfrm>
+          <a:prstGeom prst="rect">
+            <a:avLst/>
+          </a:prstGeom>
+          <a:noFill/>
+          <a:ln/>
+        </p:spPr>
+        <p:txBody>
+          <a:bodyPr wrap="square" lIns="0" tIns="0" rIns="0" bIns="0" rtlCol="0" anchor="t"/>
+          <a:lstStyle/>
+          <a:p>
+            <a:pPr algn="l" indent="0" marL="0">
+              <a:lnSpc>
+                <a:spcPts val="1680"/>
+              </a:lnSpc>
+              <a:spcBef>
+                <a:spcPts val="300"/>
+              </a:spcBef>
+              <a:spcAft>
+                <a:spcPts val="300"/>
+              </a:spcAft>
+              <a:buNone/>
+            </a:pPr>
+            <a:r>
+              <a:rPr lang="en-US" sz="1200" dirty="0">
+                <a:solidFill>
+                  <a:srgbClr val="1C2833"/>
+                </a:solidFill>
+                <a:latin typeface="Arial" pitchFamily="34" charset="0"/>
+                <a:ea typeface="Arial" pitchFamily="34" charset="-122"/>
+                <a:cs typeface="Arial" pitchFamily="34" charset="-120"/>
+              </a:rPr>
+              <a:t>Middle ·  · IKS Curriculum</a:t>
+            </a:r>
+            <a:endParaRPr lang="en-US" sz="1200" dirty="0"/>
+          </a:p>
+        </p:txBody>
+      </p:sp>
+    </p:spTree>
+  </p:cSld>
+  <p:clrMapOvr>
+    <a:masterClrMapping/>
+  </p:clrMapOvr>
+</p:sld>
+</file>
+
+<file path=ppt/slides/slide17.xml><?xml version="1.0" encoding="utf-8"?>
+<p:sld xmlns:a="http://schemas.openxmlformats.org/drawingml/2006/main" xmlns:r="http://schemas.openxmlformats.org/officeDocument/2006/relationships" xmlns:p="http://schemas.openxmlformats.org/presentationml/2006/main">
+  <p:cSld name="Slide 17">
+    <p:bg>
+      <p:bgPr>
+        <a:solidFill>
+          <a:srgbClr val="FFFFFF"/>
+        </a:solidFill>
+      </p:bgPr>
+    </p:bg>
+    <p:spTree>
+      <p:nvGrpSpPr>
+        <p:cNvPr id="1" name=""/>
+        <p:cNvGrpSpPr/>
+        <p:nvPr/>
+      </p:nvGrpSpPr>
+      <p:grpSpPr>
+        <a:xfrm>
+          <a:off x="0" y="0"/>
+          <a:ext cx="0" cy="0"/>
+          <a:chOff x="0" y="0"/>
+          <a:chExt cx="0" cy="0"/>
+        </a:xfrm>
+      </p:grpSpPr>
+      <p:sp>
+        <p:nvSpPr>
+          <p:cNvPr id="2" name="Text 0"/>
+          <p:cNvSpPr/>
+          <p:nvPr/>
+        </p:nvSpPr>
+        <p:spPr>
+          <a:xfrm>
+            <a:off x="0" y="0"/>
+            <a:ext cx="9144000" cy="101501"/>
+          </a:xfrm>
+          <a:prstGeom prst="rect">
+            <a:avLst/>
+          </a:prstGeom>
+          <a:solidFill>
+            <a:srgbClr val="277884"/>
+          </a:solidFill>
+          <a:ln/>
+        </p:spPr>
+        <p:txBody>
+          <a:bodyPr wrap="square" rtlCol="0" anchor="ctr"/>
+          <a:lstStyle/>
+          <a:p>
+            <a:pPr indent="0" marL="0">
+              <a:buNone/>
+            </a:pPr>
+            <a:endParaRPr lang="en-US" dirty="0"/>
+          </a:p>
+        </p:txBody>
+      </p:sp>
+      <p:sp>
+        <p:nvSpPr>
+          <p:cNvPr id="3" name="Text 1"/>
+          <p:cNvSpPr/>
+          <p:nvPr/>
+        </p:nvSpPr>
+        <p:spPr>
+          <a:xfrm>
+            <a:off x="406301" y="457051"/>
+            <a:ext cx="8498026" cy="274290"/>
+          </a:xfrm>
+          <a:prstGeom prst="rect">
+            <a:avLst/>
+          </a:prstGeom>
+          <a:noFill/>
+          <a:ln/>
+        </p:spPr>
+        <p:txBody>
+          <a:bodyPr wrap="square" lIns="0" tIns="0" rIns="0" bIns="0" rtlCol="0" anchor="t"/>
+          <a:lstStyle/>
+          <a:p>
+            <a:pPr algn="l" indent="0" marL="0">
+              <a:lnSpc>
+                <a:spcPts val="2160"/>
+              </a:lnSpc>
+              <a:spcBef>
+                <a:spcPts val="600"/>
+              </a:spcBef>
+              <a:spcAft>
+                <a:spcPts val="800"/>
+              </a:spcAft>
+              <a:buNone/>
+            </a:pPr>
+            <a:r>
+              <a:rPr lang="en-US" sz="1800" b="1" dirty="0">
+                <a:solidFill>
+                  <a:srgbClr val="FE4447"/>
+                </a:solidFill>
+                <a:latin typeface="Georgia" pitchFamily="34" charset="0"/>
+                <a:ea typeface="Georgia" pitchFamily="34" charset="-122"/>
+                <a:cs typeface="Georgia" pitchFamily="34" charset="-120"/>
+              </a:rPr>
+              <a:t>Student-facing content</a:t>
+            </a:r>
+            <a:endParaRPr lang="en-US" sz="1800" dirty="0"/>
+          </a:p>
+        </p:txBody>
+      </p:sp>
+      <p:sp>
+        <p:nvSpPr>
+          <p:cNvPr id="4" name="Text 2"/>
+          <p:cNvSpPr/>
+          <p:nvPr/>
+        </p:nvSpPr>
+        <p:spPr>
+          <a:xfrm>
+            <a:off x="406301" y="883593"/>
+            <a:ext cx="8331398" cy="3074194"/>
+          </a:xfrm>
+          <a:prstGeom prst="rect">
+            <a:avLst/>
+          </a:prstGeom>
+          <a:solidFill>
+            <a:srgbClr val="F4F8F9"/>
+          </a:solidFill>
+          <a:ln/>
+        </p:spPr>
+        <p:txBody>
+          <a:bodyPr wrap="square" rtlCol="0" anchor="ctr"/>
+          <a:lstStyle/>
+          <a:p>
+            <a:pPr indent="0" marL="0">
+              <a:buNone/>
+            </a:pPr>
+            <a:endParaRPr lang="en-US" dirty="0"/>
+          </a:p>
+        </p:txBody>
+      </p:sp>
+      <p:sp>
+        <p:nvSpPr>
+          <p:cNvPr id="5" name="Shape 3"/>
+          <p:cNvSpPr/>
+          <p:nvPr/>
+        </p:nvSpPr>
+        <p:spPr>
+          <a:xfrm>
+            <a:off x="434876" y="883593"/>
+            <a:ext cx="0" cy="3074194"/>
+          </a:xfrm>
+          <a:prstGeom prst="line">
+            <a:avLst/>
+          </a:prstGeom>
+          <a:noFill/>
+          <a:ln w="57150">
+            <a:solidFill>
+              <a:srgbClr val="FE4447"/>
+            </a:solidFill>
+            <a:prstDash val="solid"/>
+          </a:ln>
+        </p:spPr>
+      </p:sp>
+      <p:sp>
+        <p:nvSpPr>
+          <p:cNvPr id="6" name="Text 4"/>
+          <p:cNvSpPr/>
+          <p:nvPr/>
+        </p:nvSpPr>
+        <p:spPr>
+          <a:xfrm>
+            <a:off x="692051" y="1074093"/>
+            <a:ext cx="7973389" cy="230981"/>
+          </a:xfrm>
+          <a:prstGeom prst="rect">
+            <a:avLst/>
+          </a:prstGeom>
+          <a:noFill/>
+          <a:ln/>
+        </p:spPr>
+        <p:txBody>
+          <a:bodyPr wrap="square" lIns="0" tIns="0" rIns="0" bIns="0" rtlCol="0" anchor="t"/>
+          <a:lstStyle/>
+          <a:p>
+            <a:pPr algn="l" indent="0" marL="0">
+              <a:lnSpc>
+                <a:spcPts val="1820"/>
+              </a:lnSpc>
+              <a:spcBef>
+                <a:spcPts val="300"/>
+              </a:spcBef>
+              <a:spcAft>
+                <a:spcPts val="300"/>
+              </a:spcAft>
+              <a:buNone/>
+            </a:pPr>
+            <a:r>
+              <a:rPr lang="en-US" sz="1300" b="1" i="1" dirty="0">
+                <a:solidFill>
+                  <a:srgbClr val="1C2833"/>
+                </a:solidFill>
+                <a:latin typeface="Georgia" pitchFamily="34" charset="0"/>
+                <a:ea typeface="Georgia" pitchFamily="34" charset="-122"/>
+                <a:cs typeface="Georgia" pitchFamily="34" charset="-120"/>
+              </a:rPr>
+              <a:t>The doṣa day-clock:</a:t>
+            </a:r>
+            <a:endParaRPr lang="en-US" sz="1300" dirty="0"/>
+          </a:p>
+        </p:txBody>
+      </p:sp>
+      <p:sp>
+        <p:nvSpPr>
+          <p:cNvPr id="7" name="Text 5"/>
+          <p:cNvSpPr/>
+          <p:nvPr/>
+        </p:nvSpPr>
+        <p:spPr>
+          <a:xfrm>
+            <a:off x="692051" y="1343174"/>
+            <a:ext cx="7973389" cy="923925"/>
+          </a:xfrm>
+          <a:prstGeom prst="rect">
+            <a:avLst/>
+          </a:prstGeom>
+          <a:noFill/>
+          <a:ln/>
+        </p:spPr>
+        <p:txBody>
+          <a:bodyPr wrap="square" lIns="0" tIns="0" rIns="0" bIns="0" rtlCol="0" anchor="t"/>
+          <a:lstStyle/>
+          <a:p>
+            <a:pPr algn="l" indent="0" marL="0">
+              <a:lnSpc>
+                <a:spcPts val="1820"/>
+              </a:lnSpc>
+              <a:spcBef>
+                <a:spcPts val="300"/>
+              </a:spcBef>
+              <a:spcAft>
+                <a:spcPts val="300"/>
+              </a:spcAft>
+              <a:buNone/>
+            </a:pPr>
+            <a:r>
+              <a:rPr lang="en-US" sz="1300" dirty="0">
+                <a:solidFill>
+                  <a:srgbClr val="1C2833"/>
+                </a:solidFill>
+                <a:latin typeface="Georgia" pitchFamily="34" charset="0"/>
+                <a:ea typeface="Georgia" pitchFamily="34" charset="-122"/>
+                <a:cs typeface="Georgia" pitchFamily="34" charset="-120"/>
+              </a:rPr>
+              <a:t>| Window | Time | Doṣa | Best for | |--------|------|-------|----------| | 1 | 6 am – 10 am | </a:t>
+            </a:r>
+            <a:pPr algn="l" indent="0" marL="0">
+              <a:lnSpc>
+                <a:spcPts val="1820"/>
+              </a:lnSpc>
+              <a:spcBef>
+                <a:spcPts val="300"/>
+              </a:spcBef>
+              <a:spcAft>
+                <a:spcPts val="300"/>
+              </a:spcAft>
+              <a:buNone/>
+            </a:pPr>
+            <a:r>
+              <a:rPr lang="en-US" sz="1300" i="1" dirty="0">
+                <a:solidFill>
+                  <a:srgbClr val="1C2833"/>
+                </a:solidFill>
+                <a:latin typeface="Georgia" pitchFamily="34" charset="0"/>
+                <a:ea typeface="Georgia" pitchFamily="34" charset="-122"/>
+                <a:cs typeface="Georgia" pitchFamily="34" charset="-120"/>
+              </a:rPr>
+              <a:t>kapha</a:t>
+            </a:r>
+            <a:pPr algn="l" indent="0" marL="0">
+              <a:lnSpc>
+                <a:spcPts val="1820"/>
+              </a:lnSpc>
+              <a:spcBef>
+                <a:spcPts val="300"/>
+              </a:spcBef>
+              <a:spcAft>
+                <a:spcPts val="300"/>
+              </a:spcAft>
+              <a:buNone/>
+            </a:pPr>
+            <a:r>
+              <a:rPr lang="en-US" sz="1300" dirty="0">
+                <a:solidFill>
+                  <a:srgbClr val="1C2833"/>
+                </a:solidFill>
+                <a:latin typeface="Georgia" pitchFamily="34" charset="0"/>
+                <a:ea typeface="Georgia" pitchFamily="34" charset="-122"/>
+                <a:cs typeface="Georgia" pitchFamily="34" charset="-120"/>
+              </a:rPr>
+              <a:t> | wake, light exercise, solid breakfast | | 2 | 10 am – 2 pm | </a:t>
+            </a:r>
+            <a:pPr algn="l" indent="0" marL="0">
+              <a:lnSpc>
+                <a:spcPts val="1820"/>
+              </a:lnSpc>
+              <a:spcBef>
+                <a:spcPts val="300"/>
+              </a:spcBef>
+              <a:spcAft>
+                <a:spcPts val="300"/>
+              </a:spcAft>
+              <a:buNone/>
+            </a:pPr>
+            <a:r>
+              <a:rPr lang="en-US" sz="1300" i="1" dirty="0">
+                <a:solidFill>
+                  <a:srgbClr val="1C2833"/>
+                </a:solidFill>
+                <a:latin typeface="Georgia" pitchFamily="34" charset="0"/>
+                <a:ea typeface="Georgia" pitchFamily="34" charset="-122"/>
+                <a:cs typeface="Georgia" pitchFamily="34" charset="-120"/>
+              </a:rPr>
+              <a:t>pitta</a:t>
+            </a:r>
+            <a:pPr algn="l" indent="0" marL="0">
+              <a:lnSpc>
+                <a:spcPts val="1820"/>
+              </a:lnSpc>
+              <a:spcBef>
+                <a:spcPts val="300"/>
+              </a:spcBef>
+              <a:spcAft>
+                <a:spcPts val="300"/>
+              </a:spcAft>
+              <a:buNone/>
+            </a:pPr>
+            <a:r>
+              <a:rPr lang="en-US" sz="1300" dirty="0">
+                <a:solidFill>
+                  <a:srgbClr val="1C2833"/>
+                </a:solidFill>
+                <a:latin typeface="Georgia" pitchFamily="34" charset="0"/>
+                <a:ea typeface="Georgia" pitchFamily="34" charset="-122"/>
+                <a:cs typeface="Georgia" pitchFamily="34" charset="-120"/>
+              </a:rPr>
+              <a:t> | main meal of the day, focused work | | 3 | 2 pm – 6 pm | </a:t>
+            </a:r>
+            <a:pPr algn="l" indent="0" marL="0">
+              <a:lnSpc>
+                <a:spcPts val="1820"/>
+              </a:lnSpc>
+              <a:spcBef>
+                <a:spcPts val="300"/>
+              </a:spcBef>
+              <a:spcAft>
+                <a:spcPts val="300"/>
+              </a:spcAft>
+              <a:buNone/>
+            </a:pPr>
+            <a:r>
+              <a:rPr lang="en-US" sz="1300" i="1" dirty="0">
+                <a:solidFill>
+                  <a:srgbClr val="1C2833"/>
+                </a:solidFill>
+                <a:latin typeface="Georgia" pitchFamily="34" charset="0"/>
+                <a:ea typeface="Georgia" pitchFamily="34" charset="-122"/>
+                <a:cs typeface="Georgia" pitchFamily="34" charset="-120"/>
+              </a:rPr>
+              <a:t>vāta</a:t>
+            </a:r>
+            <a:pPr algn="l" indent="0" marL="0">
+              <a:lnSpc>
+                <a:spcPts val="1820"/>
+              </a:lnSpc>
+              <a:spcBef>
+                <a:spcPts val="300"/>
+              </a:spcBef>
+              <a:spcAft>
+                <a:spcPts val="300"/>
+              </a:spcAft>
+              <a:buNone/>
+            </a:pPr>
+            <a:r>
+              <a:rPr lang="en-US" sz="1300" dirty="0">
+                <a:solidFill>
+                  <a:srgbClr val="1C2833"/>
+                </a:solidFill>
+                <a:latin typeface="Georgia" pitchFamily="34" charset="0"/>
+                <a:ea typeface="Georgia" pitchFamily="34" charset="-122"/>
+                <a:cs typeface="Georgia" pitchFamily="34" charset="-120"/>
+              </a:rPr>
+              <a:t> | quick work, short snacks | | 4 | 6 pm – 10 pm | </a:t>
+            </a:r>
+            <a:pPr algn="l" indent="0" marL="0">
+              <a:lnSpc>
+                <a:spcPts val="1820"/>
+              </a:lnSpc>
+              <a:spcBef>
+                <a:spcPts val="300"/>
+              </a:spcBef>
+              <a:spcAft>
+                <a:spcPts val="300"/>
+              </a:spcAft>
+              <a:buNone/>
+            </a:pPr>
+            <a:r>
+              <a:rPr lang="en-US" sz="1300" i="1" dirty="0">
+                <a:solidFill>
+                  <a:srgbClr val="1C2833"/>
+                </a:solidFill>
+                <a:latin typeface="Georgia" pitchFamily="34" charset="0"/>
+                <a:ea typeface="Georgia" pitchFamily="34" charset="-122"/>
+                <a:cs typeface="Georgia" pitchFamily="34" charset="-120"/>
+              </a:rPr>
+              <a:t>kapha</a:t>
+            </a:r>
+            <a:pPr algn="l" indent="0" marL="0">
+              <a:lnSpc>
+                <a:spcPts val="1820"/>
+              </a:lnSpc>
+              <a:spcBef>
+                <a:spcPts val="300"/>
+              </a:spcBef>
+              <a:spcAft>
+                <a:spcPts val="300"/>
+              </a:spcAft>
+              <a:buNone/>
+            </a:pPr>
+            <a:r>
+              <a:rPr lang="en-US" sz="1300" dirty="0">
+                <a:solidFill>
+                  <a:srgbClr val="1C2833"/>
+                </a:solidFill>
+                <a:latin typeface="Georgia" pitchFamily="34" charset="0"/>
+                <a:ea typeface="Georgia" pitchFamily="34" charset="-122"/>
+                <a:cs typeface="Georgia" pitchFamily="34" charset="-120"/>
+              </a:rPr>
+              <a:t> | light dinner, wind down | | 5 | 10 pm – 2 am | </a:t>
+            </a:r>
+            <a:pPr algn="l" indent="0" marL="0">
+              <a:lnSpc>
+                <a:spcPts val="1820"/>
+              </a:lnSpc>
+              <a:spcBef>
+                <a:spcPts val="300"/>
+              </a:spcBef>
+              <a:spcAft>
+                <a:spcPts val="300"/>
+              </a:spcAft>
+              <a:buNone/>
+            </a:pPr>
+            <a:r>
+              <a:rPr lang="en-US" sz="1300" i="1" dirty="0">
+                <a:solidFill>
+                  <a:srgbClr val="1C2833"/>
+                </a:solidFill>
+                <a:latin typeface="Georgia" pitchFamily="34" charset="0"/>
+                <a:ea typeface="Georgia" pitchFamily="34" charset="-122"/>
+                <a:cs typeface="Georgia" pitchFamily="34" charset="-120"/>
+              </a:rPr>
+              <a:t>pitta</a:t>
+            </a:r>
+            <a:pPr algn="l" indent="0" marL="0">
+              <a:lnSpc>
+                <a:spcPts val="1820"/>
+              </a:lnSpc>
+              <a:spcBef>
+                <a:spcPts val="300"/>
+              </a:spcBef>
+              <a:spcAft>
+                <a:spcPts val="300"/>
+              </a:spcAft>
+              <a:buNone/>
+            </a:pPr>
+            <a:r>
+              <a:rPr lang="en-US" sz="1300" dirty="0">
+                <a:solidFill>
+                  <a:srgbClr val="1C2833"/>
+                </a:solidFill>
+                <a:latin typeface="Georgia" pitchFamily="34" charset="0"/>
+                <a:ea typeface="Georgia" pitchFamily="34" charset="-122"/>
+                <a:cs typeface="Georgia" pitchFamily="34" charset="-120"/>
+              </a:rPr>
+              <a:t> | deep sleep (body's repair) | | 6 | 2 am – 6 am | </a:t>
+            </a:r>
+            <a:pPr algn="l" indent="0" marL="0">
+              <a:lnSpc>
+                <a:spcPts val="1820"/>
+              </a:lnSpc>
+              <a:spcBef>
+                <a:spcPts val="300"/>
+              </a:spcBef>
+              <a:spcAft>
+                <a:spcPts val="300"/>
+              </a:spcAft>
+              <a:buNone/>
+            </a:pPr>
+            <a:r>
+              <a:rPr lang="en-US" sz="1300" i="1" dirty="0">
+                <a:solidFill>
+                  <a:srgbClr val="1C2833"/>
+                </a:solidFill>
+                <a:latin typeface="Georgia" pitchFamily="34" charset="0"/>
+                <a:ea typeface="Georgia" pitchFamily="34" charset="-122"/>
+                <a:cs typeface="Georgia" pitchFamily="34" charset="-120"/>
+              </a:rPr>
+              <a:t>vāta</a:t>
+            </a:r>
+            <a:pPr algn="l" indent="0" marL="0">
+              <a:lnSpc>
+                <a:spcPts val="1820"/>
+              </a:lnSpc>
+              <a:spcBef>
+                <a:spcPts val="300"/>
+              </a:spcBef>
+              <a:spcAft>
+                <a:spcPts val="300"/>
+              </a:spcAft>
+              <a:buNone/>
+            </a:pPr>
+            <a:r>
+              <a:rPr lang="en-US" sz="1300" dirty="0">
+                <a:solidFill>
+                  <a:srgbClr val="1C2833"/>
+                </a:solidFill>
+                <a:latin typeface="Georgia" pitchFamily="34" charset="0"/>
+                <a:ea typeface="Georgia" pitchFamily="34" charset="-122"/>
+                <a:cs typeface="Georgia" pitchFamily="34" charset="-120"/>
+              </a:rPr>
+              <a:t> | wake at the end of this window |</a:t>
+            </a:r>
+            <a:endParaRPr lang="en-US" sz="1300" dirty="0"/>
+          </a:p>
+        </p:txBody>
+      </p:sp>
+      <p:sp>
+        <p:nvSpPr>
+          <p:cNvPr id="8" name="Text 6"/>
+          <p:cNvSpPr/>
+          <p:nvPr/>
+        </p:nvSpPr>
+        <p:spPr>
+          <a:xfrm>
+            <a:off x="692051" y="2305199"/>
+            <a:ext cx="7973389" cy="230981"/>
+          </a:xfrm>
+          <a:prstGeom prst="rect">
+            <a:avLst/>
+          </a:prstGeom>
+          <a:noFill/>
+          <a:ln/>
+        </p:spPr>
+        <p:txBody>
+          <a:bodyPr wrap="square" lIns="0" tIns="0" rIns="0" bIns="0" rtlCol="0" anchor="t"/>
+          <a:lstStyle/>
+          <a:p>
+            <a:pPr algn="l" indent="0" marL="0">
+              <a:lnSpc>
+                <a:spcPts val="1820"/>
+              </a:lnSpc>
+              <a:spcBef>
+                <a:spcPts val="300"/>
+              </a:spcBef>
+              <a:spcAft>
+                <a:spcPts val="300"/>
+              </a:spcAft>
+              <a:buNone/>
+            </a:pPr>
+            <a:r>
+              <a:rPr lang="en-US" sz="1300" i="1" dirty="0">
+                <a:solidFill>
+                  <a:srgbClr val="1C2833"/>
+                </a:solidFill>
+                <a:latin typeface="Georgia" pitchFamily="34" charset="0"/>
+                <a:ea typeface="Georgia" pitchFamily="34" charset="-122"/>
+                <a:cs typeface="Georgia" pitchFamily="34" charset="-120"/>
+              </a:rPr>
+              <a:t>The principle: align activities with the dominant doṣa of the time.</a:t>
+            </a:r>
+            <a:endParaRPr lang="en-US" sz="1300" dirty="0"/>
+          </a:p>
+        </p:txBody>
+      </p:sp>
+      <p:sp>
+        <p:nvSpPr>
+          <p:cNvPr id="9" name="Text 7"/>
+          <p:cNvSpPr/>
+          <p:nvPr/>
+        </p:nvSpPr>
+        <p:spPr>
+          <a:xfrm>
+            <a:off x="692051" y="2574280"/>
+            <a:ext cx="7973389" cy="230981"/>
+          </a:xfrm>
+          <a:prstGeom prst="rect">
+            <a:avLst/>
+          </a:prstGeom>
+          <a:noFill/>
+          <a:ln/>
+        </p:spPr>
+        <p:txBody>
+          <a:bodyPr wrap="square" lIns="0" tIns="0" rIns="0" bIns="0" rtlCol="0" anchor="t"/>
+          <a:lstStyle/>
+          <a:p>
+            <a:pPr algn="l" indent="0" marL="0">
+              <a:lnSpc>
+                <a:spcPts val="1820"/>
+              </a:lnSpc>
+              <a:spcBef>
+                <a:spcPts val="300"/>
+              </a:spcBef>
+              <a:spcAft>
+                <a:spcPts val="300"/>
+              </a:spcAft>
+              <a:buNone/>
+            </a:pPr>
+            <a:r>
+              <a:rPr lang="en-US" sz="1300" i="1" dirty="0">
+                <a:solidFill>
+                  <a:srgbClr val="1C2833"/>
+                </a:solidFill>
+                <a:latin typeface="Georgia" pitchFamily="34" charset="0"/>
+                <a:ea typeface="Georgia" pitchFamily="34" charset="-122"/>
+                <a:cs typeface="Georgia" pitchFamily="34" charset="-120"/>
+              </a:rPr>
+              <a:t>— paraphrased from Aṣṭāṅga Hṛdaya, Sūtrasthāna 1</a:t>
+            </a:r>
+            <a:endParaRPr lang="en-US" sz="1300" dirty="0"/>
+          </a:p>
+        </p:txBody>
+      </p:sp>
+      <p:sp>
+        <p:nvSpPr>
+          <p:cNvPr id="10" name="Text 8"/>
+          <p:cNvSpPr/>
+          <p:nvPr/>
+        </p:nvSpPr>
+        <p:spPr>
+          <a:xfrm>
+            <a:off x="692051" y="2843361"/>
+            <a:ext cx="7973389" cy="923925"/>
+          </a:xfrm>
+          <a:prstGeom prst="rect">
+            <a:avLst/>
+          </a:prstGeom>
+          <a:noFill/>
+          <a:ln/>
+        </p:spPr>
+        <p:txBody>
+          <a:bodyPr wrap="square" lIns="0" tIns="0" rIns="0" bIns="0" rtlCol="0" anchor="t"/>
+          <a:lstStyle/>
+          <a:p>
+            <a:pPr algn="l" indent="0" marL="0">
+              <a:lnSpc>
+                <a:spcPts val="1820"/>
+              </a:lnSpc>
+              <a:spcBef>
+                <a:spcPts val="300"/>
+              </a:spcBef>
+              <a:spcAft>
+                <a:spcPts val="300"/>
+              </a:spcAft>
+              <a:buNone/>
+            </a:pPr>
+            <a:r>
+              <a:rPr lang="en-US" sz="1300" b="1" i="1" dirty="0">
+                <a:solidFill>
+                  <a:srgbClr val="1C2833"/>
+                </a:solidFill>
+                <a:latin typeface="Georgia" pitchFamily="34" charset="0"/>
+                <a:ea typeface="Georgia" pitchFamily="34" charset="-122"/>
+                <a:cs typeface="Georgia" pitchFamily="34" charset="-120"/>
+              </a:rPr>
+              <a:t>Modern parallel:</a:t>
+            </a:r>
+            <a:pPr algn="l" indent="0" marL="0">
+              <a:lnSpc>
+                <a:spcPts val="1820"/>
+              </a:lnSpc>
+              <a:spcBef>
+                <a:spcPts val="300"/>
+              </a:spcBef>
+              <a:spcAft>
+                <a:spcPts val="300"/>
+              </a:spcAft>
+              <a:buNone/>
+            </a:pPr>
+            <a:r>
+              <a:rPr lang="en-US" sz="1300" dirty="0">
+                <a:solidFill>
+                  <a:srgbClr val="1C2833"/>
+                </a:solidFill>
+                <a:latin typeface="Georgia" pitchFamily="34" charset="0"/>
+                <a:ea typeface="Georgia" pitchFamily="34" charset="-122"/>
+                <a:cs typeface="Georgia" pitchFamily="34" charset="-120"/>
+              </a:rPr>
+              <a:t> chronobiology. The body has rhythms. Insulin works better in the morning. Cortisol peaks at dawn. Body temperature peaks late afternoon. The general shape matches; the exact timing doesn't precisely line up. Both frameworks point to the same underlying observation: </a:t>
+            </a:r>
+            <a:pPr algn="l" indent="0" marL="0">
+              <a:lnSpc>
+                <a:spcPts val="1820"/>
+              </a:lnSpc>
+              <a:spcBef>
+                <a:spcPts val="300"/>
+              </a:spcBef>
+              <a:spcAft>
+                <a:spcPts val="300"/>
+              </a:spcAft>
+              <a:buNone/>
+            </a:pPr>
+            <a:r>
+              <a:rPr lang="en-US" sz="1300" i="1" dirty="0">
+                <a:solidFill>
+                  <a:srgbClr val="1C2833"/>
+                </a:solidFill>
+                <a:latin typeface="Georgia" pitchFamily="34" charset="0"/>
+                <a:ea typeface="Georgia" pitchFamily="34" charset="-122"/>
+                <a:cs typeface="Georgia" pitchFamily="34" charset="-120"/>
+              </a:rPr>
+              <a:t>when</a:t>
+            </a:r>
+            <a:pPr algn="l" indent="0" marL="0">
+              <a:lnSpc>
+                <a:spcPts val="1820"/>
+              </a:lnSpc>
+              <a:spcBef>
+                <a:spcPts val="300"/>
+              </a:spcBef>
+              <a:spcAft>
+                <a:spcPts val="300"/>
+              </a:spcAft>
+              <a:buNone/>
+            </a:pPr>
+            <a:r>
+              <a:rPr lang="en-US" sz="1300" dirty="0">
+                <a:solidFill>
+                  <a:srgbClr val="1C2833"/>
+                </a:solidFill>
+                <a:latin typeface="Georgia" pitchFamily="34" charset="0"/>
+                <a:ea typeface="Georgia" pitchFamily="34" charset="-122"/>
+                <a:cs typeface="Georgia" pitchFamily="34" charset="-120"/>
+              </a:rPr>
+              <a:t> matters as much as </a:t>
+            </a:r>
+            <a:pPr algn="l" indent="0" marL="0">
+              <a:lnSpc>
+                <a:spcPts val="1820"/>
+              </a:lnSpc>
+              <a:spcBef>
+                <a:spcPts val="300"/>
+              </a:spcBef>
+              <a:spcAft>
+                <a:spcPts val="300"/>
+              </a:spcAft>
+              <a:buNone/>
+            </a:pPr>
+            <a:r>
+              <a:rPr lang="en-US" sz="1300" i="1" dirty="0">
+                <a:solidFill>
+                  <a:srgbClr val="1C2833"/>
+                </a:solidFill>
+                <a:latin typeface="Georgia" pitchFamily="34" charset="0"/>
+                <a:ea typeface="Georgia" pitchFamily="34" charset="-122"/>
+                <a:cs typeface="Georgia" pitchFamily="34" charset="-120"/>
+              </a:rPr>
+              <a:t>what</a:t>
+            </a:r>
+            <a:pPr algn="l" indent="0" marL="0">
+              <a:lnSpc>
+                <a:spcPts val="1820"/>
+              </a:lnSpc>
+              <a:spcBef>
+                <a:spcPts val="300"/>
+              </a:spcBef>
+              <a:spcAft>
+                <a:spcPts val="300"/>
+              </a:spcAft>
+              <a:buNone/>
+            </a:pPr>
+            <a:r>
+              <a:rPr lang="en-US" sz="1300" dirty="0">
+                <a:solidFill>
+                  <a:srgbClr val="1C2833"/>
+                </a:solidFill>
+                <a:latin typeface="Georgia" pitchFamily="34" charset="0"/>
+                <a:ea typeface="Georgia" pitchFamily="34" charset="-122"/>
+                <a:cs typeface="Georgia" pitchFamily="34" charset="-120"/>
+              </a:rPr>
+              <a:t>.</a:t>
+            </a:r>
+            <a:endParaRPr lang="en-US" sz="1300" dirty="0"/>
+          </a:p>
+        </p:txBody>
+      </p:sp>
+      <p:sp>
+        <p:nvSpPr>
+          <p:cNvPr id="11" name="Text 9"/>
+          <p:cNvSpPr/>
+          <p:nvPr/>
+        </p:nvSpPr>
+        <p:spPr>
+          <a:xfrm>
+            <a:off x="406301" y="4434929"/>
+            <a:ext cx="8498026" cy="213271"/>
+          </a:xfrm>
+          <a:prstGeom prst="rect">
+            <a:avLst/>
+          </a:prstGeom>
+          <a:noFill/>
+          <a:ln/>
+        </p:spPr>
+        <p:txBody>
+          <a:bodyPr wrap="square" lIns="0" tIns="0" rIns="0" bIns="0" rtlCol="0" anchor="t"/>
+          <a:lstStyle/>
+          <a:p>
+            <a:pPr algn="l" indent="0" marL="0">
+              <a:lnSpc>
+                <a:spcPts val="1680"/>
+              </a:lnSpc>
+              <a:spcBef>
+                <a:spcPts val="300"/>
+              </a:spcBef>
+              <a:spcAft>
+                <a:spcPts val="300"/>
+              </a:spcAft>
+              <a:buNone/>
+            </a:pPr>
+            <a:r>
+              <a:rPr lang="en-US" sz="1200" dirty="0">
+                <a:solidFill>
+                  <a:srgbClr val="1C2833"/>
+                </a:solidFill>
+                <a:latin typeface="Arial" pitchFamily="34" charset="0"/>
+                <a:ea typeface="Arial" pitchFamily="34" charset="-122"/>
+                <a:cs typeface="Arial" pitchFamily="34" charset="-120"/>
+              </a:rPr>
+              <a:t>Middle ·  · IKS Curriculum</a:t>
+            </a:r>
+            <a:endParaRPr lang="en-US" sz="1200" dirty="0"/>
+          </a:p>
+        </p:txBody>
+      </p:sp>
+    </p:spTree>
+  </p:cSld>
+  <p:clrMapOvr>
+    <a:masterClrMapping/>
+  </p:clrMapOvr>
+</p:sld>
+</file>
+
+<file path=ppt/slides/slide18.xml><?xml version="1.0" encoding="utf-8"?>
+<p:sld xmlns:a="http://schemas.openxmlformats.org/drawingml/2006/main" xmlns:r="http://schemas.openxmlformats.org/officeDocument/2006/relationships" xmlns:p="http://schemas.openxmlformats.org/presentationml/2006/main">
+  <p:cSld name="Slide 18">
+    <p:bg>
+      <p:bgPr>
+        <a:solidFill>
+          <a:srgbClr val="FFFFFF"/>
+        </a:solidFill>
+      </p:bgPr>
+    </p:bg>
+    <p:spTree>
+      <p:nvGrpSpPr>
+        <p:cNvPr id="1" name=""/>
+        <p:cNvGrpSpPr/>
+        <p:nvPr/>
+      </p:nvGrpSpPr>
+      <p:grpSpPr>
+        <a:xfrm>
+          <a:off x="0" y="0"/>
+          <a:ext cx="0" cy="0"/>
+          <a:chOff x="0" y="0"/>
+          <a:chExt cx="0" cy="0"/>
+        </a:xfrm>
+      </p:grpSpPr>
+      <p:sp>
+        <p:nvSpPr>
+          <p:cNvPr id="2" name="Text 0"/>
+          <p:cNvSpPr/>
+          <p:nvPr/>
+        </p:nvSpPr>
+        <p:spPr>
+          <a:xfrm>
+            <a:off x="0" y="0"/>
+            <a:ext cx="9144000" cy="101501"/>
+          </a:xfrm>
+          <a:prstGeom prst="rect">
+            <a:avLst/>
+          </a:prstGeom>
+          <a:solidFill>
+            <a:srgbClr val="277884"/>
+          </a:solidFill>
+          <a:ln/>
+        </p:spPr>
+        <p:txBody>
+          <a:bodyPr wrap="square" rtlCol="0" anchor="ctr"/>
+          <a:lstStyle/>
+          <a:p>
+            <a:pPr indent="0" marL="0">
+              <a:buNone/>
+            </a:pPr>
+            <a:endParaRPr lang="en-US" dirty="0"/>
+          </a:p>
+        </p:txBody>
+      </p:sp>
+      <p:sp>
+        <p:nvSpPr>
+          <p:cNvPr id="3" name="Text 1"/>
+          <p:cNvSpPr/>
+          <p:nvPr/>
+        </p:nvSpPr>
+        <p:spPr>
+          <a:xfrm>
+            <a:off x="406301" y="457051"/>
+            <a:ext cx="8498026" cy="274290"/>
+          </a:xfrm>
+          <a:prstGeom prst="rect">
+            <a:avLst/>
+          </a:prstGeom>
+          <a:noFill/>
+          <a:ln/>
+        </p:spPr>
+        <p:txBody>
+          <a:bodyPr wrap="square" lIns="0" tIns="0" rIns="0" bIns="0" rtlCol="0" anchor="t"/>
+          <a:lstStyle/>
+          <a:p>
+            <a:pPr algn="l" indent="0" marL="0">
+              <a:lnSpc>
+                <a:spcPts val="2160"/>
+              </a:lnSpc>
+              <a:spcBef>
+                <a:spcPts val="600"/>
+              </a:spcBef>
+              <a:spcAft>
+                <a:spcPts val="800"/>
+              </a:spcAft>
+              <a:buNone/>
+            </a:pPr>
+            <a:r>
+              <a:rPr lang="en-US" sz="1800" b="1" dirty="0">
+                <a:solidFill>
+                  <a:srgbClr val="FE4447"/>
+                </a:solidFill>
+                <a:latin typeface="Georgia" pitchFamily="34" charset="0"/>
+                <a:ea typeface="Georgia" pitchFamily="34" charset="-122"/>
+                <a:cs typeface="Georgia" pitchFamily="34" charset="-120"/>
+              </a:rPr>
+              <a:t>Homework</a:t>
+            </a:r>
+            <a:endParaRPr lang="en-US" sz="1800" dirty="0"/>
+          </a:p>
+        </p:txBody>
+      </p:sp>
+      <p:sp>
+        <p:nvSpPr>
+          <p:cNvPr id="4" name="Text 2"/>
+          <p:cNvSpPr/>
+          <p:nvPr/>
+        </p:nvSpPr>
+        <p:spPr>
+          <a:xfrm>
+            <a:off x="634901" y="883593"/>
+            <a:ext cx="8102798" cy="487561"/>
+          </a:xfrm>
+          <a:prstGeom prst="rect">
+            <a:avLst/>
+          </a:prstGeom>
+          <a:noFill/>
+          <a:ln/>
+        </p:spPr>
+        <p:txBody>
+          <a:bodyPr wrap="square" lIns="0" tIns="0" rIns="0" bIns="0" rtlCol="0" anchor="t"/>
+          <a:lstStyle/>
+          <a:p>
+            <a:pPr algn="l" marL="342900" indent="-342900">
+              <a:lnSpc>
+                <a:spcPts val="1620"/>
+              </a:lnSpc>
+              <a:spcAft>
+                <a:spcPts val="300"/>
+              </a:spcAft>
+              <a:buSzPct val="100000"/>
+              <a:buChar char="•"/>
+            </a:pPr>
+            <a:r>
+              <a:rPr lang="en-US" sz="1200" dirty="0">
+                <a:solidFill>
+                  <a:srgbClr val="1C2833"/>
+                </a:solidFill>
+                <a:latin typeface="Arial" pitchFamily="34" charset="0"/>
+                <a:ea typeface="Arial" pitchFamily="34" charset="-122"/>
+                <a:cs typeface="Arial" pitchFamily="34" charset="-120"/>
+              </a:rPr>
+              <a:t>Tonight, note your bedtime. Tomorrow morning, note your wake time. Then write: which doṣa-window did each fall into? Was your sleep aligned with the recommended pattern?</a:t>
+            </a:r>
+            <a:endParaRPr lang="en-US" sz="1200" dirty="0"/>
+          </a:p>
+        </p:txBody>
+      </p:sp>
+      <p:sp>
+        <p:nvSpPr>
+          <p:cNvPr id="5" name="Text 3"/>
+          <p:cNvSpPr/>
+          <p:nvPr/>
+        </p:nvSpPr>
+        <p:spPr>
+          <a:xfrm>
+            <a:off x="406301" y="4434929"/>
+            <a:ext cx="8498026" cy="213271"/>
+          </a:xfrm>
+          <a:prstGeom prst="rect">
+            <a:avLst/>
+          </a:prstGeom>
+          <a:noFill/>
+          <a:ln/>
+        </p:spPr>
+        <p:txBody>
+          <a:bodyPr wrap="square" lIns="0" tIns="0" rIns="0" bIns="0" rtlCol="0" anchor="t"/>
+          <a:lstStyle/>
+          <a:p>
+            <a:pPr algn="l" indent="0" marL="0">
+              <a:lnSpc>
+                <a:spcPts val="1680"/>
+              </a:lnSpc>
+              <a:spcBef>
+                <a:spcPts val="300"/>
+              </a:spcBef>
+              <a:spcAft>
+                <a:spcPts val="300"/>
+              </a:spcAft>
+              <a:buNone/>
+            </a:pPr>
+            <a:r>
+              <a:rPr lang="en-US" sz="1200" dirty="0">
+                <a:solidFill>
+                  <a:srgbClr val="1C2833"/>
+                </a:solidFill>
+                <a:latin typeface="Arial" pitchFamily="34" charset="0"/>
+                <a:ea typeface="Arial" pitchFamily="34" charset="-122"/>
+                <a:cs typeface="Arial" pitchFamily="34" charset="-120"/>
+              </a:rPr>
+              <a:t>Middle ·  · IKS Curriculum</a:t>
+            </a:r>
+            <a:endParaRPr lang="en-US" sz="1200" dirty="0"/>
+          </a:p>
+        </p:txBody>
+      </p:sp>
+    </p:spTree>
+  </p:cSld>
+  <p:clrMapOvr>
+    <a:masterClrMapping/>
+  </p:clrMapOvr>
+</p:sld>
+</file>
+
+<file path=ppt/slides/slide19.xml><?xml version="1.0" encoding="utf-8"?>
+<p:sld xmlns:a="http://schemas.openxmlformats.org/drawingml/2006/main" xmlns:r="http://schemas.openxmlformats.org/officeDocument/2006/relationships" xmlns:p="http://schemas.openxmlformats.org/presentationml/2006/main">
+  <p:cSld name="Slide 19">
+    <p:bg>
+      <p:bgPr>
+        <a:solidFill>
+          <a:srgbClr val="FFFFFF"/>
+        </a:solidFill>
+      </p:bgPr>
+    </p:bg>
+    <p:spTree>
+      <p:nvGrpSpPr>
+        <p:cNvPr id="1" name=""/>
+        <p:cNvGrpSpPr/>
+        <p:nvPr/>
+      </p:nvGrpSpPr>
+      <p:grpSpPr>
+        <a:xfrm>
+          <a:off x="0" y="0"/>
+          <a:ext cx="0" cy="0"/>
+          <a:chOff x="0" y="0"/>
+          <a:chExt cx="0" cy="0"/>
+        </a:xfrm>
+      </p:grpSpPr>
+      <p:sp>
+        <p:nvSpPr>
+          <p:cNvPr id="2" name="Text 0"/>
+          <p:cNvSpPr/>
+          <p:nvPr/>
+        </p:nvSpPr>
+        <p:spPr>
+          <a:xfrm>
+            <a:off x="0" y="0"/>
+            <a:ext cx="9144000" cy="101501"/>
+          </a:xfrm>
+          <a:prstGeom prst="rect">
+            <a:avLst/>
+          </a:prstGeom>
+          <a:solidFill>
+            <a:srgbClr val="277884"/>
+          </a:solidFill>
+          <a:ln/>
+        </p:spPr>
+        <p:txBody>
+          <a:bodyPr wrap="square" rtlCol="0" anchor="ctr"/>
+          <a:lstStyle/>
+          <a:p>
+            <a:pPr indent="0" marL="0">
+              <a:buNone/>
+            </a:pPr>
+            <a:endParaRPr lang="en-US" dirty="0"/>
+          </a:p>
+        </p:txBody>
+      </p:sp>
+      <p:sp>
+        <p:nvSpPr>
+          <p:cNvPr id="3" name="Text 1"/>
+          <p:cNvSpPr/>
+          <p:nvPr/>
+        </p:nvSpPr>
+        <p:spPr>
+          <a:xfrm>
+            <a:off x="406301" y="457051"/>
+            <a:ext cx="8498026" cy="274290"/>
+          </a:xfrm>
+          <a:prstGeom prst="rect">
+            <a:avLst/>
+          </a:prstGeom>
+          <a:noFill/>
+          <a:ln/>
+        </p:spPr>
+        <p:txBody>
+          <a:bodyPr wrap="square" lIns="0" tIns="0" rIns="0" bIns="0" rtlCol="0" anchor="t"/>
+          <a:lstStyle/>
+          <a:p>
+            <a:pPr algn="l" indent="0" marL="0">
+              <a:lnSpc>
+                <a:spcPts val="2160"/>
+              </a:lnSpc>
+              <a:spcBef>
+                <a:spcPts val="600"/>
+              </a:spcBef>
+              <a:spcAft>
+                <a:spcPts val="800"/>
+              </a:spcAft>
+              <a:buNone/>
+            </a:pPr>
+            <a:r>
+              <a:rPr lang="en-US" sz="1800" b="1" dirty="0">
+                <a:solidFill>
+                  <a:srgbClr val="FE4447"/>
+                </a:solidFill>
+                <a:latin typeface="Georgia" pitchFamily="34" charset="0"/>
+                <a:ea typeface="Georgia" pitchFamily="34" charset="-122"/>
+                <a:cs typeface="Georgia" pitchFamily="34" charset="-120"/>
+              </a:rPr>
+              <a:t>Differentiation</a:t>
+            </a:r>
+            <a:endParaRPr lang="en-US" sz="1800" dirty="0"/>
+          </a:p>
+        </p:txBody>
+      </p:sp>
+      <p:sp>
+        <p:nvSpPr>
+          <p:cNvPr id="4" name="Text 2"/>
+          <p:cNvSpPr/>
+          <p:nvPr/>
+        </p:nvSpPr>
+        <p:spPr>
+          <a:xfrm>
+            <a:off x="634901" y="883593"/>
+            <a:ext cx="8102798" cy="937022"/>
+          </a:xfrm>
+          <a:prstGeom prst="rect">
+            <a:avLst/>
+          </a:prstGeom>
+          <a:noFill/>
+          <a:ln/>
+        </p:spPr>
+        <p:txBody>
+          <a:bodyPr wrap="square" lIns="0" tIns="0" rIns="0" bIns="0" rtlCol="0" anchor="t"/>
+          <a:lstStyle/>
+          <a:p>
+            <a:pPr algn="l" marL="342900" indent="-342900">
+              <a:lnSpc>
+                <a:spcPts val="1620"/>
+              </a:lnSpc>
+              <a:spcAft>
+                <a:spcPts val="300"/>
+              </a:spcAft>
+              <a:buSzPct val="100000"/>
+              <a:buChar char="•"/>
+            </a:pPr>
+            <a:r>
+              <a:rPr lang="en-US" sz="1200" b="1" dirty="0">
+                <a:solidFill>
+                  <a:srgbClr val="1C2833"/>
+                </a:solidFill>
+                <a:latin typeface="Arial" pitchFamily="34" charset="0"/>
+                <a:ea typeface="Arial" pitchFamily="34" charset="-122"/>
+                <a:cs typeface="Arial" pitchFamily="34" charset="-120"/>
+              </a:rPr>
+              <a:t>One tier up:</a:t>
+            </a:r>
+            <a:pPr algn="l" indent="0" marL="0">
+              <a:lnSpc>
+                <a:spcPts val="1620"/>
+              </a:lnSpc>
+              <a:spcAft>
+                <a:spcPts val="300"/>
+              </a:spcAft>
+              <a:buNone/>
+            </a:pPr>
+            <a:r>
+              <a:rPr lang="en-US" sz="1200" dirty="0">
+                <a:solidFill>
+                  <a:srgbClr val="1C2833"/>
+                </a:solidFill>
+                <a:latin typeface="Arial" pitchFamily="34" charset="0"/>
+                <a:ea typeface="Arial" pitchFamily="34" charset="-122"/>
+                <a:cs typeface="Arial" pitchFamily="34" charset="-120"/>
+              </a:rPr>
+              <a:t> Look up "circadian rhythm" and write one sentence on the mechanism (light → SCN → melatonin/cortisol). How does the modern picture differ from the </a:t>
+            </a:r>
+            <a:pPr algn="l" indent="0" marL="0">
+              <a:lnSpc>
+                <a:spcPts val="1620"/>
+              </a:lnSpc>
+              <a:spcAft>
+                <a:spcPts val="300"/>
+              </a:spcAft>
+              <a:buNone/>
+            </a:pPr>
+            <a:r>
+              <a:rPr lang="en-US" sz="1200" i="1" dirty="0">
+                <a:solidFill>
+                  <a:srgbClr val="1C2833"/>
+                </a:solidFill>
+                <a:latin typeface="Arial" pitchFamily="34" charset="0"/>
+                <a:ea typeface="Arial" pitchFamily="34" charset="-122"/>
+                <a:cs typeface="Arial" pitchFamily="34" charset="-120"/>
+              </a:rPr>
               <a:t>doṣa</a:t>
             </a:r>
             <a:pPr algn="l" indent="0" marL="0">
               <a:lnSpc>
-                <a:spcPts val="1680"/>
-              </a:lnSpc>
-              <a:spcBef>
-                <a:spcPts val="300"/>
-              </a:spcBef>
+                <a:spcPts val="1620"/>
+              </a:lnSpc>
               <a:spcAft>
                 <a:spcPts val="300"/>
               </a:spcAft>
@@ -3611,15 +6627,36 @@
                 <a:ea typeface="Arial" pitchFamily="34" charset="-122"/>
                 <a:cs typeface="Arial" pitchFamily="34" charset="-120"/>
               </a:rPr>
-              <a:t> times of day. See </a:t>
-            </a:r>
-            <a:pPr algn="l" indent="0" marL="0">
-              <a:lnSpc>
-                <a:spcPts val="1680"/>
-              </a:lnSpc>
-              <a:spcBef>
-                <a:spcPts val="300"/>
-              </a:spcBef>
+              <a:t>-clock?</a:t>
+            </a:r>
+            <a:endParaRPr lang="en-US" sz="1200" dirty="0"/>
+          </a:p>
+          <a:p>
+            <a:pPr algn="l" marL="342900" indent="-342900">
+              <a:lnSpc>
+                <a:spcPts val="1620"/>
+              </a:lnSpc>
+              <a:spcAft>
+                <a:spcPts val="300"/>
+              </a:spcAft>
+              <a:buSzPct val="100000"/>
+              <a:buChar char="•"/>
+            </a:pPr>
+            <a:r>
+              <a:rPr lang="en-US" sz="1200" b="1" dirty="0">
+                <a:solidFill>
+                  <a:srgbClr val="1C2833"/>
+                </a:solidFill>
+                <a:latin typeface="Arial" pitchFamily="34" charset="0"/>
+                <a:ea typeface="Arial" pitchFamily="34" charset="-122"/>
+                <a:cs typeface="Arial" pitchFamily="34" charset="-120"/>
+              </a:rPr>
+              <a:t>One tier down:</a:t>
+            </a:r>
+            <a:pPr algn="l" indent="0" marL="0">
+              <a:lnSpc>
+                <a:spcPts val="1620"/>
+              </a:lnSpc>
               <a:spcAft>
                 <a:spcPts val="300"/>
               </a:spcAft>
@@ -3634,30 +6671,7 @@
                 <a:ea typeface="Arial" pitchFamily="34" charset="-122"/>
                 <a:cs typeface="Arial" pitchFamily="34" charset="-120"/>
               </a:rPr>
-              <a:t>sources.md</a:t>
-            </a:r>
-            <a:pPr algn="l" indent="0" marL="0">
-              <a:lnSpc>
-                <a:spcPts val="1680"/>
-              </a:lnSpc>
-              <a:spcBef>
-                <a:spcPts val="300"/>
-              </a:spcBef>
-              <a:spcAft>
-                <a:spcPts val="300"/>
-              </a:spcAft>
-              <a:buNone/>
-            </a:pPr>
-            <a:r>
-              <a:rPr lang="en-US" sz="1200" dirty="0">
-                <a:solidFill>
-                  <a:srgbClr val="1C2833"/>
-                </a:solidFill>
-                <a:latin typeface="Arial" pitchFamily="34" charset="0"/>
-                <a:ea typeface="Arial" pitchFamily="34" charset="-122"/>
-                <a:cs typeface="Arial" pitchFamily="34" charset="-120"/>
-              </a:rPr>
-              <a:t>. – Modern parallel: Panda et al. (2012) on meal-timing and glucose handling — teacher reference only; not student-facing citation.</a:t>
+              <a:t> Memorise just the three midday/midnight windows: 10–2 (day) and 10–2 (night) — both pitta. That's the spine of the clock.</a:t>
             </a:r>
             <a:endParaRPr lang="en-US" sz="1200" dirty="0"/>
           </a:p>
@@ -3815,7 +6829,7 @@
                 <a:ea typeface="Georgia" pitchFamily="34" charset="-122"/>
                 <a:cs typeface="Georgia" pitchFamily="34" charset="-120"/>
               </a:rPr>
-              <a:t>Materials</a:t>
+              <a:t>Learning objective</a:t>
             </a:r>
             <a:endParaRPr lang="en-US" sz="1800" dirty="0"/>
           </a:p>
@@ -3863,7 +6877,7 @@
                 <a:ea typeface="Arial" pitchFamily="34" charset="-122"/>
                 <a:cs typeface="Arial" pitchFamily="34" charset="-120"/>
               </a:rPr>
-              <a:t>– Large clock-face diagram on the board, divided into 6 four-hour windows – Coloured chalk / markers (one per </a:t>
+              <a:t>By the end of this lesson, students name the six 4-hour windows of the </a:t>
             </a:r>
             <a:pPr algn="l" indent="0" marL="0">
               <a:lnSpc>
@@ -3909,7 +6923,865 @@
                 <a:ea typeface="Arial" pitchFamily="34" charset="-122"/>
                 <a:cs typeface="Arial" pitchFamily="34" charset="-120"/>
               </a:rPr>
-              <a:t>) – Printed copy of the day-clock for each student</a:t>
+              <a:t> day-clock with their dominant </a:t>
+            </a:r>
+            <a:pPr algn="l" indent="0" marL="0">
+              <a:lnSpc>
+                <a:spcPts val="1680"/>
+              </a:lnSpc>
+              <a:spcBef>
+                <a:spcPts val="300"/>
+              </a:spcBef>
+              <a:spcAft>
+                <a:spcPts val="300"/>
+              </a:spcAft>
+              <a:buNone/>
+            </a:pPr>
+            <a:r>
+              <a:rPr lang="en-US" sz="1200" i="1" dirty="0">
+                <a:solidFill>
+                  <a:srgbClr val="1C2833"/>
+                </a:solidFill>
+                <a:latin typeface="Arial" pitchFamily="34" charset="0"/>
+                <a:ea typeface="Arial" pitchFamily="34" charset="-122"/>
+                <a:cs typeface="Arial" pitchFamily="34" charset="-120"/>
+              </a:rPr>
+              <a:t>doṣa</a:t>
+            </a:r>
+            <a:pPr algn="l" indent="0" marL="0">
+              <a:lnSpc>
+                <a:spcPts val="1680"/>
+              </a:lnSpc>
+              <a:spcBef>
+                <a:spcPts val="300"/>
+              </a:spcBef>
+              <a:spcAft>
+                <a:spcPts val="300"/>
+              </a:spcAft>
+              <a:buNone/>
+            </a:pPr>
+            <a:r>
+              <a:rPr lang="en-US" sz="1200" dirty="0">
+                <a:solidFill>
+                  <a:srgbClr val="1C2833"/>
+                </a:solidFill>
+                <a:latin typeface="Arial" pitchFamily="34" charset="0"/>
+                <a:ea typeface="Arial" pitchFamily="34" charset="-122"/>
+                <a:cs typeface="Arial" pitchFamily="34" charset="-120"/>
+              </a:rPr>
+              <a:t>, explain </a:t>
+            </a:r>
+            <a:pPr algn="l" indent="0" marL="0">
+              <a:lnSpc>
+                <a:spcPts val="1680"/>
+              </a:lnSpc>
+              <a:spcBef>
+                <a:spcPts val="300"/>
+              </a:spcBef>
+              <a:spcAft>
+                <a:spcPts val="300"/>
+              </a:spcAft>
+              <a:buNone/>
+            </a:pPr>
+            <a:r>
+              <a:rPr lang="en-US" sz="1200" i="1" dirty="0">
+                <a:solidFill>
+                  <a:srgbClr val="1C2833"/>
+                </a:solidFill>
+                <a:latin typeface="Arial" pitchFamily="34" charset="0"/>
+                <a:ea typeface="Arial" pitchFamily="34" charset="-122"/>
+                <a:cs typeface="Arial" pitchFamily="34" charset="-120"/>
+              </a:rPr>
+              <a:t>why</a:t>
+            </a:r>
+            <a:pPr algn="l" indent="0" marL="0">
+              <a:lnSpc>
+                <a:spcPts val="1680"/>
+              </a:lnSpc>
+              <a:spcBef>
+                <a:spcPts val="300"/>
+              </a:spcBef>
+              <a:spcAft>
+                <a:spcPts val="300"/>
+              </a:spcAft>
+              <a:buNone/>
+            </a:pPr>
+            <a:r>
+              <a:rPr lang="en-US" sz="1200" dirty="0">
+                <a:solidFill>
+                  <a:srgbClr val="1C2833"/>
+                </a:solidFill>
+                <a:latin typeface="Arial" pitchFamily="34" charset="0"/>
+                <a:ea typeface="Arial" pitchFamily="34" charset="-122"/>
+                <a:cs typeface="Arial" pitchFamily="34" charset="-120"/>
+              </a:rPr>
+              <a:t> each </a:t>
+            </a:r>
+            <a:pPr algn="l" indent="0" marL="0">
+              <a:lnSpc>
+                <a:spcPts val="1680"/>
+              </a:lnSpc>
+              <a:spcBef>
+                <a:spcPts val="300"/>
+              </a:spcBef>
+              <a:spcAft>
+                <a:spcPts val="300"/>
+              </a:spcAft>
+              <a:buNone/>
+            </a:pPr>
+            <a:r>
+              <a:rPr lang="en-US" sz="1200" i="1" dirty="0">
+                <a:solidFill>
+                  <a:srgbClr val="1C2833"/>
+                </a:solidFill>
+                <a:latin typeface="Arial" pitchFamily="34" charset="0"/>
+                <a:ea typeface="Arial" pitchFamily="34" charset="-122"/>
+                <a:cs typeface="Arial" pitchFamily="34" charset="-120"/>
+              </a:rPr>
+              <a:t>doṣa</a:t>
+            </a:r>
+            <a:pPr algn="l" indent="0" marL="0">
+              <a:lnSpc>
+                <a:spcPts val="1680"/>
+              </a:lnSpc>
+              <a:spcBef>
+                <a:spcPts val="300"/>
+              </a:spcBef>
+              <a:spcAft>
+                <a:spcPts val="300"/>
+              </a:spcAft>
+              <a:buNone/>
+            </a:pPr>
+            <a:r>
+              <a:rPr lang="en-US" sz="1200" dirty="0">
+                <a:solidFill>
+                  <a:srgbClr val="1C2833"/>
+                </a:solidFill>
+                <a:latin typeface="Arial" pitchFamily="34" charset="0"/>
+                <a:ea typeface="Arial" pitchFamily="34" charset="-122"/>
+                <a:cs typeface="Arial" pitchFamily="34" charset="-120"/>
+              </a:rPr>
+              <a:t> dominates at that time, and connect this to one modern observation about circadian biology.</a:t>
+            </a:r>
+            <a:endParaRPr lang="en-US" sz="1200" dirty="0"/>
+          </a:p>
+        </p:txBody>
+      </p:sp>
+      <p:sp>
+        <p:nvSpPr>
+          <p:cNvPr id="5" name="Text 3"/>
+          <p:cNvSpPr/>
+          <p:nvPr/>
+        </p:nvSpPr>
+        <p:spPr>
+          <a:xfrm>
+            <a:off x="406301" y="4434929"/>
+            <a:ext cx="8498026" cy="213271"/>
+          </a:xfrm>
+          <a:prstGeom prst="rect">
+            <a:avLst/>
+          </a:prstGeom>
+          <a:noFill/>
+          <a:ln/>
+        </p:spPr>
+        <p:txBody>
+          <a:bodyPr wrap="square" lIns="0" tIns="0" rIns="0" bIns="0" rtlCol="0" anchor="t"/>
+          <a:lstStyle/>
+          <a:p>
+            <a:pPr algn="l" indent="0" marL="0">
+              <a:lnSpc>
+                <a:spcPts val="1680"/>
+              </a:lnSpc>
+              <a:spcBef>
+                <a:spcPts val="300"/>
+              </a:spcBef>
+              <a:spcAft>
+                <a:spcPts val="300"/>
+              </a:spcAft>
+              <a:buNone/>
+            </a:pPr>
+            <a:r>
+              <a:rPr lang="en-US" sz="1200" dirty="0">
+                <a:solidFill>
+                  <a:srgbClr val="1C2833"/>
+                </a:solidFill>
+                <a:latin typeface="Arial" pitchFamily="34" charset="0"/>
+                <a:ea typeface="Arial" pitchFamily="34" charset="-122"/>
+                <a:cs typeface="Arial" pitchFamily="34" charset="-120"/>
+              </a:rPr>
+              <a:t>Middle ·  · IKS Curriculum</a:t>
+            </a:r>
+            <a:endParaRPr lang="en-US" sz="1200" dirty="0"/>
+          </a:p>
+        </p:txBody>
+      </p:sp>
+    </p:spTree>
+  </p:cSld>
+  <p:clrMapOvr>
+    <a:masterClrMapping/>
+  </p:clrMapOvr>
+</p:sld>
+</file>
+
+<file path=ppt/slides/slide20.xml><?xml version="1.0" encoding="utf-8"?>
+<p:sld xmlns:a="http://schemas.openxmlformats.org/drawingml/2006/main" xmlns:r="http://schemas.openxmlformats.org/officeDocument/2006/relationships" xmlns:p="http://schemas.openxmlformats.org/presentationml/2006/main">
+  <p:cSld name="Slide 20">
+    <p:bg>
+      <p:bgPr>
+        <a:solidFill>
+          <a:srgbClr val="FFFFFF"/>
+        </a:solidFill>
+      </p:bgPr>
+    </p:bg>
+    <p:spTree>
+      <p:nvGrpSpPr>
+        <p:cNvPr id="1" name=""/>
+        <p:cNvGrpSpPr/>
+        <p:nvPr/>
+      </p:nvGrpSpPr>
+      <p:grpSpPr>
+        <a:xfrm>
+          <a:off x="0" y="0"/>
+          <a:ext cx="0" cy="0"/>
+          <a:chOff x="0" y="0"/>
+          <a:chExt cx="0" cy="0"/>
+        </a:xfrm>
+      </p:grpSpPr>
+      <p:sp>
+        <p:nvSpPr>
+          <p:cNvPr id="2" name="Text 0"/>
+          <p:cNvSpPr/>
+          <p:nvPr/>
+        </p:nvSpPr>
+        <p:spPr>
+          <a:xfrm>
+            <a:off x="0" y="0"/>
+            <a:ext cx="9144000" cy="101501"/>
+          </a:xfrm>
+          <a:prstGeom prst="rect">
+            <a:avLst/>
+          </a:prstGeom>
+          <a:solidFill>
+            <a:srgbClr val="277884"/>
+          </a:solidFill>
+          <a:ln/>
+        </p:spPr>
+        <p:txBody>
+          <a:bodyPr wrap="square" rtlCol="0" anchor="ctr"/>
+          <a:lstStyle/>
+          <a:p>
+            <a:pPr indent="0" marL="0">
+              <a:buNone/>
+            </a:pPr>
+            <a:endParaRPr lang="en-US" dirty="0"/>
+          </a:p>
+        </p:txBody>
+      </p:sp>
+      <p:sp>
+        <p:nvSpPr>
+          <p:cNvPr id="3" name="Text 1"/>
+          <p:cNvSpPr/>
+          <p:nvPr/>
+        </p:nvSpPr>
+        <p:spPr>
+          <a:xfrm>
+            <a:off x="406301" y="457051"/>
+            <a:ext cx="8498026" cy="274290"/>
+          </a:xfrm>
+          <a:prstGeom prst="rect">
+            <a:avLst/>
+          </a:prstGeom>
+          <a:noFill/>
+          <a:ln/>
+        </p:spPr>
+        <p:txBody>
+          <a:bodyPr wrap="square" lIns="0" tIns="0" rIns="0" bIns="0" rtlCol="0" anchor="t"/>
+          <a:lstStyle/>
+          <a:p>
+            <a:pPr algn="l" indent="0" marL="0">
+              <a:lnSpc>
+                <a:spcPts val="2160"/>
+              </a:lnSpc>
+              <a:spcBef>
+                <a:spcPts val="600"/>
+              </a:spcBef>
+              <a:spcAft>
+                <a:spcPts val="800"/>
+              </a:spcAft>
+              <a:buNone/>
+            </a:pPr>
+            <a:r>
+              <a:rPr lang="en-US" sz="1800" b="1" dirty="0">
+                <a:solidFill>
+                  <a:srgbClr val="FE4447"/>
+                </a:solidFill>
+                <a:latin typeface="Georgia" pitchFamily="34" charset="0"/>
+                <a:ea typeface="Georgia" pitchFamily="34" charset="-122"/>
+                <a:cs typeface="Georgia" pitchFamily="34" charset="-120"/>
+              </a:rPr>
+              <a:t>Teacher notes</a:t>
+            </a:r>
+            <a:endParaRPr lang="en-US" sz="1800" dirty="0"/>
+          </a:p>
+        </p:txBody>
+      </p:sp>
+      <p:sp>
+        <p:nvSpPr>
+          <p:cNvPr id="4" name="Text 2"/>
+          <p:cNvSpPr/>
+          <p:nvPr/>
+        </p:nvSpPr>
+        <p:spPr>
+          <a:xfrm>
+            <a:off x="634901" y="883593"/>
+            <a:ext cx="8102798" cy="975122"/>
+          </a:xfrm>
+          <a:prstGeom prst="rect">
+            <a:avLst/>
+          </a:prstGeom>
+          <a:noFill/>
+          <a:ln/>
+        </p:spPr>
+        <p:txBody>
+          <a:bodyPr wrap="square" lIns="0" tIns="0" rIns="0" bIns="0" rtlCol="0" anchor="t"/>
+          <a:lstStyle/>
+          <a:p>
+            <a:pPr algn="l" marL="342900" indent="-342900">
+              <a:lnSpc>
+                <a:spcPts val="1620"/>
+              </a:lnSpc>
+              <a:spcAft>
+                <a:spcPts val="300"/>
+              </a:spcAft>
+              <a:buSzPct val="100000"/>
+              <a:buChar char="•"/>
+            </a:pPr>
+            <a:r>
+              <a:rPr lang="en-US" sz="1200" dirty="0">
+                <a:solidFill>
+                  <a:srgbClr val="1C2833"/>
+                </a:solidFill>
+                <a:latin typeface="Arial" pitchFamily="34" charset="0"/>
+                <a:ea typeface="Arial" pitchFamily="34" charset="-122"/>
+                <a:cs typeface="Arial" pitchFamily="34" charset="-120"/>
+              </a:rPr>
+              <a:t>Some students will say their family's dinner is at 9 pm. Don't shame them. Note the principle; don't prescribe.</a:t>
+            </a:r>
+            <a:endParaRPr lang="en-US" sz="1200" dirty="0"/>
+          </a:p>
+          <a:p>
+            <a:pPr algn="l" marL="342900" indent="-342900">
+              <a:lnSpc>
+                <a:spcPts val="1620"/>
+              </a:lnSpc>
+              <a:spcAft>
+                <a:spcPts val="300"/>
+              </a:spcAft>
+              <a:buSzPct val="100000"/>
+              <a:buChar char="•"/>
+            </a:pPr>
+            <a:r>
+              <a:rPr lang="en-US" sz="1200" dirty="0">
+                <a:solidFill>
+                  <a:srgbClr val="1C2833"/>
+                </a:solidFill>
+                <a:latin typeface="Arial" pitchFamily="34" charset="0"/>
+                <a:ea typeface="Arial" pitchFamily="34" charset="-122"/>
+                <a:cs typeface="Arial" pitchFamily="34" charset="-120"/>
+              </a:rPr>
+              <a:t>The clock is an </a:t>
+            </a:r>
+            <a:pPr algn="l" indent="0" marL="0">
+              <a:lnSpc>
+                <a:spcPts val="1620"/>
+              </a:lnSpc>
+              <a:spcAft>
+                <a:spcPts val="300"/>
+              </a:spcAft>
+              <a:buNone/>
+            </a:pPr>
+            <a:r>
+              <a:rPr lang="en-US" sz="1200" i="1" dirty="0">
+                <a:solidFill>
+                  <a:srgbClr val="1C2833"/>
+                </a:solidFill>
+                <a:latin typeface="Arial" pitchFamily="34" charset="0"/>
+                <a:ea typeface="Arial" pitchFamily="34" charset="-122"/>
+                <a:cs typeface="Arial" pitchFamily="34" charset="-120"/>
+              </a:rPr>
+              <a:t>idealised pattern</a:t>
+            </a:r>
+            <a:pPr algn="l" indent="0" marL="0">
+              <a:lnSpc>
+                <a:spcPts val="1620"/>
+              </a:lnSpc>
+              <a:spcAft>
+                <a:spcPts val="300"/>
+              </a:spcAft>
+              <a:buNone/>
+            </a:pPr>
+            <a:r>
+              <a:rPr lang="en-US" sz="1200" dirty="0">
+                <a:solidFill>
+                  <a:srgbClr val="1C2833"/>
+                </a:solidFill>
+                <a:latin typeface="Arial" pitchFamily="34" charset="0"/>
+                <a:ea typeface="Arial" pitchFamily="34" charset="-122"/>
+                <a:cs typeface="Arial" pitchFamily="34" charset="-120"/>
+              </a:rPr>
+              <a:t>, not a rigid rule. Indian families dinner at all sorts of times for legitimate reasons. The point is to notice the </a:t>
+            </a:r>
+            <a:pPr algn="l" indent="0" marL="0">
+              <a:lnSpc>
+                <a:spcPts val="1620"/>
+              </a:lnSpc>
+              <a:spcAft>
+                <a:spcPts val="300"/>
+              </a:spcAft>
+              <a:buNone/>
+            </a:pPr>
+            <a:r>
+              <a:rPr lang="en-US" sz="1200" i="1" dirty="0">
+                <a:solidFill>
+                  <a:srgbClr val="1C2833"/>
+                </a:solidFill>
+                <a:latin typeface="Arial" pitchFamily="34" charset="0"/>
+                <a:ea typeface="Arial" pitchFamily="34" charset="-122"/>
+                <a:cs typeface="Arial" pitchFamily="34" charset="-120"/>
+              </a:rPr>
+              <a:t>trade-off</a:t>
+            </a:r>
+            <a:pPr algn="l" indent="0" marL="0">
+              <a:lnSpc>
+                <a:spcPts val="1620"/>
+              </a:lnSpc>
+              <a:spcAft>
+                <a:spcPts val="300"/>
+              </a:spcAft>
+              <a:buNone/>
+            </a:pPr>
+            <a:r>
+              <a:rPr lang="en-US" sz="1200" dirty="0">
+                <a:solidFill>
+                  <a:srgbClr val="1C2833"/>
+                </a:solidFill>
+                <a:latin typeface="Arial" pitchFamily="34" charset="0"/>
+                <a:ea typeface="Arial" pitchFamily="34" charset="-122"/>
+                <a:cs typeface="Arial" pitchFamily="34" charset="-120"/>
+              </a:rPr>
+              <a:t>, not to comply.</a:t>
+            </a:r>
+            <a:endParaRPr lang="en-US" sz="1200" dirty="0"/>
+          </a:p>
+          <a:p>
+            <a:pPr algn="l" marL="342900" indent="-342900">
+              <a:lnSpc>
+                <a:spcPts val="1620"/>
+              </a:lnSpc>
+              <a:spcAft>
+                <a:spcPts val="300"/>
+              </a:spcAft>
+              <a:buSzPct val="100000"/>
+              <a:buChar char="•"/>
+            </a:pPr>
+            <a:r>
+              <a:rPr lang="en-US" sz="1200" dirty="0">
+                <a:solidFill>
+                  <a:srgbClr val="1C2833"/>
+                </a:solidFill>
+                <a:latin typeface="Arial" pitchFamily="34" charset="0"/>
+                <a:ea typeface="Arial" pitchFamily="34" charset="-122"/>
+                <a:cs typeface="Arial" pitchFamily="34" charset="-120"/>
+              </a:rPr>
+              <a:t>Don't conflate the </a:t>
+            </a:r>
+            <a:pPr algn="l" indent="0" marL="0">
+              <a:lnSpc>
+                <a:spcPts val="1620"/>
+              </a:lnSpc>
+              <a:spcAft>
+                <a:spcPts val="300"/>
+              </a:spcAft>
+              <a:buNone/>
+            </a:pPr>
+            <a:r>
+              <a:rPr lang="en-US" sz="1200" i="1" dirty="0">
+                <a:solidFill>
+                  <a:srgbClr val="1C2833"/>
+                </a:solidFill>
+                <a:latin typeface="Arial" pitchFamily="34" charset="0"/>
+                <a:ea typeface="Arial" pitchFamily="34" charset="-122"/>
+                <a:cs typeface="Arial" pitchFamily="34" charset="-120"/>
+              </a:rPr>
+              <a:t>doṣa</a:t>
+            </a:r>
+            <a:pPr algn="l" indent="0" marL="0">
+              <a:lnSpc>
+                <a:spcPts val="1620"/>
+              </a:lnSpc>
+              <a:spcAft>
+                <a:spcPts val="300"/>
+              </a:spcAft>
+              <a:buNone/>
+            </a:pPr>
+            <a:r>
+              <a:rPr lang="en-US" sz="1200" dirty="0">
+                <a:solidFill>
+                  <a:srgbClr val="1C2833"/>
+                </a:solidFill>
+                <a:latin typeface="Arial" pitchFamily="34" charset="0"/>
+                <a:ea typeface="Arial" pitchFamily="34" charset="-122"/>
+                <a:cs typeface="Arial" pitchFamily="34" charset="-120"/>
+              </a:rPr>
+              <a:t> clock with the modern circadian rhythm too tightly. They overlap in spirit, not in detail.</a:t>
+            </a:r>
+            <a:endParaRPr lang="en-US" sz="1200" dirty="0"/>
+          </a:p>
+        </p:txBody>
+      </p:sp>
+      <p:sp>
+        <p:nvSpPr>
+          <p:cNvPr id="5" name="Text 3"/>
+          <p:cNvSpPr/>
+          <p:nvPr/>
+        </p:nvSpPr>
+        <p:spPr>
+          <a:xfrm>
+            <a:off x="406301" y="4434929"/>
+            <a:ext cx="8498026" cy="213271"/>
+          </a:xfrm>
+          <a:prstGeom prst="rect">
+            <a:avLst/>
+          </a:prstGeom>
+          <a:noFill/>
+          <a:ln/>
+        </p:spPr>
+        <p:txBody>
+          <a:bodyPr wrap="square" lIns="0" tIns="0" rIns="0" bIns="0" rtlCol="0" anchor="t"/>
+          <a:lstStyle/>
+          <a:p>
+            <a:pPr algn="l" indent="0" marL="0">
+              <a:lnSpc>
+                <a:spcPts val="1680"/>
+              </a:lnSpc>
+              <a:spcBef>
+                <a:spcPts val="300"/>
+              </a:spcBef>
+              <a:spcAft>
+                <a:spcPts val="300"/>
+              </a:spcAft>
+              <a:buNone/>
+            </a:pPr>
+            <a:r>
+              <a:rPr lang="en-US" sz="1200" dirty="0">
+                <a:solidFill>
+                  <a:srgbClr val="1C2833"/>
+                </a:solidFill>
+                <a:latin typeface="Arial" pitchFamily="34" charset="0"/>
+                <a:ea typeface="Arial" pitchFamily="34" charset="-122"/>
+                <a:cs typeface="Arial" pitchFamily="34" charset="-120"/>
+              </a:rPr>
+              <a:t>Middle ·  · IKS Curriculum</a:t>
+            </a:r>
+            <a:endParaRPr lang="en-US" sz="1200" dirty="0"/>
+          </a:p>
+        </p:txBody>
+      </p:sp>
+    </p:spTree>
+  </p:cSld>
+  <p:clrMapOvr>
+    <a:masterClrMapping/>
+  </p:clrMapOvr>
+</p:sld>
+</file>
+
+<file path=ppt/slides/slide21.xml><?xml version="1.0" encoding="utf-8"?>
+<p:sld xmlns:a="http://schemas.openxmlformats.org/drawingml/2006/main" xmlns:r="http://schemas.openxmlformats.org/officeDocument/2006/relationships" xmlns:p="http://schemas.openxmlformats.org/presentationml/2006/main">
+  <p:cSld name="Slide 21">
+    <p:bg>
+      <p:bgPr>
+        <a:solidFill>
+          <a:srgbClr val="FFFFFF"/>
+        </a:solidFill>
+      </p:bgPr>
+    </p:bg>
+    <p:spTree>
+      <p:nvGrpSpPr>
+        <p:cNvPr id="1" name=""/>
+        <p:cNvGrpSpPr/>
+        <p:nvPr/>
+      </p:nvGrpSpPr>
+      <p:grpSpPr>
+        <a:xfrm>
+          <a:off x="0" y="0"/>
+          <a:ext cx="0" cy="0"/>
+          <a:chOff x="0" y="0"/>
+          <a:chExt cx="0" cy="0"/>
+        </a:xfrm>
+      </p:grpSpPr>
+      <p:sp>
+        <p:nvSpPr>
+          <p:cNvPr id="2" name="Text 0"/>
+          <p:cNvSpPr/>
+          <p:nvPr/>
+        </p:nvSpPr>
+        <p:spPr>
+          <a:xfrm>
+            <a:off x="0" y="0"/>
+            <a:ext cx="9144000" cy="101501"/>
+          </a:xfrm>
+          <a:prstGeom prst="rect">
+            <a:avLst/>
+          </a:prstGeom>
+          <a:solidFill>
+            <a:srgbClr val="277884"/>
+          </a:solidFill>
+          <a:ln/>
+        </p:spPr>
+        <p:txBody>
+          <a:bodyPr wrap="square" rtlCol="0" anchor="ctr"/>
+          <a:lstStyle/>
+          <a:p>
+            <a:pPr indent="0" marL="0">
+              <a:buNone/>
+            </a:pPr>
+            <a:endParaRPr lang="en-US" dirty="0"/>
+          </a:p>
+        </p:txBody>
+      </p:sp>
+      <p:sp>
+        <p:nvSpPr>
+          <p:cNvPr id="3" name="Text 1"/>
+          <p:cNvSpPr/>
+          <p:nvPr/>
+        </p:nvSpPr>
+        <p:spPr>
+          <a:xfrm>
+            <a:off x="406301" y="457051"/>
+            <a:ext cx="8498026" cy="274290"/>
+          </a:xfrm>
+          <a:prstGeom prst="rect">
+            <a:avLst/>
+          </a:prstGeom>
+          <a:noFill/>
+          <a:ln/>
+        </p:spPr>
+        <p:txBody>
+          <a:bodyPr wrap="square" lIns="0" tIns="0" rIns="0" bIns="0" rtlCol="0" anchor="t"/>
+          <a:lstStyle/>
+          <a:p>
+            <a:pPr algn="l" indent="0" marL="0">
+              <a:lnSpc>
+                <a:spcPts val="2160"/>
+              </a:lnSpc>
+              <a:spcBef>
+                <a:spcPts val="600"/>
+              </a:spcBef>
+              <a:spcAft>
+                <a:spcPts val="800"/>
+              </a:spcAft>
+              <a:buNone/>
+            </a:pPr>
+            <a:r>
+              <a:rPr lang="en-US" sz="1800" b="1" dirty="0">
+                <a:solidFill>
+                  <a:srgbClr val="FE4447"/>
+                </a:solidFill>
+                <a:latin typeface="Georgia" pitchFamily="34" charset="0"/>
+                <a:ea typeface="Georgia" pitchFamily="34" charset="-122"/>
+                <a:cs typeface="Georgia" pitchFamily="34" charset="-120"/>
+              </a:rPr>
+              <a:t>Citation(s) used in this lesson</a:t>
+            </a:r>
+            <a:endParaRPr lang="en-US" sz="1800" dirty="0"/>
+          </a:p>
+        </p:txBody>
+      </p:sp>
+      <p:sp>
+        <p:nvSpPr>
+          <p:cNvPr id="4" name="Text 2"/>
+          <p:cNvSpPr/>
+          <p:nvPr/>
+        </p:nvSpPr>
+        <p:spPr>
+          <a:xfrm>
+            <a:off x="634901" y="883593"/>
+            <a:ext cx="8102798" cy="750391"/>
+          </a:xfrm>
+          <a:prstGeom prst="rect">
+            <a:avLst/>
+          </a:prstGeom>
+          <a:noFill/>
+          <a:ln/>
+        </p:spPr>
+        <p:txBody>
+          <a:bodyPr wrap="square" lIns="0" tIns="0" rIns="0" bIns="0" rtlCol="0" anchor="t"/>
+          <a:lstStyle/>
+          <a:p>
+            <a:pPr algn="l" marL="342900" indent="-342900">
+              <a:lnSpc>
+                <a:spcPts val="1620"/>
+              </a:lnSpc>
+              <a:spcAft>
+                <a:spcPts val="300"/>
+              </a:spcAft>
+              <a:buSzPct val="100000"/>
+              <a:buChar char="•"/>
+            </a:pPr>
+            <a:r>
+              <a:rPr lang="en-US" sz="1200" dirty="0">
+                <a:solidFill>
+                  <a:srgbClr val="1C2833"/>
+                </a:solidFill>
+                <a:latin typeface="Arial" pitchFamily="34" charset="0"/>
+                <a:ea typeface="Arial" pitchFamily="34" charset="-122"/>
+                <a:cs typeface="Arial" pitchFamily="34" charset="-120"/>
+              </a:rPr>
+              <a:t>Aṣṭāṅga Hṛdaya, </a:t>
+            </a:r>
+            <a:pPr algn="l" indent="0" marL="0">
+              <a:lnSpc>
+                <a:spcPts val="1620"/>
+              </a:lnSpc>
+              <a:spcAft>
+                <a:spcPts val="300"/>
+              </a:spcAft>
+              <a:buNone/>
+            </a:pPr>
+            <a:r>
+              <a:rPr lang="en-US" sz="1200" i="1" dirty="0">
+                <a:solidFill>
+                  <a:srgbClr val="1C2833"/>
+                </a:solidFill>
+                <a:latin typeface="Arial" pitchFamily="34" charset="0"/>
+                <a:ea typeface="Arial" pitchFamily="34" charset="-122"/>
+                <a:cs typeface="Arial" pitchFamily="34" charset="-120"/>
+              </a:rPr>
+              <a:t>Sūtrasthāna</a:t>
+            </a:r>
+            <a:pPr algn="l" indent="0" marL="0">
+              <a:lnSpc>
+                <a:spcPts val="1620"/>
+              </a:lnSpc>
+              <a:spcAft>
+                <a:spcPts val="300"/>
+              </a:spcAft>
+              <a:buNone/>
+            </a:pPr>
+            <a:r>
+              <a:rPr lang="en-US" sz="1200" dirty="0">
+                <a:solidFill>
+                  <a:srgbClr val="1C2833"/>
+                </a:solidFill>
+                <a:latin typeface="Arial" pitchFamily="34" charset="0"/>
+                <a:ea typeface="Arial" pitchFamily="34" charset="-122"/>
+                <a:cs typeface="Arial" pitchFamily="34" charset="-120"/>
+              </a:rPr>
+              <a:t> 1 (Vāgbhaṭa) — paraphrase on </a:t>
+            </a:r>
+            <a:pPr algn="l" indent="0" marL="0">
+              <a:lnSpc>
+                <a:spcPts val="1620"/>
+              </a:lnSpc>
+              <a:spcAft>
+                <a:spcPts val="300"/>
+              </a:spcAft>
+              <a:buNone/>
+            </a:pPr>
+            <a:r>
+              <a:rPr lang="en-US" sz="1200" i="1" dirty="0">
+                <a:solidFill>
+                  <a:srgbClr val="1C2833"/>
+                </a:solidFill>
+                <a:latin typeface="Arial" pitchFamily="34" charset="0"/>
+                <a:ea typeface="Arial" pitchFamily="34" charset="-122"/>
+                <a:cs typeface="Arial" pitchFamily="34" charset="-120"/>
+              </a:rPr>
+              <a:t>doṣa</a:t>
+            </a:r>
+            <a:pPr algn="l" indent="0" marL="0">
+              <a:lnSpc>
+                <a:spcPts val="1620"/>
+              </a:lnSpc>
+              <a:spcAft>
+                <a:spcPts val="300"/>
+              </a:spcAft>
+              <a:buNone/>
+            </a:pPr>
+            <a:r>
+              <a:rPr lang="en-US" sz="1200" dirty="0">
+                <a:solidFill>
+                  <a:srgbClr val="1C2833"/>
+                </a:solidFill>
+                <a:latin typeface="Arial" pitchFamily="34" charset="0"/>
+                <a:ea typeface="Arial" pitchFamily="34" charset="-122"/>
+                <a:cs typeface="Arial" pitchFamily="34" charset="-120"/>
+              </a:rPr>
+              <a:t> times of day. See </a:t>
+            </a:r>
+            <a:pPr algn="l" indent="0" marL="0">
+              <a:lnSpc>
+                <a:spcPts val="1620"/>
+              </a:lnSpc>
+              <a:spcAft>
+                <a:spcPts val="300"/>
+              </a:spcAft>
+              <a:buNone/>
+            </a:pPr>
+            <a:r>
+              <a:rPr lang="en-US" sz="1200" dirty="0">
+                <a:solidFill>
+                  <a:srgbClr val="1C2833"/>
+                </a:solidFill>
+                <a:latin typeface="Arial" pitchFamily="34" charset="0"/>
+                <a:ea typeface="Arial" pitchFamily="34" charset="-122"/>
+                <a:cs typeface="Arial" pitchFamily="34" charset="-120"/>
+              </a:rPr>
+              <a:t>sources.md</a:t>
+            </a:r>
+            <a:pPr algn="l" indent="0" marL="0">
+              <a:lnSpc>
+                <a:spcPts val="1620"/>
+              </a:lnSpc>
+              <a:spcAft>
+                <a:spcPts val="300"/>
+              </a:spcAft>
+              <a:buNone/>
+            </a:pPr>
+            <a:r>
+              <a:rPr lang="en-US" sz="1200" dirty="0">
+                <a:solidFill>
+                  <a:srgbClr val="1C2833"/>
+                </a:solidFill>
+                <a:latin typeface="Arial" pitchFamily="34" charset="0"/>
+                <a:ea typeface="Arial" pitchFamily="34" charset="-122"/>
+                <a:cs typeface="Arial" pitchFamily="34" charset="-120"/>
+              </a:rPr>
+              <a:t>.</a:t>
+            </a:r>
+            <a:endParaRPr lang="en-US" sz="1200" dirty="0"/>
+          </a:p>
+          <a:p>
+            <a:pPr algn="l" marL="342900" indent="-342900">
+              <a:lnSpc>
+                <a:spcPts val="1620"/>
+              </a:lnSpc>
+              <a:spcAft>
+                <a:spcPts val="300"/>
+              </a:spcAft>
+              <a:buSzPct val="100000"/>
+              <a:buChar char="•"/>
+            </a:pPr>
+            <a:r>
+              <a:rPr lang="en-US" sz="1200" dirty="0">
+                <a:solidFill>
+                  <a:srgbClr val="1C2833"/>
+                </a:solidFill>
+                <a:latin typeface="Arial" pitchFamily="34" charset="0"/>
+                <a:ea typeface="Arial" pitchFamily="34" charset="-122"/>
+                <a:cs typeface="Arial" pitchFamily="34" charset="-120"/>
+              </a:rPr>
+              <a:t>Modern parallel: Panda et al. (2012) on meal-timing and glucose handling — teacher reference only; not student-facing citation.</a:t>
             </a:r>
             <a:endParaRPr lang="en-US" sz="1200" dirty="0"/>
           </a:p>
@@ -4067,7 +7939,7 @@
                 <a:ea typeface="Georgia" pitchFamily="34" charset="-122"/>
                 <a:cs typeface="Georgia" pitchFamily="34" charset="-120"/>
               </a:rPr>
-              <a:t>Vocabulary introduced today</a:t>
+              <a:t>Materials</a:t>
             </a:r>
             <a:endParaRPr lang="en-US" sz="1800" dirty="0"/>
           </a:p>
@@ -4082,7 +7954,7 @@
         <p:spPr>
           <a:xfrm>
             <a:off x="634901" y="883593"/>
-            <a:ext cx="8102798" cy="281880"/>
+            <a:ext cx="8102798" cy="769441"/>
           </a:xfrm>
           <a:prstGeom prst="rect">
             <a:avLst/>
@@ -4105,6 +7977,50 @@
               <a:buChar char="•"/>
             </a:pPr>
             <a:r>
+              <a:rPr lang="en-US" sz="1200" dirty="0">
+                <a:solidFill>
+                  <a:srgbClr val="1C2833"/>
+                </a:solidFill>
+                <a:latin typeface="Arial" pitchFamily="34" charset="0"/>
+                <a:ea typeface="Arial" pitchFamily="34" charset="-122"/>
+                <a:cs typeface="Arial" pitchFamily="34" charset="-120"/>
+              </a:rPr>
+              <a:t>Large clock-face diagram on the board, divided into 6 four-hour windows</a:t>
+            </a:r>
+            <a:endParaRPr lang="en-US" sz="1200" dirty="0"/>
+          </a:p>
+          <a:p>
+            <a:pPr algn="l" marL="342900" indent="-342900">
+              <a:lnSpc>
+                <a:spcPts val="1620"/>
+              </a:lnSpc>
+              <a:spcAft>
+                <a:spcPts val="300"/>
+              </a:spcAft>
+              <a:buSzPct val="100000"/>
+              <a:buChar char="•"/>
+            </a:pPr>
+            <a:r>
+              <a:rPr lang="en-US" sz="1200" dirty="0">
+                <a:solidFill>
+                  <a:srgbClr val="1C2833"/>
+                </a:solidFill>
+                <a:latin typeface="Arial" pitchFamily="34" charset="0"/>
+                <a:ea typeface="Arial" pitchFamily="34" charset="-122"/>
+                <a:cs typeface="Arial" pitchFamily="34" charset="-120"/>
+              </a:rPr>
+              <a:t>Coloured chalk / markers (one per </a:t>
+            </a:r>
+            <a:pPr algn="l" indent="0" marL="0">
+              <a:lnSpc>
+                <a:spcPts val="1620"/>
+              </a:lnSpc>
+              <a:spcAft>
+                <a:spcPts val="300"/>
+              </a:spcAft>
+              <a:buNone/>
+            </a:pPr>
+            <a:r>
               <a:rPr lang="en-US" sz="1200" i="1" dirty="0">
                 <a:solidFill>
                   <a:srgbClr val="1C2833"/>
@@ -4113,7 +8029,7 @@
                 <a:ea typeface="Arial" pitchFamily="34" charset="-122"/>
                 <a:cs typeface="Arial" pitchFamily="34" charset="-120"/>
               </a:rPr>
-              <a:t>kāla</a:t>
+              <a:t>doṣa</a:t>
             </a:r>
             <a:pPr algn="l" indent="0" marL="0">
               <a:lnSpc>
@@ -4133,36 +8049,20 @@
                 <a:ea typeface="Arial" pitchFamily="34" charset="-122"/>
                 <a:cs typeface="Arial" pitchFamily="34" charset="-120"/>
               </a:rPr>
-              <a:t> (IAST: kāla; lit. "time") — used in Ayurveda as "the time-of-day factor" in determining how the </a:t>
-            </a:r>
-            <a:pPr algn="l" indent="0" marL="0">
-              <a:lnSpc>
-                <a:spcPts val="1620"/>
-              </a:lnSpc>
-              <a:spcAft>
-                <a:spcPts val="300"/>
-              </a:spcAft>
-              <a:buNone/>
-            </a:pPr>
-            <a:r>
-              <a:rPr lang="en-US" sz="1200" i="1" dirty="0">
-                <a:solidFill>
-                  <a:srgbClr val="1C2833"/>
-                </a:solidFill>
-                <a:latin typeface="Arial" pitchFamily="34" charset="0"/>
-                <a:ea typeface="Arial" pitchFamily="34" charset="-122"/>
-                <a:cs typeface="Arial" pitchFamily="34" charset="-120"/>
-              </a:rPr>
-              <a:t>doṣa</a:t>
-            </a:r>
-            <a:pPr algn="l" indent="0" marL="0">
-              <a:lnSpc>
-                <a:spcPts val="1620"/>
-              </a:lnSpc>
-              <a:spcAft>
-                <a:spcPts val="300"/>
-              </a:spcAft>
-              <a:buNone/>
+              <a:t>)</a:t>
+            </a:r>
+            <a:endParaRPr lang="en-US" sz="1200" dirty="0"/>
+          </a:p>
+          <a:p>
+            <a:pPr algn="l" marL="342900" indent="-342900">
+              <a:lnSpc>
+                <a:spcPts val="1620"/>
+              </a:lnSpc>
+              <a:spcAft>
+                <a:spcPts val="300"/>
+              </a:spcAft>
+              <a:buSzPct val="100000"/>
+              <a:buChar char="•"/>
             </a:pPr>
             <a:r>
               <a:rPr lang="en-US" sz="1200" dirty="0">
@@ -4173,7 +8073,7 @@
                 <a:ea typeface="Arial" pitchFamily="34" charset="-122"/>
                 <a:cs typeface="Arial" pitchFamily="34" charset="-120"/>
               </a:rPr>
-              <a:t>s behave.</a:t>
+              <a:t>Printed copy of the day-clock for each student</a:t>
             </a:r>
             <a:endParaRPr lang="en-US" sz="1200" dirty="0"/>
           </a:p>
@@ -4331,7 +8231,7 @@
                 <a:ea typeface="Georgia" pitchFamily="34" charset="-122"/>
                 <a:cs typeface="Georgia" pitchFamily="34" charset="-120"/>
               </a:rPr>
-              <a:t>Lesson flow</a:t>
+              <a:t>Vocabulary introduced today</a:t>
             </a:r>
             <a:endParaRPr lang="en-US" sz="1800" dirty="0"/>
           </a:p>
@@ -4340,6 +8240,112 @@
       <p:sp>
         <p:nvSpPr>
           <p:cNvPr id="4" name="Text 2"/>
+          <p:cNvSpPr/>
+          <p:nvPr/>
+        </p:nvSpPr>
+        <p:spPr>
+          <a:xfrm>
+            <a:off x="634901" y="883593"/>
+            <a:ext cx="8102798" cy="281880"/>
+          </a:xfrm>
+          <a:prstGeom prst="rect">
+            <a:avLst/>
+          </a:prstGeom>
+          <a:noFill/>
+          <a:ln/>
+        </p:spPr>
+        <p:txBody>
+          <a:bodyPr wrap="square" lIns="0" tIns="0" rIns="0" bIns="0" rtlCol="0" anchor="t"/>
+          <a:lstStyle/>
+          <a:p>
+            <a:pPr algn="l" marL="342900" indent="-342900">
+              <a:lnSpc>
+                <a:spcPts val="1620"/>
+              </a:lnSpc>
+              <a:spcAft>
+                <a:spcPts val="300"/>
+              </a:spcAft>
+              <a:buSzPct val="100000"/>
+              <a:buChar char="•"/>
+            </a:pPr>
+            <a:r>
+              <a:rPr lang="en-US" sz="1200" i="1" dirty="0">
+                <a:solidFill>
+                  <a:srgbClr val="1C2833"/>
+                </a:solidFill>
+                <a:latin typeface="Arial" pitchFamily="34" charset="0"/>
+                <a:ea typeface="Arial" pitchFamily="34" charset="-122"/>
+                <a:cs typeface="Arial" pitchFamily="34" charset="-120"/>
+              </a:rPr>
+              <a:t>kāla</a:t>
+            </a:r>
+            <a:pPr algn="l" indent="0" marL="0">
+              <a:lnSpc>
+                <a:spcPts val="1620"/>
+              </a:lnSpc>
+              <a:spcAft>
+                <a:spcPts val="300"/>
+              </a:spcAft>
+              <a:buNone/>
+            </a:pPr>
+            <a:r>
+              <a:rPr lang="en-US" sz="1200" dirty="0">
+                <a:solidFill>
+                  <a:srgbClr val="1C2833"/>
+                </a:solidFill>
+                <a:latin typeface="Arial" pitchFamily="34" charset="0"/>
+                <a:ea typeface="Arial" pitchFamily="34" charset="-122"/>
+                <a:cs typeface="Arial" pitchFamily="34" charset="-120"/>
+              </a:rPr>
+              <a:t> (IAST: kāla; lit. "time") — used in Ayurveda as "the time-of-day factor" in determining how the </a:t>
+            </a:r>
+            <a:pPr algn="l" indent="0" marL="0">
+              <a:lnSpc>
+                <a:spcPts val="1620"/>
+              </a:lnSpc>
+              <a:spcAft>
+                <a:spcPts val="300"/>
+              </a:spcAft>
+              <a:buNone/>
+            </a:pPr>
+            <a:r>
+              <a:rPr lang="en-US" sz="1200" i="1" dirty="0">
+                <a:solidFill>
+                  <a:srgbClr val="1C2833"/>
+                </a:solidFill>
+                <a:latin typeface="Arial" pitchFamily="34" charset="0"/>
+                <a:ea typeface="Arial" pitchFamily="34" charset="-122"/>
+                <a:cs typeface="Arial" pitchFamily="34" charset="-120"/>
+              </a:rPr>
+              <a:t>doṣa</a:t>
+            </a:r>
+            <a:pPr algn="l" indent="0" marL="0">
+              <a:lnSpc>
+                <a:spcPts val="1620"/>
+              </a:lnSpc>
+              <a:spcAft>
+                <a:spcPts val="300"/>
+              </a:spcAft>
+              <a:buNone/>
+            </a:pPr>
+            <a:r>
+              <a:rPr lang="en-US" sz="1200" dirty="0">
+                <a:solidFill>
+                  <a:srgbClr val="1C2833"/>
+                </a:solidFill>
+                <a:latin typeface="Arial" pitchFamily="34" charset="0"/>
+                <a:ea typeface="Arial" pitchFamily="34" charset="-122"/>
+                <a:cs typeface="Arial" pitchFamily="34" charset="-120"/>
+              </a:rPr>
+              <a:t>s behave.</a:t>
+            </a:r>
+            <a:endParaRPr lang="en-US" sz="1200" dirty="0"/>
+          </a:p>
+        </p:txBody>
+      </p:sp>
+      <p:sp>
+        <p:nvSpPr>
+          <p:cNvPr id="5" name="Text 3"/>
           <p:cNvSpPr/>
           <p:nvPr/>
         </p:nvSpPr>
@@ -4489,7 +8495,7 @@
                 <a:ea typeface="Georgia" pitchFamily="34" charset="-122"/>
                 <a:cs typeface="Georgia" pitchFamily="34" charset="-120"/>
               </a:rPr>
-              <a:t>Warm-up (5 min)</a:t>
+              <a:t>Lesson flow</a:t>
             </a:r>
             <a:endParaRPr lang="en-US" sz="1800" dirty="0"/>
           </a:p>
@@ -4498,120 +8504,6 @@
       <p:sp>
         <p:nvSpPr>
           <p:cNvPr id="4" name="Text 2"/>
-          <p:cNvSpPr/>
-          <p:nvPr/>
-        </p:nvSpPr>
-        <p:spPr>
-          <a:xfrm>
-            <a:off x="634901" y="883593"/>
-            <a:ext cx="8102798" cy="769441"/>
-          </a:xfrm>
-          <a:prstGeom prst="rect">
-            <a:avLst/>
-          </a:prstGeom>
-          <a:noFill/>
-          <a:ln/>
-        </p:spPr>
-        <p:txBody>
-          <a:bodyPr wrap="square" lIns="0" tIns="0" rIns="0" bIns="0" rtlCol="0" anchor="t"/>
-          <a:lstStyle/>
-          <a:p>
-            <a:pPr algn="l" marL="342900" indent="-342900">
-              <a:lnSpc>
-                <a:spcPts val="1620"/>
-              </a:lnSpc>
-              <a:spcAft>
-                <a:spcPts val="300"/>
-              </a:spcAft>
-              <a:buSzPct val="100000"/>
-              <a:buChar char="•"/>
-            </a:pPr>
-            <a:r>
-              <a:rPr lang="en-US" sz="1200" i="1" dirty="0">
-                <a:solidFill>
-                  <a:srgbClr val="1C2833"/>
-                </a:solidFill>
-                <a:latin typeface="Arial" pitchFamily="34" charset="0"/>
-                <a:ea typeface="Arial" pitchFamily="34" charset="-122"/>
-                <a:cs typeface="Arial" pitchFamily="34" charset="-120"/>
-              </a:rPr>
-              <a:t>"At what time of day do you feel most alert?"</a:t>
-            </a:r>
-            <a:pPr algn="l" indent="0" marL="0">
-              <a:lnSpc>
-                <a:spcPts val="1620"/>
-              </a:lnSpc>
-              <a:spcAft>
-                <a:spcPts val="300"/>
-              </a:spcAft>
-              <a:buNone/>
-            </a:pPr>
-            <a:r>
-              <a:rPr lang="en-US" sz="1200" dirty="0">
-                <a:solidFill>
-                  <a:srgbClr val="1C2833"/>
-                </a:solidFill>
-                <a:latin typeface="Arial" pitchFamily="34" charset="0"/>
-                <a:ea typeface="Arial" pitchFamily="34" charset="-122"/>
-                <a:cs typeface="Arial" pitchFamily="34" charset="-120"/>
-              </a:rPr>
-              <a:t> — quick show of hands.</a:t>
-            </a:r>
-            <a:endParaRPr lang="en-US" sz="1200" dirty="0"/>
-          </a:p>
-          <a:p>
-            <a:pPr algn="l" marL="342900" indent="-342900">
-              <a:lnSpc>
-                <a:spcPts val="1620"/>
-              </a:lnSpc>
-              <a:spcAft>
-                <a:spcPts val="300"/>
-              </a:spcAft>
-              <a:buSzPct val="100000"/>
-              <a:buChar char="•"/>
-            </a:pPr>
-            <a:r>
-              <a:rPr lang="en-US" sz="1200" i="1" dirty="0">
-                <a:solidFill>
-                  <a:srgbClr val="1C2833"/>
-                </a:solidFill>
-                <a:latin typeface="Arial" pitchFamily="34" charset="0"/>
-                <a:ea typeface="Arial" pitchFamily="34" charset="-122"/>
-                <a:cs typeface="Arial" pitchFamily="34" charset="-120"/>
-              </a:rPr>
-              <a:t>"At what time do you feel most slow / sleepy?"</a:t>
-            </a:r>
-            <a:endParaRPr lang="en-US" sz="1200" dirty="0"/>
-          </a:p>
-          <a:p>
-            <a:pPr algn="l" marL="342900" indent="-342900">
-              <a:lnSpc>
-                <a:spcPts val="1620"/>
-              </a:lnSpc>
-              <a:spcAft>
-                <a:spcPts val="300"/>
-              </a:spcAft>
-              <a:buSzPct val="100000"/>
-              <a:buChar char="•"/>
-            </a:pPr>
-            <a:r>
-              <a:rPr lang="en-US" sz="1200" i="1" dirty="0">
-                <a:solidFill>
-                  <a:srgbClr val="1C2833"/>
-                </a:solidFill>
-                <a:latin typeface="Arial" pitchFamily="34" charset="0"/>
-                <a:ea typeface="Arial" pitchFamily="34" charset="-122"/>
-                <a:cs typeface="Arial" pitchFamily="34" charset="-120"/>
-              </a:rPr>
-              <a:t>"Today we ask: is this random, or is there a pattern?"</a:t>
-            </a:r>
-            <a:endParaRPr lang="en-US" sz="1200" dirty="0"/>
-          </a:p>
-        </p:txBody>
-      </p:sp>
-      <p:sp>
-        <p:nvSpPr>
-          <p:cNvPr id="5" name="Text 3"/>
           <p:cNvSpPr/>
           <p:nvPr/>
         </p:nvSpPr>
@@ -4761,7 +8653,7 @@
                 <a:ea typeface="Georgia" pitchFamily="34" charset="-122"/>
                 <a:cs typeface="Georgia" pitchFamily="34" charset="-120"/>
               </a:rPr>
-              <a:t>Core (20 min)</a:t>
+              <a:t>Warm-up (5 min)</a:t>
             </a:r>
             <a:endParaRPr lang="en-US" sz="1800" dirty="0"/>
           </a:p>
@@ -4776,7 +8668,7 @@
         <p:spPr>
           <a:xfrm>
             <a:off x="634901" y="883593"/>
-            <a:ext cx="8102798" cy="487561"/>
+            <a:ext cx="8102798" cy="769441"/>
           </a:xfrm>
           <a:prstGeom prst="rect">
             <a:avLst/>
@@ -4799,15 +8691,15 @@
               <a:buChar char="•"/>
             </a:pPr>
             <a:r>
-              <a:rPr lang="en-US" sz="1200" b="1" dirty="0">
-                <a:solidFill>
-                  <a:srgbClr val="1C2833"/>
-                </a:solidFill>
-                <a:latin typeface="Arial" pitchFamily="34" charset="0"/>
-                <a:ea typeface="Arial" pitchFamily="34" charset="-122"/>
-                <a:cs typeface="Arial" pitchFamily="34" charset="-120"/>
-              </a:rPr>
-              <a:t>Build the clock on the board.</a:t>
+              <a:rPr lang="en-US" sz="1200" i="1" dirty="0">
+                <a:solidFill>
+                  <a:srgbClr val="1C2833"/>
+                </a:solidFill>
+                <a:latin typeface="Arial" pitchFamily="34" charset="0"/>
+                <a:ea typeface="Arial" pitchFamily="34" charset="-122"/>
+                <a:cs typeface="Arial" pitchFamily="34" charset="-120"/>
+              </a:rPr>
+              <a:t>"At what time of day do you feel most alert?"</a:t>
             </a:r>
             <a:pPr algn="l" indent="0" marL="0">
               <a:lnSpc>
@@ -4827,16 +8719,20 @@
                 <a:ea typeface="Arial" pitchFamily="34" charset="-122"/>
                 <a:cs typeface="Arial" pitchFamily="34" charset="-120"/>
               </a:rPr>
-              <a:t> Draw a 24-hour clock face. Divide into six 4-hour wedges. Label each with start-end time. Then assign each window its dominant </a:t>
-            </a:r>
-            <a:pPr algn="l" indent="0" marL="0">
-              <a:lnSpc>
-                <a:spcPts val="1620"/>
-              </a:lnSpc>
-              <a:spcAft>
-                <a:spcPts val="300"/>
-              </a:spcAft>
-              <a:buNone/>
+              <a:t> — quick show of hands.</a:t>
+            </a:r>
+            <a:endParaRPr lang="en-US" sz="1200" dirty="0"/>
+          </a:p>
+          <a:p>
+            <a:pPr algn="l" marL="342900" indent="-342900">
+              <a:lnSpc>
+                <a:spcPts val="1620"/>
+              </a:lnSpc>
+              <a:spcAft>
+                <a:spcPts val="300"/>
+              </a:spcAft>
+              <a:buSzPct val="100000"/>
+              <a:buChar char="•"/>
             </a:pPr>
             <a:r>
               <a:rPr lang="en-US" sz="1200" i="1" dirty="0">
@@ -4847,27 +8743,31 @@
                 <a:ea typeface="Arial" pitchFamily="34" charset="-122"/>
                 <a:cs typeface="Arial" pitchFamily="34" charset="-120"/>
               </a:rPr>
-              <a:t>doṣa</a:t>
-            </a:r>
-            <a:pPr algn="l" indent="0" marL="0">
-              <a:lnSpc>
-                <a:spcPts val="1620"/>
-              </a:lnSpc>
-              <a:spcAft>
-                <a:spcPts val="300"/>
-              </a:spcAft>
-              <a:buNone/>
-            </a:pPr>
-            <a:r>
-              <a:rPr lang="en-US" sz="1200" dirty="0">
-                <a:solidFill>
-                  <a:srgbClr val="1C2833"/>
-                </a:solidFill>
-                <a:latin typeface="Arial" pitchFamily="34" charset="0"/>
-                <a:ea typeface="Arial" pitchFamily="34" charset="-122"/>
-                <a:cs typeface="Arial" pitchFamily="34" charset="-120"/>
-              </a:rPr>
-              <a:t> (colour-coded):</a:t>
+              <a:t>"At what time do you feel most slow / sleepy?"</a:t>
+            </a:r>
+            <a:endParaRPr lang="en-US" sz="1200" dirty="0"/>
+          </a:p>
+          <a:p>
+            <a:pPr algn="l" marL="342900" indent="-342900">
+              <a:lnSpc>
+                <a:spcPts val="1620"/>
+              </a:lnSpc>
+              <a:spcAft>
+                <a:spcPts val="300"/>
+              </a:spcAft>
+              <a:buSzPct val="100000"/>
+              <a:buChar char="•"/>
+            </a:pPr>
+            <a:r>
+              <a:rPr lang="en-US" sz="1200" i="1" dirty="0">
+                <a:solidFill>
+                  <a:srgbClr val="1C2833"/>
+                </a:solidFill>
+                <a:latin typeface="Arial" pitchFamily="34" charset="0"/>
+                <a:ea typeface="Arial" pitchFamily="34" charset="-122"/>
+                <a:cs typeface="Arial" pitchFamily="34" charset="-120"/>
+              </a:rPr>
+              <a:t>"Today we ask: is this random, or is there a pattern?"</a:t>
             </a:r>
             <a:endParaRPr lang="en-US" sz="1200" dirty="0"/>
           </a:p>
@@ -4881,1436 +8781,7 @@
         </p:nvSpPr>
         <p:spPr>
           <a:xfrm>
-            <a:off x="406301" y="1460004"/>
-            <a:ext cx="8498026" cy="213271"/>
-          </a:xfrm>
-          <a:prstGeom prst="rect">
-            <a:avLst/>
-          </a:prstGeom>
-          <a:noFill/>
-          <a:ln/>
-        </p:spPr>
-        <p:txBody>
-          <a:bodyPr wrap="square" lIns="0" tIns="0" rIns="0" bIns="0" rtlCol="0" anchor="t"/>
-          <a:lstStyle/>
-          <a:p>
-            <a:pPr algn="l" indent="0" marL="0">
-              <a:lnSpc>
-                <a:spcPts val="1680"/>
-              </a:lnSpc>
-              <a:spcBef>
-                <a:spcPts val="300"/>
-              </a:spcBef>
-              <a:spcAft>
-                <a:spcPts val="300"/>
-              </a:spcAft>
-              <a:buNone/>
-            </a:pPr>
-            <a:r>
-              <a:rPr lang="en-US" sz="1200" i="1" dirty="0">
-                <a:solidFill>
-                  <a:srgbClr val="1C2833"/>
-                </a:solidFill>
-                <a:latin typeface="Arial" pitchFamily="34" charset="0"/>
-                <a:ea typeface="Arial" pitchFamily="34" charset="-122"/>
-                <a:cs typeface="Arial" pitchFamily="34" charset="-120"/>
-              </a:rPr>
-              <a:t>Each row: Window · Time · Dominant doṣa · Why.</a:t>
-            </a:r>
-            <a:endParaRPr lang="en-US" sz="1200" dirty="0"/>
-          </a:p>
-        </p:txBody>
-      </p:sp>
-      <p:sp>
-        <p:nvSpPr>
-          <p:cNvPr id="6" name="Text 4"/>
-          <p:cNvSpPr/>
-          <p:nvPr/>
-        </p:nvSpPr>
-        <p:spPr>
-          <a:xfrm>
-            <a:off x="634901" y="1762125"/>
-            <a:ext cx="8102798" cy="1706463"/>
-          </a:xfrm>
-          <a:prstGeom prst="rect">
-            <a:avLst/>
-          </a:prstGeom>
-          <a:noFill/>
-          <a:ln/>
-        </p:spPr>
-        <p:txBody>
-          <a:bodyPr wrap="square" lIns="0" tIns="0" rIns="0" bIns="0" rtlCol="0" anchor="t"/>
-          <a:lstStyle/>
-          <a:p>
-            <a:pPr algn="l" marL="342900" indent="-342900">
-              <a:lnSpc>
-                <a:spcPts val="1620"/>
-              </a:lnSpc>
-              <a:spcAft>
-                <a:spcPts val="300"/>
-              </a:spcAft>
-              <a:buSzPct val="100000"/>
-              <a:buChar char="•"/>
-            </a:pPr>
-            <a:r>
-              <a:rPr lang="en-US" sz="1200" b="1" dirty="0">
-                <a:solidFill>
-                  <a:srgbClr val="1C2833"/>
-                </a:solidFill>
-                <a:latin typeface="Arial" pitchFamily="34" charset="0"/>
-                <a:ea typeface="Arial" pitchFamily="34" charset="-122"/>
-                <a:cs typeface="Arial" pitchFamily="34" charset="-120"/>
-              </a:rPr>
-              <a:t>1</a:t>
-            </a:r>
-            <a:pPr algn="l" indent="0" marL="0">
-              <a:lnSpc>
-                <a:spcPts val="1620"/>
-              </a:lnSpc>
-              <a:spcAft>
-                <a:spcPts val="300"/>
-              </a:spcAft>
-              <a:buNone/>
-            </a:pPr>
-            <a:r>
-              <a:rPr lang="en-US" sz="1200" dirty="0">
-                <a:solidFill>
-                  <a:srgbClr val="1C2833"/>
-                </a:solidFill>
-                <a:latin typeface="Arial" pitchFamily="34" charset="0"/>
-                <a:ea typeface="Arial" pitchFamily="34" charset="-122"/>
-                <a:cs typeface="Arial" pitchFamily="34" charset="-120"/>
-              </a:rPr>
-              <a:t> — 6 am – 10 am · </a:t>
-            </a:r>
-            <a:pPr algn="l" indent="0" marL="0">
-              <a:lnSpc>
-                <a:spcPts val="1620"/>
-              </a:lnSpc>
-              <a:spcAft>
-                <a:spcPts val="300"/>
-              </a:spcAft>
-              <a:buNone/>
-            </a:pPr>
-            <a:r>
-              <a:rPr lang="en-US" sz="1200" i="1" dirty="0">
-                <a:solidFill>
-                  <a:srgbClr val="1C2833"/>
-                </a:solidFill>
-                <a:latin typeface="Arial" pitchFamily="34" charset="0"/>
-                <a:ea typeface="Arial" pitchFamily="34" charset="-122"/>
-                <a:cs typeface="Arial" pitchFamily="34" charset="-120"/>
-              </a:rPr>
-              <a:t>kapha</a:t>
-            </a:r>
-            <a:pPr algn="l" indent="0" marL="0">
-              <a:lnSpc>
-                <a:spcPts val="1620"/>
-              </a:lnSpc>
-              <a:spcAft>
-                <a:spcPts val="300"/>
-              </a:spcAft>
-              <a:buNone/>
-            </a:pPr>
-            <a:r>
-              <a:rPr lang="en-US" sz="1200" dirty="0">
-                <a:solidFill>
-                  <a:srgbClr val="1C2833"/>
-                </a:solidFill>
-                <a:latin typeface="Arial" pitchFamily="34" charset="0"/>
-                <a:ea typeface="Arial" pitchFamily="34" charset="-122"/>
-                <a:cs typeface="Arial" pitchFamily="34" charset="-120"/>
-              </a:rPr>
-              <a:t> · Body is heavy, slow to start — heavy mucus, deep tissue. Best for solid breakfast, mild exercise.</a:t>
-            </a:r>
-            <a:endParaRPr lang="en-US" sz="1200" dirty="0"/>
-          </a:p>
-          <a:p>
-            <a:pPr algn="l" marL="342900" indent="-342900">
-              <a:lnSpc>
-                <a:spcPts val="1620"/>
-              </a:lnSpc>
-              <a:spcAft>
-                <a:spcPts val="300"/>
-              </a:spcAft>
-              <a:buSzPct val="100000"/>
-              <a:buChar char="•"/>
-            </a:pPr>
-            <a:r>
-              <a:rPr lang="en-US" sz="1200" b="1" dirty="0">
-                <a:solidFill>
-                  <a:srgbClr val="1C2833"/>
-                </a:solidFill>
-                <a:latin typeface="Arial" pitchFamily="34" charset="0"/>
-                <a:ea typeface="Arial" pitchFamily="34" charset="-122"/>
-                <a:cs typeface="Arial" pitchFamily="34" charset="-120"/>
-              </a:rPr>
-              <a:t>2</a:t>
-            </a:r>
-            <a:pPr algn="l" indent="0" marL="0">
-              <a:lnSpc>
-                <a:spcPts val="1620"/>
-              </a:lnSpc>
-              <a:spcAft>
-                <a:spcPts val="300"/>
-              </a:spcAft>
-              <a:buNone/>
-            </a:pPr>
-            <a:r>
-              <a:rPr lang="en-US" sz="1200" dirty="0">
-                <a:solidFill>
-                  <a:srgbClr val="1C2833"/>
-                </a:solidFill>
-                <a:latin typeface="Arial" pitchFamily="34" charset="0"/>
-                <a:ea typeface="Arial" pitchFamily="34" charset="-122"/>
-                <a:cs typeface="Arial" pitchFamily="34" charset="-120"/>
-              </a:rPr>
-              <a:t> — 10 am – 2 pm · </a:t>
-            </a:r>
-            <a:pPr algn="l" indent="0" marL="0">
-              <a:lnSpc>
-                <a:spcPts val="1620"/>
-              </a:lnSpc>
-              <a:spcAft>
-                <a:spcPts val="300"/>
-              </a:spcAft>
-              <a:buNone/>
-            </a:pPr>
-            <a:r>
-              <a:rPr lang="en-US" sz="1200" i="1" dirty="0">
-                <a:solidFill>
-                  <a:srgbClr val="1C2833"/>
-                </a:solidFill>
-                <a:latin typeface="Arial" pitchFamily="34" charset="0"/>
-                <a:ea typeface="Arial" pitchFamily="34" charset="-122"/>
-                <a:cs typeface="Arial" pitchFamily="34" charset="-120"/>
-              </a:rPr>
-              <a:t>pitta</a:t>
-            </a:r>
-            <a:pPr algn="l" indent="0" marL="0">
-              <a:lnSpc>
-                <a:spcPts val="1620"/>
-              </a:lnSpc>
-              <a:spcAft>
-                <a:spcPts val="300"/>
-              </a:spcAft>
-              <a:buNone/>
-            </a:pPr>
-            <a:r>
-              <a:rPr lang="en-US" sz="1200" dirty="0">
-                <a:solidFill>
-                  <a:srgbClr val="1C2833"/>
-                </a:solidFill>
-                <a:latin typeface="Arial" pitchFamily="34" charset="0"/>
-                <a:ea typeface="Arial" pitchFamily="34" charset="-122"/>
-                <a:cs typeface="Arial" pitchFamily="34" charset="-120"/>
-              </a:rPr>
-              <a:t> · Digestive fire peaks at noon. Best for the main meal of the day.</a:t>
-            </a:r>
-            <a:endParaRPr lang="en-US" sz="1200" dirty="0"/>
-          </a:p>
-          <a:p>
-            <a:pPr algn="l" marL="342900" indent="-342900">
-              <a:lnSpc>
-                <a:spcPts val="1620"/>
-              </a:lnSpc>
-              <a:spcAft>
-                <a:spcPts val="300"/>
-              </a:spcAft>
-              <a:buSzPct val="100000"/>
-              <a:buChar char="•"/>
-            </a:pPr>
-            <a:r>
-              <a:rPr lang="en-US" sz="1200" b="1" dirty="0">
-                <a:solidFill>
-                  <a:srgbClr val="1C2833"/>
-                </a:solidFill>
-                <a:latin typeface="Arial" pitchFamily="34" charset="0"/>
-                <a:ea typeface="Arial" pitchFamily="34" charset="-122"/>
-                <a:cs typeface="Arial" pitchFamily="34" charset="-120"/>
-              </a:rPr>
-              <a:t>3</a:t>
-            </a:r>
-            <a:pPr algn="l" indent="0" marL="0">
-              <a:lnSpc>
-                <a:spcPts val="1620"/>
-              </a:lnSpc>
-              <a:spcAft>
-                <a:spcPts val="300"/>
-              </a:spcAft>
-              <a:buNone/>
-            </a:pPr>
-            <a:r>
-              <a:rPr lang="en-US" sz="1200" dirty="0">
-                <a:solidFill>
-                  <a:srgbClr val="1C2833"/>
-                </a:solidFill>
-                <a:latin typeface="Arial" pitchFamily="34" charset="0"/>
-                <a:ea typeface="Arial" pitchFamily="34" charset="-122"/>
-                <a:cs typeface="Arial" pitchFamily="34" charset="-120"/>
-              </a:rPr>
-              <a:t> — 2 pm – 6 pm · </a:t>
-            </a:r>
-            <a:pPr algn="l" indent="0" marL="0">
-              <a:lnSpc>
-                <a:spcPts val="1620"/>
-              </a:lnSpc>
-              <a:spcAft>
-                <a:spcPts val="300"/>
-              </a:spcAft>
-              <a:buNone/>
-            </a:pPr>
-            <a:r>
-              <a:rPr lang="en-US" sz="1200" i="1" dirty="0">
-                <a:solidFill>
-                  <a:srgbClr val="1C2833"/>
-                </a:solidFill>
-                <a:latin typeface="Arial" pitchFamily="34" charset="0"/>
-                <a:ea typeface="Arial" pitchFamily="34" charset="-122"/>
-                <a:cs typeface="Arial" pitchFamily="34" charset="-120"/>
-              </a:rPr>
-              <a:t>vāta</a:t>
-            </a:r>
-            <a:pPr algn="l" indent="0" marL="0">
-              <a:lnSpc>
-                <a:spcPts val="1620"/>
-              </a:lnSpc>
-              <a:spcAft>
-                <a:spcPts val="300"/>
-              </a:spcAft>
-              <a:buNone/>
-            </a:pPr>
-            <a:r>
-              <a:rPr lang="en-US" sz="1200" dirty="0">
-                <a:solidFill>
-                  <a:srgbClr val="1C2833"/>
-                </a:solidFill>
-                <a:latin typeface="Arial" pitchFamily="34" charset="0"/>
-                <a:ea typeface="Arial" pitchFamily="34" charset="-122"/>
-                <a:cs typeface="Arial" pitchFamily="34" charset="-120"/>
-              </a:rPr>
-              <a:t> · Energy is bursty, mind active, body lighter. Best for focused work, short snacks.</a:t>
-            </a:r>
-            <a:endParaRPr lang="en-US" sz="1200" dirty="0"/>
-          </a:p>
-          <a:p>
-            <a:pPr algn="l" marL="342900" indent="-342900">
-              <a:lnSpc>
-                <a:spcPts val="1620"/>
-              </a:lnSpc>
-              <a:spcAft>
-                <a:spcPts val="300"/>
-              </a:spcAft>
-              <a:buSzPct val="100000"/>
-              <a:buChar char="•"/>
-            </a:pPr>
-            <a:r>
-              <a:rPr lang="en-US" sz="1200" b="1" dirty="0">
-                <a:solidFill>
-                  <a:srgbClr val="1C2833"/>
-                </a:solidFill>
-                <a:latin typeface="Arial" pitchFamily="34" charset="0"/>
-                <a:ea typeface="Arial" pitchFamily="34" charset="-122"/>
-                <a:cs typeface="Arial" pitchFamily="34" charset="-120"/>
-              </a:rPr>
-              <a:t>4</a:t>
-            </a:r>
-            <a:pPr algn="l" indent="0" marL="0">
-              <a:lnSpc>
-                <a:spcPts val="1620"/>
-              </a:lnSpc>
-              <a:spcAft>
-                <a:spcPts val="300"/>
-              </a:spcAft>
-              <a:buNone/>
-            </a:pPr>
-            <a:r>
-              <a:rPr lang="en-US" sz="1200" dirty="0">
-                <a:solidFill>
-                  <a:srgbClr val="1C2833"/>
-                </a:solidFill>
-                <a:latin typeface="Arial" pitchFamily="34" charset="0"/>
-                <a:ea typeface="Arial" pitchFamily="34" charset="-122"/>
-                <a:cs typeface="Arial" pitchFamily="34" charset="-120"/>
-              </a:rPr>
-              <a:t> — 6 pm – 10 pm · </a:t>
-            </a:r>
-            <a:pPr algn="l" indent="0" marL="0">
-              <a:lnSpc>
-                <a:spcPts val="1620"/>
-              </a:lnSpc>
-              <a:spcAft>
-                <a:spcPts val="300"/>
-              </a:spcAft>
-              <a:buNone/>
-            </a:pPr>
-            <a:r>
-              <a:rPr lang="en-US" sz="1200" i="1" dirty="0">
-                <a:solidFill>
-                  <a:srgbClr val="1C2833"/>
-                </a:solidFill>
-                <a:latin typeface="Arial" pitchFamily="34" charset="0"/>
-                <a:ea typeface="Arial" pitchFamily="34" charset="-122"/>
-                <a:cs typeface="Arial" pitchFamily="34" charset="-120"/>
-              </a:rPr>
-              <a:t>kapha</a:t>
-            </a:r>
-            <a:pPr algn="l" indent="0" marL="0">
-              <a:lnSpc>
-                <a:spcPts val="1620"/>
-              </a:lnSpc>
-              <a:spcAft>
-                <a:spcPts val="300"/>
-              </a:spcAft>
-              <a:buNone/>
-            </a:pPr>
-            <a:r>
-              <a:rPr lang="en-US" sz="1200" dirty="0">
-                <a:solidFill>
-                  <a:srgbClr val="1C2833"/>
-                </a:solidFill>
-                <a:latin typeface="Arial" pitchFamily="34" charset="0"/>
-                <a:ea typeface="Arial" pitchFamily="34" charset="-122"/>
-                <a:cs typeface="Arial" pitchFamily="34" charset="-120"/>
-              </a:rPr>
-              <a:t> · Body slows for sleep. Best for light dinner, calming activity.</a:t>
-            </a:r>
-            <a:endParaRPr lang="en-US" sz="1200" dirty="0"/>
-          </a:p>
-          <a:p>
-            <a:pPr algn="l" marL="342900" indent="-342900">
-              <a:lnSpc>
-                <a:spcPts val="1620"/>
-              </a:lnSpc>
-              <a:spcAft>
-                <a:spcPts val="300"/>
-              </a:spcAft>
-              <a:buSzPct val="100000"/>
-              <a:buChar char="•"/>
-            </a:pPr>
-            <a:r>
-              <a:rPr lang="en-US" sz="1200" b="1" dirty="0">
-                <a:solidFill>
-                  <a:srgbClr val="1C2833"/>
-                </a:solidFill>
-                <a:latin typeface="Arial" pitchFamily="34" charset="0"/>
-                <a:ea typeface="Arial" pitchFamily="34" charset="-122"/>
-                <a:cs typeface="Arial" pitchFamily="34" charset="-120"/>
-              </a:rPr>
-              <a:t>5</a:t>
-            </a:r>
-            <a:pPr algn="l" indent="0" marL="0">
-              <a:lnSpc>
-                <a:spcPts val="1620"/>
-              </a:lnSpc>
-              <a:spcAft>
-                <a:spcPts val="300"/>
-              </a:spcAft>
-              <a:buNone/>
-            </a:pPr>
-            <a:r>
-              <a:rPr lang="en-US" sz="1200" dirty="0">
-                <a:solidFill>
-                  <a:srgbClr val="1C2833"/>
-                </a:solidFill>
-                <a:latin typeface="Arial" pitchFamily="34" charset="0"/>
-                <a:ea typeface="Arial" pitchFamily="34" charset="-122"/>
-                <a:cs typeface="Arial" pitchFamily="34" charset="-120"/>
-              </a:rPr>
-              <a:t> — 10 pm – 2 am · </a:t>
-            </a:r>
-            <a:pPr algn="l" indent="0" marL="0">
-              <a:lnSpc>
-                <a:spcPts val="1620"/>
-              </a:lnSpc>
-              <a:spcAft>
-                <a:spcPts val="300"/>
-              </a:spcAft>
-              <a:buNone/>
-            </a:pPr>
-            <a:r>
-              <a:rPr lang="en-US" sz="1200" i="1" dirty="0">
-                <a:solidFill>
-                  <a:srgbClr val="1C2833"/>
-                </a:solidFill>
-                <a:latin typeface="Arial" pitchFamily="34" charset="0"/>
-                <a:ea typeface="Arial" pitchFamily="34" charset="-122"/>
-                <a:cs typeface="Arial" pitchFamily="34" charset="-120"/>
-              </a:rPr>
-              <a:t>pitta</a:t>
-            </a:r>
-            <a:pPr algn="l" indent="0" marL="0">
-              <a:lnSpc>
-                <a:spcPts val="1620"/>
-              </a:lnSpc>
-              <a:spcAft>
-                <a:spcPts val="300"/>
-              </a:spcAft>
-              <a:buNone/>
-            </a:pPr>
-            <a:r>
-              <a:rPr lang="en-US" sz="1200" dirty="0">
-                <a:solidFill>
-                  <a:srgbClr val="1C2833"/>
-                </a:solidFill>
-                <a:latin typeface="Arial" pitchFamily="34" charset="0"/>
-                <a:ea typeface="Arial" pitchFamily="34" charset="-122"/>
-                <a:cs typeface="Arial" pitchFamily="34" charset="-120"/>
-              </a:rPr>
-              <a:t> · Body's deep repair (liver, metabolism). Best for actual sleep — don't snack now.</a:t>
-            </a:r>
-            <a:endParaRPr lang="en-US" sz="1200" dirty="0"/>
-          </a:p>
-          <a:p>
-            <a:pPr algn="l" marL="342900" indent="-342900">
-              <a:lnSpc>
-                <a:spcPts val="1620"/>
-              </a:lnSpc>
-              <a:spcAft>
-                <a:spcPts val="300"/>
-              </a:spcAft>
-              <a:buSzPct val="100000"/>
-              <a:buChar char="•"/>
-            </a:pPr>
-            <a:r>
-              <a:rPr lang="en-US" sz="1200" b="1" dirty="0">
-                <a:solidFill>
-                  <a:srgbClr val="1C2833"/>
-                </a:solidFill>
-                <a:latin typeface="Arial" pitchFamily="34" charset="0"/>
-                <a:ea typeface="Arial" pitchFamily="34" charset="-122"/>
-                <a:cs typeface="Arial" pitchFamily="34" charset="-120"/>
-              </a:rPr>
-              <a:t>6</a:t>
-            </a:r>
-            <a:pPr algn="l" indent="0" marL="0">
-              <a:lnSpc>
-                <a:spcPts val="1620"/>
-              </a:lnSpc>
-              <a:spcAft>
-                <a:spcPts val="300"/>
-              </a:spcAft>
-              <a:buNone/>
-            </a:pPr>
-            <a:r>
-              <a:rPr lang="en-US" sz="1200" dirty="0">
-                <a:solidFill>
-                  <a:srgbClr val="1C2833"/>
-                </a:solidFill>
-                <a:latin typeface="Arial" pitchFamily="34" charset="0"/>
-                <a:ea typeface="Arial" pitchFamily="34" charset="-122"/>
-                <a:cs typeface="Arial" pitchFamily="34" charset="-120"/>
-              </a:rPr>
-              <a:t> — 2 am – 6 am · </a:t>
-            </a:r>
-            <a:pPr algn="l" indent="0" marL="0">
-              <a:lnSpc>
-                <a:spcPts val="1620"/>
-              </a:lnSpc>
-              <a:spcAft>
-                <a:spcPts val="300"/>
-              </a:spcAft>
-              <a:buNone/>
-            </a:pPr>
-            <a:r>
-              <a:rPr lang="en-US" sz="1200" i="1" dirty="0">
-                <a:solidFill>
-                  <a:srgbClr val="1C2833"/>
-                </a:solidFill>
-                <a:latin typeface="Arial" pitchFamily="34" charset="0"/>
-                <a:ea typeface="Arial" pitchFamily="34" charset="-122"/>
-                <a:cs typeface="Arial" pitchFamily="34" charset="-120"/>
-              </a:rPr>
-              <a:t>vāta</a:t>
-            </a:r>
-            <a:pPr algn="l" indent="0" marL="0">
-              <a:lnSpc>
-                <a:spcPts val="1620"/>
-              </a:lnSpc>
-              <a:spcAft>
-                <a:spcPts val="300"/>
-              </a:spcAft>
-              <a:buNone/>
-            </a:pPr>
-            <a:r>
-              <a:rPr lang="en-US" sz="1200" dirty="0">
-                <a:solidFill>
-                  <a:srgbClr val="1C2833"/>
-                </a:solidFill>
-                <a:latin typeface="Arial" pitchFamily="34" charset="0"/>
-                <a:ea typeface="Arial" pitchFamily="34" charset="-122"/>
-                <a:cs typeface="Arial" pitchFamily="34" charset="-120"/>
-              </a:rPr>
-              <a:t> · Light sleep, dreams; body cycles toward waking. Wake at end of window.</a:t>
-            </a:r>
-            <a:endParaRPr lang="en-US" sz="1200" dirty="0"/>
-          </a:p>
-        </p:txBody>
-      </p:sp>
-      <p:sp>
-        <p:nvSpPr>
-          <p:cNvPr id="7" name="Text 5"/>
-          <p:cNvSpPr/>
-          <p:nvPr/>
-        </p:nvSpPr>
-        <p:spPr>
-          <a:xfrm>
-            <a:off x="406301" y="3557439"/>
-            <a:ext cx="8498026" cy="213271"/>
-          </a:xfrm>
-          <a:prstGeom prst="rect">
-            <a:avLst/>
-          </a:prstGeom>
-          <a:noFill/>
-          <a:ln/>
-        </p:spPr>
-        <p:txBody>
-          <a:bodyPr wrap="square" lIns="0" tIns="0" rIns="0" bIns="0" rtlCol="0" anchor="t"/>
-          <a:lstStyle/>
-          <a:p>
-            <a:pPr algn="l" indent="0" marL="0">
-              <a:lnSpc>
-                <a:spcPts val="1680"/>
-              </a:lnSpc>
-              <a:spcBef>
-                <a:spcPts val="300"/>
-              </a:spcBef>
-              <a:spcAft>
-                <a:spcPts val="300"/>
-              </a:spcAft>
-              <a:buNone/>
-            </a:pPr>
-            <a:r>
-              <a:rPr lang="en-US" sz="1200" i="1" dirty="0">
-                <a:solidFill>
-                  <a:srgbClr val="1C2833"/>
-                </a:solidFill>
-                <a:latin typeface="Arial" pitchFamily="34" charset="0"/>
-                <a:ea typeface="Arial" pitchFamily="34" charset="-122"/>
-                <a:cs typeface="Arial" pitchFamily="34" charset="-120"/>
-              </a:rPr>
-              <a:t>"Each doṣa shows up twice — once during the day, once at night."</a:t>
-            </a:r>
-            <a:endParaRPr lang="en-US" sz="1200" dirty="0"/>
-          </a:p>
-        </p:txBody>
-      </p:sp>
-      <p:sp>
-        <p:nvSpPr>
-          <p:cNvPr id="8" name="Text 6"/>
-          <p:cNvSpPr/>
-          <p:nvPr/>
-        </p:nvSpPr>
-        <p:spPr>
-          <a:xfrm>
-            <a:off x="634901" y="3859560"/>
-            <a:ext cx="8102798" cy="281880"/>
-          </a:xfrm>
-          <a:prstGeom prst="rect">
-            <a:avLst/>
-          </a:prstGeom>
-          <a:noFill/>
-          <a:ln/>
-        </p:spPr>
-        <p:txBody>
-          <a:bodyPr wrap="square" lIns="0" tIns="0" rIns="0" bIns="0" rtlCol="0" anchor="t"/>
-          <a:lstStyle/>
-          <a:p>
-            <a:pPr algn="l" marL="342900" indent="-342900">
-              <a:lnSpc>
-                <a:spcPts val="1620"/>
-              </a:lnSpc>
-              <a:spcAft>
-                <a:spcPts val="300"/>
-              </a:spcAft>
-              <a:buSzPct val="100000"/>
-              <a:buChar char="•"/>
-            </a:pPr>
-            <a:r>
-              <a:rPr lang="en-US" sz="1200" b="1" dirty="0">
-                <a:solidFill>
-                  <a:srgbClr val="1C2833"/>
-                </a:solidFill>
-                <a:latin typeface="Arial" pitchFamily="34" charset="0"/>
-                <a:ea typeface="Arial" pitchFamily="34" charset="-122"/>
-                <a:cs typeface="Arial" pitchFamily="34" charset="-120"/>
-              </a:rPr>
-              <a:t>The classical principle.</a:t>
-            </a:r>
-            <a:pPr algn="l" indent="0" marL="0">
-              <a:lnSpc>
-                <a:spcPts val="1620"/>
-              </a:lnSpc>
-              <a:spcAft>
-                <a:spcPts val="300"/>
-              </a:spcAft>
-              <a:buNone/>
-            </a:pPr>
-            <a:r>
-              <a:rPr lang="en-US" sz="1200" dirty="0">
-                <a:solidFill>
-                  <a:srgbClr val="1C2833"/>
-                </a:solidFill>
-                <a:latin typeface="Arial" pitchFamily="34" charset="0"/>
-                <a:ea typeface="Arial" pitchFamily="34" charset="-122"/>
-                <a:cs typeface="Arial" pitchFamily="34" charset="-120"/>
-              </a:rPr>
-              <a:t> Source paraphrase:</a:t>
-            </a:r>
-            <a:endParaRPr lang="en-US" sz="1200" dirty="0"/>
-          </a:p>
-        </p:txBody>
-      </p:sp>
-      <p:sp>
-        <p:nvSpPr>
-          <p:cNvPr id="9" name="Text 7"/>
-          <p:cNvSpPr/>
-          <p:nvPr/>
-        </p:nvSpPr>
-        <p:spPr>
-          <a:xfrm>
-            <a:off x="406301" y="4230291"/>
-            <a:ext cx="8498026" cy="426541"/>
-          </a:xfrm>
-          <a:prstGeom prst="rect">
-            <a:avLst/>
-          </a:prstGeom>
-          <a:noFill/>
-          <a:ln/>
-        </p:spPr>
-        <p:txBody>
-          <a:bodyPr wrap="square" lIns="0" tIns="0" rIns="0" bIns="0" rtlCol="0" anchor="t"/>
-          <a:lstStyle/>
-          <a:p>
-            <a:pPr algn="l" indent="0" marL="0">
-              <a:lnSpc>
-                <a:spcPts val="1680"/>
-              </a:lnSpc>
-              <a:spcBef>
-                <a:spcPts val="300"/>
-              </a:spcBef>
-              <a:spcAft>
-                <a:spcPts val="300"/>
-              </a:spcAft>
-              <a:buNone/>
-            </a:pPr>
-            <a:r>
-              <a:rPr lang="en-US" sz="1200" dirty="0">
-                <a:solidFill>
-                  <a:srgbClr val="1C2833"/>
-                </a:solidFill>
-                <a:latin typeface="Arial" pitchFamily="34" charset="0"/>
-                <a:ea typeface="Arial" pitchFamily="34" charset="-122"/>
-                <a:cs typeface="Arial" pitchFamily="34" charset="-120"/>
-              </a:rPr>
-              <a:t>&gt; "The doṣas have their own times — kapha in the morning and early night, pitta at midday and midnight, vāta in the afternoon and pre-dawn." &gt; — paraphrased from Aṣṭāṅga Hṛdaya, </a:t>
-            </a:r>
-            <a:pPr algn="l" indent="0" marL="0">
-              <a:lnSpc>
-                <a:spcPts val="1680"/>
-              </a:lnSpc>
-              <a:spcBef>
-                <a:spcPts val="300"/>
-              </a:spcBef>
-              <a:spcAft>
-                <a:spcPts val="300"/>
-              </a:spcAft>
-              <a:buNone/>
-            </a:pPr>
-            <a:r>
-              <a:rPr lang="en-US" sz="1200" i="1" dirty="0">
-                <a:solidFill>
-                  <a:srgbClr val="1C2833"/>
-                </a:solidFill>
-                <a:latin typeface="Arial" pitchFamily="34" charset="0"/>
-                <a:ea typeface="Arial" pitchFamily="34" charset="-122"/>
-                <a:cs typeface="Arial" pitchFamily="34" charset="-120"/>
-              </a:rPr>
-              <a:t>Sūtrasthāna</a:t>
-            </a:r>
-            <a:pPr algn="l" indent="0" marL="0">
-              <a:lnSpc>
-                <a:spcPts val="1680"/>
-              </a:lnSpc>
-              <a:spcBef>
-                <a:spcPts val="300"/>
-              </a:spcBef>
-              <a:spcAft>
-                <a:spcPts val="300"/>
-              </a:spcAft>
-              <a:buNone/>
-            </a:pPr>
-            <a:r>
-              <a:rPr lang="en-US" sz="1200" dirty="0">
-                <a:solidFill>
-                  <a:srgbClr val="1C2833"/>
-                </a:solidFill>
-                <a:latin typeface="Arial" pitchFamily="34" charset="0"/>
-                <a:ea typeface="Arial" pitchFamily="34" charset="-122"/>
-                <a:cs typeface="Arial" pitchFamily="34" charset="-120"/>
-              </a:rPr>
-              <a:t> 1 (Vāgbhaṭa)</a:t>
-            </a:r>
-            <a:endParaRPr lang="en-US" sz="1200" dirty="0"/>
-          </a:p>
-        </p:txBody>
-      </p:sp>
-      <p:sp>
-        <p:nvSpPr>
-          <p:cNvPr id="10" name="Text 8"/>
-          <p:cNvSpPr/>
-          <p:nvPr/>
-        </p:nvSpPr>
-        <p:spPr>
-          <a:xfrm>
-            <a:off x="634901" y="4745682"/>
-            <a:ext cx="8102798" cy="281880"/>
-          </a:xfrm>
-          <a:prstGeom prst="rect">
-            <a:avLst/>
-          </a:prstGeom>
-          <a:noFill/>
-          <a:ln/>
-        </p:spPr>
-        <p:txBody>
-          <a:bodyPr wrap="square" lIns="0" tIns="0" rIns="0" bIns="0" rtlCol="0" anchor="t"/>
-          <a:lstStyle/>
-          <a:p>
-            <a:pPr algn="l" marL="342900" indent="-342900">
-              <a:lnSpc>
-                <a:spcPts val="1620"/>
-              </a:lnSpc>
-              <a:spcAft>
-                <a:spcPts val="300"/>
-              </a:spcAft>
-              <a:buSzPct val="100000"/>
-              <a:buChar char="•"/>
-            </a:pPr>
-            <a:r>
-              <a:rPr lang="en-US" sz="1200" b="1" dirty="0">
-                <a:solidFill>
-                  <a:srgbClr val="1C2833"/>
-                </a:solidFill>
-                <a:latin typeface="Arial" pitchFamily="34" charset="0"/>
-                <a:ea typeface="Arial" pitchFamily="34" charset="-122"/>
-                <a:cs typeface="Arial" pitchFamily="34" charset="-120"/>
-              </a:rPr>
-              <a:t>Why this matters in practice (Ayurveda's claim):</a:t>
-            </a:r>
-            <a:endParaRPr lang="en-US" sz="1200" dirty="0"/>
-          </a:p>
-        </p:txBody>
-      </p:sp>
-      <p:sp>
-        <p:nvSpPr>
-          <p:cNvPr id="11" name="Text 9"/>
-          <p:cNvSpPr/>
-          <p:nvPr/>
-        </p:nvSpPr>
-        <p:spPr>
-          <a:xfrm>
-            <a:off x="406301" y="5116413"/>
-            <a:ext cx="8498026" cy="853083"/>
-          </a:xfrm>
-          <a:prstGeom prst="rect">
-            <a:avLst/>
-          </a:prstGeom>
-          <a:noFill/>
-          <a:ln/>
-        </p:spPr>
-        <p:txBody>
-          <a:bodyPr wrap="square" lIns="0" tIns="0" rIns="0" bIns="0" rtlCol="0" anchor="t"/>
-          <a:lstStyle/>
-          <a:p>
-            <a:pPr algn="l" indent="0" marL="0">
-              <a:lnSpc>
-                <a:spcPts val="1680"/>
-              </a:lnSpc>
-              <a:spcBef>
-                <a:spcPts val="300"/>
-              </a:spcBef>
-              <a:spcAft>
-                <a:spcPts val="300"/>
-              </a:spcAft>
-              <a:buNone/>
-            </a:pPr>
-            <a:r>
-              <a:rPr lang="en-US" sz="1200" dirty="0">
-                <a:solidFill>
-                  <a:srgbClr val="1C2833"/>
-                </a:solidFill>
-                <a:latin typeface="Arial" pitchFamily="34" charset="0"/>
-                <a:ea typeface="Arial" pitchFamily="34" charset="-122"/>
-                <a:cs typeface="Arial" pitchFamily="34" charset="-120"/>
-              </a:rPr>
-              <a:t>– Heavy meal at </a:t>
-            </a:r>
-            <a:pPr algn="l" indent="0" marL="0">
-              <a:lnSpc>
-                <a:spcPts val="1680"/>
-              </a:lnSpc>
-              <a:spcBef>
-                <a:spcPts val="300"/>
-              </a:spcBef>
-              <a:spcAft>
-                <a:spcPts val="300"/>
-              </a:spcAft>
-              <a:buNone/>
-            </a:pPr>
-            <a:r>
-              <a:rPr lang="en-US" sz="1200" i="1" dirty="0">
-                <a:solidFill>
-                  <a:srgbClr val="1C2833"/>
-                </a:solidFill>
-                <a:latin typeface="Arial" pitchFamily="34" charset="0"/>
-                <a:ea typeface="Arial" pitchFamily="34" charset="-122"/>
-                <a:cs typeface="Arial" pitchFamily="34" charset="-120"/>
-              </a:rPr>
-              <a:t>kapha</a:t>
-            </a:r>
-            <a:pPr algn="l" indent="0" marL="0">
-              <a:lnSpc>
-                <a:spcPts val="1680"/>
-              </a:lnSpc>
-              <a:spcBef>
-                <a:spcPts val="300"/>
-              </a:spcBef>
-              <a:spcAft>
-                <a:spcPts val="300"/>
-              </a:spcAft>
-              <a:buNone/>
-            </a:pPr>
-            <a:r>
-              <a:rPr lang="en-US" sz="1200" dirty="0">
-                <a:solidFill>
-                  <a:srgbClr val="1C2833"/>
-                </a:solidFill>
-                <a:latin typeface="Arial" pitchFamily="34" charset="0"/>
-                <a:ea typeface="Arial" pitchFamily="34" charset="-122"/>
-                <a:cs typeface="Arial" pitchFamily="34" charset="-120"/>
-              </a:rPr>
-              <a:t> time (6–10 pm) sits heavy and disrupts sleep. – Heavy meal at </a:t>
-            </a:r>
-            <a:pPr algn="l" indent="0" marL="0">
-              <a:lnSpc>
-                <a:spcPts val="1680"/>
-              </a:lnSpc>
-              <a:spcBef>
-                <a:spcPts val="300"/>
-              </a:spcBef>
-              <a:spcAft>
-                <a:spcPts val="300"/>
-              </a:spcAft>
-              <a:buNone/>
-            </a:pPr>
-            <a:r>
-              <a:rPr lang="en-US" sz="1200" i="1" dirty="0">
-                <a:solidFill>
-                  <a:srgbClr val="1C2833"/>
-                </a:solidFill>
-                <a:latin typeface="Arial" pitchFamily="34" charset="0"/>
-                <a:ea typeface="Arial" pitchFamily="34" charset="-122"/>
-                <a:cs typeface="Arial" pitchFamily="34" charset="-120"/>
-              </a:rPr>
-              <a:t>pitta</a:t>
-            </a:r>
-            <a:pPr algn="l" indent="0" marL="0">
-              <a:lnSpc>
-                <a:spcPts val="1680"/>
-              </a:lnSpc>
-              <a:spcBef>
-                <a:spcPts val="300"/>
-              </a:spcBef>
-              <a:spcAft>
-                <a:spcPts val="300"/>
-              </a:spcAft>
-              <a:buNone/>
-            </a:pPr>
-            <a:r>
-              <a:rPr lang="en-US" sz="1200" dirty="0">
-                <a:solidFill>
-                  <a:srgbClr val="1C2833"/>
-                </a:solidFill>
-                <a:latin typeface="Arial" pitchFamily="34" charset="0"/>
-                <a:ea typeface="Arial" pitchFamily="34" charset="-122"/>
-                <a:cs typeface="Arial" pitchFamily="34" charset="-120"/>
-              </a:rPr>
-              <a:t> time (10 am – 2 pm) digests well. – Trying to sleep deeply at </a:t>
-            </a:r>
-            <a:pPr algn="l" indent="0" marL="0">
-              <a:lnSpc>
-                <a:spcPts val="1680"/>
-              </a:lnSpc>
-              <a:spcBef>
-                <a:spcPts val="300"/>
-              </a:spcBef>
-              <a:spcAft>
-                <a:spcPts val="300"/>
-              </a:spcAft>
-              <a:buNone/>
-            </a:pPr>
-            <a:r>
-              <a:rPr lang="en-US" sz="1200" i="1" dirty="0">
-                <a:solidFill>
-                  <a:srgbClr val="1C2833"/>
-                </a:solidFill>
-                <a:latin typeface="Arial" pitchFamily="34" charset="0"/>
-                <a:ea typeface="Arial" pitchFamily="34" charset="-122"/>
-                <a:cs typeface="Arial" pitchFamily="34" charset="-120"/>
-              </a:rPr>
-              <a:t>vāta</a:t>
-            </a:r>
-            <a:pPr algn="l" indent="0" marL="0">
-              <a:lnSpc>
-                <a:spcPts val="1680"/>
-              </a:lnSpc>
-              <a:spcBef>
-                <a:spcPts val="300"/>
-              </a:spcBef>
-              <a:spcAft>
-                <a:spcPts val="300"/>
-              </a:spcAft>
-              <a:buNone/>
-            </a:pPr>
-            <a:r>
-              <a:rPr lang="en-US" sz="1200" dirty="0">
-                <a:solidFill>
-                  <a:srgbClr val="1C2833"/>
-                </a:solidFill>
-                <a:latin typeface="Arial" pitchFamily="34" charset="0"/>
-                <a:ea typeface="Arial" pitchFamily="34" charset="-122"/>
-                <a:cs typeface="Arial" pitchFamily="34" charset="-120"/>
-              </a:rPr>
-              <a:t> time (2–6 am) is hard — that's why you wake at 4 am even if you went to bed late. – Skipping the </a:t>
-            </a:r>
-            <a:pPr algn="l" indent="0" marL="0">
-              <a:lnSpc>
-                <a:spcPts val="1680"/>
-              </a:lnSpc>
-              <a:spcBef>
-                <a:spcPts val="300"/>
-              </a:spcBef>
-              <a:spcAft>
-                <a:spcPts val="300"/>
-              </a:spcAft>
-              <a:buNone/>
-            </a:pPr>
-            <a:r>
-              <a:rPr lang="en-US" sz="1200" i="1" dirty="0">
-                <a:solidFill>
-                  <a:srgbClr val="1C2833"/>
-                </a:solidFill>
-                <a:latin typeface="Arial" pitchFamily="34" charset="0"/>
-                <a:ea typeface="Arial" pitchFamily="34" charset="-122"/>
-                <a:cs typeface="Arial" pitchFamily="34" charset="-120"/>
-              </a:rPr>
-              <a:t>kapha</a:t>
-            </a:r>
-            <a:pPr algn="l" indent="0" marL="0">
-              <a:lnSpc>
-                <a:spcPts val="1680"/>
-              </a:lnSpc>
-              <a:spcBef>
-                <a:spcPts val="300"/>
-              </a:spcBef>
-              <a:spcAft>
-                <a:spcPts val="300"/>
-              </a:spcAft>
-              <a:buNone/>
-            </a:pPr>
-            <a:r>
-              <a:rPr lang="en-US" sz="1200" dirty="0">
-                <a:solidFill>
-                  <a:srgbClr val="1C2833"/>
-                </a:solidFill>
-                <a:latin typeface="Arial" pitchFamily="34" charset="0"/>
-                <a:ea typeface="Arial" pitchFamily="34" charset="-122"/>
-                <a:cs typeface="Arial" pitchFamily="34" charset="-120"/>
-              </a:rPr>
-              <a:t> morning window (sleeping in until 11 am) leaves you groggy — the body needed to wake before the kapha window closed.</a:t>
-            </a:r>
-            <a:endParaRPr lang="en-US" sz="1200" dirty="0"/>
-          </a:p>
-        </p:txBody>
-      </p:sp>
-      <p:sp>
-        <p:nvSpPr>
-          <p:cNvPr id="12" name="Text 10"/>
-          <p:cNvSpPr/>
-          <p:nvPr/>
-        </p:nvSpPr>
-        <p:spPr>
-          <a:xfrm>
-            <a:off x="634901" y="6058346"/>
-            <a:ext cx="8102798" cy="281880"/>
-          </a:xfrm>
-          <a:prstGeom prst="rect">
-            <a:avLst/>
-          </a:prstGeom>
-          <a:noFill/>
-          <a:ln/>
-        </p:spPr>
-        <p:txBody>
-          <a:bodyPr wrap="square" lIns="0" tIns="0" rIns="0" bIns="0" rtlCol="0" anchor="t"/>
-          <a:lstStyle/>
-          <a:p>
-            <a:pPr algn="l" marL="342900" indent="-342900">
-              <a:lnSpc>
-                <a:spcPts val="1620"/>
-              </a:lnSpc>
-              <a:spcAft>
-                <a:spcPts val="300"/>
-              </a:spcAft>
-              <a:buSzPct val="100000"/>
-              <a:buChar char="•"/>
-            </a:pPr>
-            <a:r>
-              <a:rPr lang="en-US" sz="1200" b="1" dirty="0">
-                <a:solidFill>
-                  <a:srgbClr val="1C2833"/>
-                </a:solidFill>
-                <a:latin typeface="Arial" pitchFamily="34" charset="0"/>
-                <a:ea typeface="Arial" pitchFamily="34" charset="-122"/>
-                <a:cs typeface="Arial" pitchFamily="34" charset="-120"/>
-              </a:rPr>
-              <a:t>The modern parallel — chronobiology</a:t>
-            </a:r>
-            <a:pPr algn="l" indent="0" marL="0">
-              <a:lnSpc>
-                <a:spcPts val="1620"/>
-              </a:lnSpc>
-              <a:spcAft>
-                <a:spcPts val="300"/>
-              </a:spcAft>
-              <a:buNone/>
-            </a:pPr>
-            <a:r>
-              <a:rPr lang="en-US" sz="1200" dirty="0">
-                <a:solidFill>
-                  <a:srgbClr val="1C2833"/>
-                </a:solidFill>
-                <a:latin typeface="Arial" pitchFamily="34" charset="0"/>
-                <a:ea typeface="Arial" pitchFamily="34" charset="-122"/>
-                <a:cs typeface="Arial" pitchFamily="34" charset="-120"/>
-              </a:rPr>
-              <a:t> (state, don't overstate):</a:t>
-            </a:r>
-            <a:endParaRPr lang="en-US" sz="1200" dirty="0"/>
-          </a:p>
-        </p:txBody>
-      </p:sp>
-      <p:sp>
-        <p:nvSpPr>
-          <p:cNvPr id="13" name="Text 11"/>
-          <p:cNvSpPr/>
-          <p:nvPr/>
-        </p:nvSpPr>
-        <p:spPr>
-          <a:xfrm>
-            <a:off x="406301" y="6429077"/>
-            <a:ext cx="8498026" cy="1066354"/>
-          </a:xfrm>
-          <a:prstGeom prst="rect">
-            <a:avLst/>
-          </a:prstGeom>
-          <a:noFill/>
-          <a:ln/>
-        </p:spPr>
-        <p:txBody>
-          <a:bodyPr wrap="square" lIns="0" tIns="0" rIns="0" bIns="0" rtlCol="0" anchor="t"/>
-          <a:lstStyle/>
-          <a:p>
-            <a:pPr algn="l" indent="0" marL="0">
-              <a:lnSpc>
-                <a:spcPts val="1680"/>
-              </a:lnSpc>
-              <a:spcBef>
-                <a:spcPts val="300"/>
-              </a:spcBef>
-              <a:spcAft>
-                <a:spcPts val="300"/>
-              </a:spcAft>
-              <a:buNone/>
-            </a:pPr>
-            <a:r>
-              <a:rPr lang="en-US" sz="1200" dirty="0">
-                <a:solidFill>
-                  <a:srgbClr val="1C2833"/>
-                </a:solidFill>
-                <a:latin typeface="Arial" pitchFamily="34" charset="0"/>
-                <a:ea typeface="Arial" pitchFamily="34" charset="-122"/>
-                <a:cs typeface="Arial" pitchFamily="34" charset="-120"/>
-              </a:rPr>
-              <a:t>– Modern science: the body has a </a:t>
-            </a:r>
-            <a:pPr algn="l" indent="0" marL="0">
-              <a:lnSpc>
-                <a:spcPts val="1680"/>
-              </a:lnSpc>
-              <a:spcBef>
-                <a:spcPts val="300"/>
-              </a:spcBef>
-              <a:spcAft>
-                <a:spcPts val="300"/>
-              </a:spcAft>
-              <a:buNone/>
-            </a:pPr>
-            <a:r>
-              <a:rPr lang="en-US" sz="1200" b="1" dirty="0">
-                <a:solidFill>
-                  <a:srgbClr val="1C2833"/>
-                </a:solidFill>
-                <a:latin typeface="Arial" pitchFamily="34" charset="0"/>
-                <a:ea typeface="Arial" pitchFamily="34" charset="-122"/>
-                <a:cs typeface="Arial" pitchFamily="34" charset="-120"/>
-              </a:rPr>
-              <a:t>circadian rhythm</a:t>
-            </a:r>
-            <a:pPr algn="l" indent="0" marL="0">
-              <a:lnSpc>
-                <a:spcPts val="1680"/>
-              </a:lnSpc>
-              <a:spcBef>
-                <a:spcPts val="300"/>
-              </a:spcBef>
-              <a:spcAft>
-                <a:spcPts val="300"/>
-              </a:spcAft>
-              <a:buNone/>
-            </a:pPr>
-            <a:r>
-              <a:rPr lang="en-US" sz="1200" dirty="0">
-                <a:solidFill>
-                  <a:srgbClr val="1C2833"/>
-                </a:solidFill>
-                <a:latin typeface="Arial" pitchFamily="34" charset="0"/>
-                <a:ea typeface="Arial" pitchFamily="34" charset="-122"/>
-                <a:cs typeface="Arial" pitchFamily="34" charset="-120"/>
-              </a:rPr>
-              <a:t> controlled by the suprachiasmatic nucleus in the brain, driven by light exposure. – Insulin sensitivity (how well you handle sugar): higher in the morning, lower at night. Big dinner late = worse glucose handling. (Real effect; see Panda 2012.) – Cortisol (stress hormone): peaks ~6–8 am, drops through the day. That's why morning is mentally "harder to start" if you slept badly. – Body temperature: lowest around 4–5 am, peaks late afternoon. Matches </a:t>
-            </a:r>
-            <a:pPr algn="l" indent="0" marL="0">
-              <a:lnSpc>
-                <a:spcPts val="1680"/>
-              </a:lnSpc>
-              <a:spcBef>
-                <a:spcPts val="300"/>
-              </a:spcBef>
-              <a:spcAft>
-                <a:spcPts val="300"/>
-              </a:spcAft>
-              <a:buNone/>
-            </a:pPr>
-            <a:r>
-              <a:rPr lang="en-US" sz="1200" i="1" dirty="0">
-                <a:solidFill>
-                  <a:srgbClr val="1C2833"/>
-                </a:solidFill>
-                <a:latin typeface="Arial" pitchFamily="34" charset="0"/>
-                <a:ea typeface="Arial" pitchFamily="34" charset="-122"/>
-                <a:cs typeface="Arial" pitchFamily="34" charset="-120"/>
-              </a:rPr>
-              <a:t>vāta</a:t>
-            </a:r>
-            <a:pPr algn="l" indent="0" marL="0">
-              <a:lnSpc>
-                <a:spcPts val="1680"/>
-              </a:lnSpc>
-              <a:spcBef>
-                <a:spcPts val="300"/>
-              </a:spcBef>
-              <a:spcAft>
-                <a:spcPts val="300"/>
-              </a:spcAft>
-              <a:buNone/>
-            </a:pPr>
-            <a:r>
-              <a:rPr lang="en-US" sz="1200" dirty="0">
-                <a:solidFill>
-                  <a:srgbClr val="1C2833"/>
-                </a:solidFill>
-                <a:latin typeface="Arial" pitchFamily="34" charset="0"/>
-                <a:ea typeface="Arial" pitchFamily="34" charset="-122"/>
-                <a:cs typeface="Arial" pitchFamily="34" charset="-120"/>
-              </a:rPr>
-              <a:t> time roughly.</a:t>
-            </a:r>
-            <a:endParaRPr lang="en-US" sz="1200" dirty="0"/>
-          </a:p>
-        </p:txBody>
-      </p:sp>
-      <p:sp>
-        <p:nvSpPr>
-          <p:cNvPr id="14" name="Text 12"/>
-          <p:cNvSpPr/>
-          <p:nvPr/>
-        </p:nvSpPr>
-        <p:spPr>
-          <a:xfrm>
-            <a:off x="406301" y="7571631"/>
-            <a:ext cx="8498026" cy="426541"/>
-          </a:xfrm>
-          <a:prstGeom prst="rect">
-            <a:avLst/>
-          </a:prstGeom>
-          <a:noFill/>
-          <a:ln/>
-        </p:spPr>
-        <p:txBody>
-          <a:bodyPr wrap="square" lIns="0" tIns="0" rIns="0" bIns="0" rtlCol="0" anchor="t"/>
-          <a:lstStyle/>
-          <a:p>
-            <a:pPr algn="l" indent="0" marL="0">
-              <a:lnSpc>
-                <a:spcPts val="1680"/>
-              </a:lnSpc>
-              <a:spcBef>
-                <a:spcPts val="300"/>
-              </a:spcBef>
-              <a:spcAft>
-                <a:spcPts val="300"/>
-              </a:spcAft>
-              <a:buNone/>
-            </a:pPr>
-            <a:r>
-              <a:rPr lang="en-US" sz="1200" b="1" dirty="0">
-                <a:solidFill>
-                  <a:srgbClr val="1C2833"/>
-                </a:solidFill>
-                <a:latin typeface="Arial" pitchFamily="34" charset="0"/>
-                <a:ea typeface="Arial" pitchFamily="34" charset="-122"/>
-                <a:cs typeface="Arial" pitchFamily="34" charset="-120"/>
-              </a:rPr>
-              <a:t>The honest framing:</a:t>
-            </a:r>
-            <a:pPr algn="l" indent="0" marL="0">
-              <a:lnSpc>
-                <a:spcPts val="1680"/>
-              </a:lnSpc>
-              <a:spcBef>
-                <a:spcPts val="300"/>
-              </a:spcBef>
-              <a:spcAft>
-                <a:spcPts val="300"/>
-              </a:spcAft>
-              <a:buNone/>
-            </a:pPr>
-            <a:r>
-              <a:rPr lang="en-US" sz="1200" dirty="0">
-                <a:solidFill>
-                  <a:srgbClr val="1C2833"/>
-                </a:solidFill>
-                <a:latin typeface="Arial" pitchFamily="34" charset="0"/>
-                <a:ea typeface="Arial" pitchFamily="34" charset="-122"/>
-                <a:cs typeface="Arial" pitchFamily="34" charset="-120"/>
-              </a:rPr>
-              <a:t> the </a:t>
-            </a:r>
-            <a:pPr algn="l" indent="0" marL="0">
-              <a:lnSpc>
-                <a:spcPts val="1680"/>
-              </a:lnSpc>
-              <a:spcBef>
-                <a:spcPts val="300"/>
-              </a:spcBef>
-              <a:spcAft>
-                <a:spcPts val="300"/>
-              </a:spcAft>
-              <a:buNone/>
-            </a:pPr>
-            <a:r>
-              <a:rPr lang="en-US" sz="1200" i="1" dirty="0">
-                <a:solidFill>
-                  <a:srgbClr val="1C2833"/>
-                </a:solidFill>
-                <a:latin typeface="Arial" pitchFamily="34" charset="0"/>
-                <a:ea typeface="Arial" pitchFamily="34" charset="-122"/>
-                <a:cs typeface="Arial" pitchFamily="34" charset="-120"/>
-              </a:rPr>
-              <a:t>general principle</a:t>
-            </a:r>
-            <a:pPr algn="l" indent="0" marL="0">
-              <a:lnSpc>
-                <a:spcPts val="1680"/>
-              </a:lnSpc>
-              <a:spcBef>
-                <a:spcPts val="300"/>
-              </a:spcBef>
-              <a:spcAft>
-                <a:spcPts val="300"/>
-              </a:spcAft>
-              <a:buNone/>
-            </a:pPr>
-            <a:r>
-              <a:rPr lang="en-US" sz="1200" dirty="0">
-                <a:solidFill>
-                  <a:srgbClr val="1C2833"/>
-                </a:solidFill>
-                <a:latin typeface="Arial" pitchFamily="34" charset="0"/>
-                <a:ea typeface="Arial" pitchFamily="34" charset="-122"/>
-                <a:cs typeface="Arial" pitchFamily="34" charset="-120"/>
-              </a:rPr>
-              <a:t> (the body cycles through the day) is robust modern science. The </a:t>
-            </a:r>
-            <a:pPr algn="l" indent="0" marL="0">
-              <a:lnSpc>
-                <a:spcPts val="1680"/>
-              </a:lnSpc>
-              <a:spcBef>
-                <a:spcPts val="300"/>
-              </a:spcBef>
-              <a:spcAft>
-                <a:spcPts val="300"/>
-              </a:spcAft>
-              <a:buNone/>
-            </a:pPr>
-            <a:r>
-              <a:rPr lang="en-US" sz="1200" i="1" dirty="0">
-                <a:solidFill>
-                  <a:srgbClr val="1C2833"/>
-                </a:solidFill>
-                <a:latin typeface="Arial" pitchFamily="34" charset="0"/>
-                <a:ea typeface="Arial" pitchFamily="34" charset="-122"/>
-                <a:cs typeface="Arial" pitchFamily="34" charset="-120"/>
-              </a:rPr>
-              <a:t>specific doṣa-clock windows</a:t>
-            </a:r>
-            <a:pPr algn="l" indent="0" marL="0">
-              <a:lnSpc>
-                <a:spcPts val="1680"/>
-              </a:lnSpc>
-              <a:spcBef>
-                <a:spcPts val="300"/>
-              </a:spcBef>
-              <a:spcAft>
-                <a:spcPts val="300"/>
-              </a:spcAft>
-              <a:buNone/>
-            </a:pPr>
-            <a:r>
-              <a:rPr lang="en-US" sz="1200" dirty="0">
-                <a:solidFill>
-                  <a:srgbClr val="1C2833"/>
-                </a:solidFill>
-                <a:latin typeface="Arial" pitchFamily="34" charset="0"/>
-                <a:ea typeface="Arial" pitchFamily="34" charset="-122"/>
-                <a:cs typeface="Arial" pitchFamily="34" charset="-120"/>
-              </a:rPr>
-              <a:t> are an Ayurvedic codification — not a 1:1 match with modern timing studies, but a workable approximation.</a:t>
-            </a:r>
-            <a:endParaRPr lang="en-US" sz="1200" dirty="0"/>
-          </a:p>
-        </p:txBody>
-      </p:sp>
-      <p:sp>
-        <p:nvSpPr>
-          <p:cNvPr id="15" name="Text 13"/>
-          <p:cNvSpPr/>
-          <p:nvPr/>
-        </p:nvSpPr>
-        <p:spPr>
-          <a:xfrm>
-            <a:off x="406301" y="8150572"/>
+            <a:off x="406301" y="4434929"/>
             <a:ext cx="8498026" cy="213271"/>
           </a:xfrm>
           <a:prstGeom prst="rect">
@@ -6454,7 +8925,7 @@
                 <a:ea typeface="Georgia" pitchFamily="34" charset="-122"/>
                 <a:cs typeface="Georgia" pitchFamily="34" charset="-120"/>
               </a:rPr>
-              <a:t>Activity (15 min) — Map your day</a:t>
+              <a:t>Core (20 min)</a:t>
             </a:r>
             <a:endParaRPr lang="en-US" sz="1800" dirty="0"/>
           </a:p>
@@ -6468,8 +8939,8 @@
         </p:nvSpPr>
         <p:spPr>
           <a:xfrm>
-            <a:off x="406301" y="870942"/>
-            <a:ext cx="8498026" cy="853083"/>
+            <a:off x="634901" y="883593"/>
+            <a:ext cx="8102798" cy="487561"/>
           </a:xfrm>
           <a:prstGeom prst="rect">
             <a:avLst/>
@@ -6481,13 +8952,31 @@
           <a:bodyPr wrap="square" lIns="0" tIns="0" rIns="0" bIns="0" rtlCol="0" anchor="t"/>
           <a:lstStyle/>
           <a:p>
-            <a:pPr algn="l" indent="0" marL="0">
-              <a:lnSpc>
-                <a:spcPts val="1680"/>
-              </a:lnSpc>
-              <a:spcBef>
-                <a:spcPts val="300"/>
-              </a:spcBef>
+            <a:pPr algn="l" marL="342900" indent="-342900">
+              <a:lnSpc>
+                <a:spcPts val="1620"/>
+              </a:lnSpc>
+              <a:spcAft>
+                <a:spcPts val="300"/>
+              </a:spcAft>
+              <a:buSzPct val="100000"/>
+              <a:buChar char="•"/>
+            </a:pPr>
+            <a:r>
+              <a:rPr lang="en-US" sz="1200" b="1" dirty="0">
+                <a:solidFill>
+                  <a:srgbClr val="1C2833"/>
+                </a:solidFill>
+                <a:latin typeface="Arial" pitchFamily="34" charset="0"/>
+                <a:ea typeface="Arial" pitchFamily="34" charset="-122"/>
+                <a:cs typeface="Arial" pitchFamily="34" charset="-120"/>
+              </a:rPr>
+              <a:t>Build the clock on the board.</a:t>
+            </a:r>
+            <a:pPr algn="l" indent="0" marL="0">
+              <a:lnSpc>
+                <a:spcPts val="1620"/>
+              </a:lnSpc>
               <a:spcAft>
                 <a:spcPts val="300"/>
               </a:spcAft>
@@ -6502,15 +8991,12 @@
                 <a:ea typeface="Arial" pitchFamily="34" charset="-122"/>
                 <a:cs typeface="Arial" pitchFamily="34" charset="-120"/>
               </a:rPr>
-              <a:t>– Hand out the printed day-clock. – Students annotate it with what they actually do at each window. (Wake 6:30, brush teeth, breakfast 7:30, school 8:30, lunch 12:30, etc.) – For each entry, ask: </a:t>
-            </a:r>
-            <a:pPr algn="l" indent="0" marL="0">
-              <a:lnSpc>
-                <a:spcPts val="1680"/>
-              </a:lnSpc>
-              <a:spcBef>
-                <a:spcPts val="300"/>
-              </a:spcBef>
+              <a:t> Draw a 24-hour clock face. Divide into six 4-hour wedges. Label each with start-end time. Then assign each window its dominant </a:t>
+            </a:r>
+            <a:pPr algn="l" indent="0" marL="0">
+              <a:lnSpc>
+                <a:spcPts val="1620"/>
+              </a:lnSpc>
               <a:spcAft>
                 <a:spcPts val="300"/>
               </a:spcAft>
@@ -6525,15 +9011,12 @@
                 <a:ea typeface="Arial" pitchFamily="34" charset="-122"/>
                 <a:cs typeface="Arial" pitchFamily="34" charset="-120"/>
               </a:rPr>
-              <a:t>"Is this activity matched to the dominant doṣa at this time?"</a:t>
-            </a:r>
-            <a:pPr algn="l" indent="0" marL="0">
-              <a:lnSpc>
-                <a:spcPts val="1680"/>
-              </a:lnSpc>
-              <a:spcBef>
-                <a:spcPts val="300"/>
-              </a:spcBef>
+              <a:t>doṣa</a:t>
+            </a:r>
+            <a:pPr algn="l" indent="0" marL="0">
+              <a:lnSpc>
+                <a:spcPts val="1620"/>
+              </a:lnSpc>
               <a:spcAft>
                 <a:spcPts val="300"/>
               </a:spcAft>
@@ -6548,7 +9031,7 @@
                 <a:ea typeface="Arial" pitchFamily="34" charset="-122"/>
                 <a:cs typeface="Arial" pitchFamily="34" charset="-120"/>
               </a:rPr>
-              <a:t> – Heavy lunch at noon (pitta time) — matched. – Heavy dinner at 9 pm (kapha time) — mismatched. – Heavy nap at 3 pm (vāta time) — mismatched.</a:t>
+              <a:t> (colour-coded):</a:t>
             </a:r>
             <a:endParaRPr lang="en-US" sz="1200" dirty="0"/>
           </a:p>
@@ -6562,7 +9045,7 @@
         </p:nvSpPr>
         <p:spPr>
           <a:xfrm>
-            <a:off x="406301" y="1800225"/>
+            <a:off x="406301" y="1460004"/>
             <a:ext cx="8498026" cy="213271"/>
           </a:xfrm>
           <a:prstGeom prst="rect">
@@ -6588,29 +9071,6 @@
               <a:buNone/>
             </a:pPr>
             <a:r>
-              <a:rPr lang="en-US" sz="1200" dirty="0">
-                <a:solidFill>
-                  <a:srgbClr val="1C2833"/>
-                </a:solidFill>
-                <a:latin typeface="Arial" pitchFamily="34" charset="0"/>
-                <a:ea typeface="Arial" pitchFamily="34" charset="-122"/>
-                <a:cs typeface="Arial" pitchFamily="34" charset="-120"/>
-              </a:rPr>
-              <a:t>– Each student picks ONE mismatch and writes a one-line </a:t>
-            </a:r>
-            <a:pPr algn="l" indent="0" marL="0">
-              <a:lnSpc>
-                <a:spcPts val="1680"/>
-              </a:lnSpc>
-              <a:spcBef>
-                <a:spcPts val="300"/>
-              </a:spcBef>
-              <a:spcAft>
-                <a:spcPts val="300"/>
-              </a:spcAft>
-              <a:buNone/>
-            </a:pPr>
-            <a:r>
               <a:rPr lang="en-US" sz="1200" i="1" dirty="0">
                 <a:solidFill>
                   <a:srgbClr val="1C2833"/>
@@ -6619,7 +9079,7 @@
                 <a:ea typeface="Arial" pitchFamily="34" charset="-122"/>
                 <a:cs typeface="Arial" pitchFamily="34" charset="-120"/>
               </a:rPr>
-              <a:t>what would I change?</a:t>
+              <a:t>Each row: Window · Time · Dominant doṣa · Why.</a:t>
             </a:r>
             <a:endParaRPr lang="en-US" sz="1200" dirty="0"/>
           </a:p>
@@ -6777,7 +9237,7 @@
                 <a:ea typeface="Georgia" pitchFamily="34" charset="-122"/>
                 <a:cs typeface="Georgia" pitchFamily="34" charset="-120"/>
               </a:rPr>
-              <a:t>Wrap-up (5 min)</a:t>
+              <a:t>Core (20 min) (cont.)</a:t>
             </a:r>
             <a:endParaRPr lang="en-US" sz="1800" dirty="0"/>
           </a:p>
@@ -6792,7 +9252,7 @@
         <p:spPr>
           <a:xfrm>
             <a:off x="634901" y="883593"/>
-            <a:ext cx="8102798" cy="300930"/>
+            <a:ext cx="8102798" cy="1462683"/>
           </a:xfrm>
           <a:prstGeom prst="rect">
             <a:avLst/>
@@ -6823,7 +9283,7 @@
                 <a:ea typeface="Arial" pitchFamily="34" charset="-122"/>
                 <a:cs typeface="Arial" pitchFamily="34" charset="-120"/>
               </a:rPr>
-              <a:t>Formative quiz, Part B</a:t>
+              <a:t>1</a:t>
             </a:r>
             <a:pPr algn="l" indent="0" marL="0">
               <a:lnSpc>
@@ -6843,7 +9303,27 @@
                 <a:ea typeface="Arial" pitchFamily="34" charset="-122"/>
                 <a:cs typeface="Arial" pitchFamily="34" charset="-120"/>
               </a:rPr>
-              <a:t> (5 questions, 4 min) — see </a:t>
+              <a:t> — 6 am – 10 am · </a:t>
+            </a:r>
+            <a:pPr algn="l" indent="0" marL="0">
+              <a:lnSpc>
+                <a:spcPts val="1620"/>
+              </a:lnSpc>
+              <a:spcAft>
+                <a:spcPts val="300"/>
+              </a:spcAft>
+              <a:buNone/>
+            </a:pPr>
+            <a:r>
+              <a:rPr lang="en-US" sz="1200" i="1" dirty="0">
+                <a:solidFill>
+                  <a:srgbClr val="1C2833"/>
+                </a:solidFill>
+                <a:latin typeface="Arial" pitchFamily="34" charset="0"/>
+                <a:ea typeface="Arial" pitchFamily="34" charset="-122"/>
+                <a:cs typeface="Arial" pitchFamily="34" charset="-120"/>
+              </a:rPr>
+              <a:t>kapha</a:t>
             </a:r>
             <a:pPr algn="l" indent="0" marL="0">
               <a:lnSpc>
@@ -6863,7 +9343,31 @@
                 <a:ea typeface="Arial" pitchFamily="34" charset="-122"/>
                 <a:cs typeface="Arial" pitchFamily="34" charset="-120"/>
               </a:rPr>
-              <a:t>quizzes/formative.md</a:t>
+              <a:t> · Body is heavy, slow to start — heavy mucus, deep tissue. Best for solid breakfast, mild exercise.</a:t>
+            </a:r>
+            <a:endParaRPr lang="en-US" sz="1200" dirty="0"/>
+          </a:p>
+          <a:p>
+            <a:pPr algn="l" marL="342900" indent="-342900">
+              <a:lnSpc>
+                <a:spcPts val="1620"/>
+              </a:lnSpc>
+              <a:spcAft>
+                <a:spcPts val="300"/>
+              </a:spcAft>
+              <a:buSzPct val="100000"/>
+              <a:buChar char="•"/>
+            </a:pPr>
+            <a:r>
+              <a:rPr lang="en-US" sz="1200" b="1" dirty="0">
+                <a:solidFill>
+                  <a:srgbClr val="1C2833"/>
+                </a:solidFill>
+                <a:latin typeface="Arial" pitchFamily="34" charset="0"/>
+                <a:ea typeface="Arial" pitchFamily="34" charset="-122"/>
+                <a:cs typeface="Arial" pitchFamily="34" charset="-120"/>
+              </a:rPr>
+              <a:t>2</a:t>
             </a:r>
             <a:pPr algn="l" indent="0" marL="0">
               <a:lnSpc>
@@ -6883,86 +9387,307 @@
                 <a:ea typeface="Arial" pitchFamily="34" charset="-122"/>
                 <a:cs typeface="Arial" pitchFamily="34" charset="-120"/>
               </a:rPr>
-              <a:t> Part B.</a:t>
+              <a:t> — 10 am – 2 pm · </a:t>
+            </a:r>
+            <a:pPr algn="l" indent="0" marL="0">
+              <a:lnSpc>
+                <a:spcPts val="1620"/>
+              </a:lnSpc>
+              <a:spcAft>
+                <a:spcPts val="300"/>
+              </a:spcAft>
+              <a:buNone/>
+            </a:pPr>
+            <a:r>
+              <a:rPr lang="en-US" sz="1200" i="1" dirty="0">
+                <a:solidFill>
+                  <a:srgbClr val="1C2833"/>
+                </a:solidFill>
+                <a:latin typeface="Arial" pitchFamily="34" charset="0"/>
+                <a:ea typeface="Arial" pitchFamily="34" charset="-122"/>
+                <a:cs typeface="Arial" pitchFamily="34" charset="-120"/>
+              </a:rPr>
+              <a:t>pitta</a:t>
+            </a:r>
+            <a:pPr algn="l" indent="0" marL="0">
+              <a:lnSpc>
+                <a:spcPts val="1620"/>
+              </a:lnSpc>
+              <a:spcAft>
+                <a:spcPts val="300"/>
+              </a:spcAft>
+              <a:buNone/>
+            </a:pPr>
+            <a:r>
+              <a:rPr lang="en-US" sz="1200" dirty="0">
+                <a:solidFill>
+                  <a:srgbClr val="1C2833"/>
+                </a:solidFill>
+                <a:latin typeface="Arial" pitchFamily="34" charset="0"/>
+                <a:ea typeface="Arial" pitchFamily="34" charset="-122"/>
+                <a:cs typeface="Arial" pitchFamily="34" charset="-120"/>
+              </a:rPr>
+              <a:t> · Digestive fire peaks at noon. Best for the main meal of the day.</a:t>
             </a:r>
             <a:endParaRPr lang="en-US" sz="1200" dirty="0"/>
           </a:p>
+          <a:p>
+            <a:pPr algn="l" marL="342900" indent="-342900">
+              <a:lnSpc>
+                <a:spcPts val="1620"/>
+              </a:lnSpc>
+              <a:spcAft>
+                <a:spcPts val="300"/>
+              </a:spcAft>
+              <a:buSzPct val="100000"/>
+              <a:buChar char="•"/>
+            </a:pPr>
+            <a:r>
+              <a:rPr lang="en-US" sz="1200" b="1" dirty="0">
+                <a:solidFill>
+                  <a:srgbClr val="1C2833"/>
+                </a:solidFill>
+                <a:latin typeface="Arial" pitchFamily="34" charset="0"/>
+                <a:ea typeface="Arial" pitchFamily="34" charset="-122"/>
+                <a:cs typeface="Arial" pitchFamily="34" charset="-120"/>
+              </a:rPr>
+              <a:t>3</a:t>
+            </a:r>
+            <a:pPr algn="l" indent="0" marL="0">
+              <a:lnSpc>
+                <a:spcPts val="1620"/>
+              </a:lnSpc>
+              <a:spcAft>
+                <a:spcPts val="300"/>
+              </a:spcAft>
+              <a:buNone/>
+            </a:pPr>
+            <a:r>
+              <a:rPr lang="en-US" sz="1200" dirty="0">
+                <a:solidFill>
+                  <a:srgbClr val="1C2833"/>
+                </a:solidFill>
+                <a:latin typeface="Arial" pitchFamily="34" charset="0"/>
+                <a:ea typeface="Arial" pitchFamily="34" charset="-122"/>
+                <a:cs typeface="Arial" pitchFamily="34" charset="-120"/>
+              </a:rPr>
+              <a:t> — 2 pm – 6 pm · </a:t>
+            </a:r>
+            <a:pPr algn="l" indent="0" marL="0">
+              <a:lnSpc>
+                <a:spcPts val="1620"/>
+              </a:lnSpc>
+              <a:spcAft>
+                <a:spcPts val="300"/>
+              </a:spcAft>
+              <a:buNone/>
+            </a:pPr>
+            <a:r>
+              <a:rPr lang="en-US" sz="1200" i="1" dirty="0">
+                <a:solidFill>
+                  <a:srgbClr val="1C2833"/>
+                </a:solidFill>
+                <a:latin typeface="Arial" pitchFamily="34" charset="0"/>
+                <a:ea typeface="Arial" pitchFamily="34" charset="-122"/>
+                <a:cs typeface="Arial" pitchFamily="34" charset="-120"/>
+              </a:rPr>
+              <a:t>vāta</a:t>
+            </a:r>
+            <a:pPr algn="l" indent="0" marL="0">
+              <a:lnSpc>
+                <a:spcPts val="1620"/>
+              </a:lnSpc>
+              <a:spcAft>
+                <a:spcPts val="300"/>
+              </a:spcAft>
+              <a:buNone/>
+            </a:pPr>
+            <a:r>
+              <a:rPr lang="en-US" sz="1200" dirty="0">
+                <a:solidFill>
+                  <a:srgbClr val="1C2833"/>
+                </a:solidFill>
+                <a:latin typeface="Arial" pitchFamily="34" charset="0"/>
+                <a:ea typeface="Arial" pitchFamily="34" charset="-122"/>
+                <a:cs typeface="Arial" pitchFamily="34" charset="-120"/>
+              </a:rPr>
+              <a:t> · Energy is bursty, mind active, body lighter. Best for focused work, short snacks.</a:t>
+            </a:r>
+            <a:endParaRPr lang="en-US" sz="1200" dirty="0"/>
+          </a:p>
+          <a:p>
+            <a:pPr algn="l" marL="342900" indent="-342900">
+              <a:lnSpc>
+                <a:spcPts val="1620"/>
+              </a:lnSpc>
+              <a:spcAft>
+                <a:spcPts val="300"/>
+              </a:spcAft>
+              <a:buSzPct val="100000"/>
+              <a:buChar char="•"/>
+            </a:pPr>
+            <a:r>
+              <a:rPr lang="en-US" sz="1200" b="1" dirty="0">
+                <a:solidFill>
+                  <a:srgbClr val="1C2833"/>
+                </a:solidFill>
+                <a:latin typeface="Arial" pitchFamily="34" charset="0"/>
+                <a:ea typeface="Arial" pitchFamily="34" charset="-122"/>
+                <a:cs typeface="Arial" pitchFamily="34" charset="-120"/>
+              </a:rPr>
+              <a:t>4</a:t>
+            </a:r>
+            <a:pPr algn="l" indent="0" marL="0">
+              <a:lnSpc>
+                <a:spcPts val="1620"/>
+              </a:lnSpc>
+              <a:spcAft>
+                <a:spcPts val="300"/>
+              </a:spcAft>
+              <a:buNone/>
+            </a:pPr>
+            <a:r>
+              <a:rPr lang="en-US" sz="1200" dirty="0">
+                <a:solidFill>
+                  <a:srgbClr val="1C2833"/>
+                </a:solidFill>
+                <a:latin typeface="Arial" pitchFamily="34" charset="0"/>
+                <a:ea typeface="Arial" pitchFamily="34" charset="-122"/>
+                <a:cs typeface="Arial" pitchFamily="34" charset="-120"/>
+              </a:rPr>
+              <a:t> — 6 pm – 10 pm · </a:t>
+            </a:r>
+            <a:pPr algn="l" indent="0" marL="0">
+              <a:lnSpc>
+                <a:spcPts val="1620"/>
+              </a:lnSpc>
+              <a:spcAft>
+                <a:spcPts val="300"/>
+              </a:spcAft>
+              <a:buNone/>
+            </a:pPr>
+            <a:r>
+              <a:rPr lang="en-US" sz="1200" i="1" dirty="0">
+                <a:solidFill>
+                  <a:srgbClr val="1C2833"/>
+                </a:solidFill>
+                <a:latin typeface="Arial" pitchFamily="34" charset="0"/>
+                <a:ea typeface="Arial" pitchFamily="34" charset="-122"/>
+                <a:cs typeface="Arial" pitchFamily="34" charset="-120"/>
+              </a:rPr>
+              <a:t>kapha</a:t>
+            </a:r>
+            <a:pPr algn="l" indent="0" marL="0">
+              <a:lnSpc>
+                <a:spcPts val="1620"/>
+              </a:lnSpc>
+              <a:spcAft>
+                <a:spcPts val="300"/>
+              </a:spcAft>
+              <a:buNone/>
+            </a:pPr>
+            <a:r>
+              <a:rPr lang="en-US" sz="1200" dirty="0">
+                <a:solidFill>
+                  <a:srgbClr val="1C2833"/>
+                </a:solidFill>
+                <a:latin typeface="Arial" pitchFamily="34" charset="0"/>
+                <a:ea typeface="Arial" pitchFamily="34" charset="-122"/>
+                <a:cs typeface="Arial" pitchFamily="34" charset="-120"/>
+              </a:rPr>
+              <a:t> · Body slows for sleep. Best for light dinner, calming activity.</a:t>
+            </a:r>
+            <a:endParaRPr lang="en-US" sz="1200" dirty="0"/>
+          </a:p>
+          <a:p>
+            <a:pPr algn="l" marL="342900" indent="-342900">
+              <a:lnSpc>
+                <a:spcPts val="1620"/>
+              </a:lnSpc>
+              <a:spcAft>
+                <a:spcPts val="300"/>
+              </a:spcAft>
+              <a:buSzPct val="100000"/>
+              <a:buChar char="•"/>
+            </a:pPr>
+            <a:r>
+              <a:rPr lang="en-US" sz="1200" b="1" dirty="0">
+                <a:solidFill>
+                  <a:srgbClr val="1C2833"/>
+                </a:solidFill>
+                <a:latin typeface="Arial" pitchFamily="34" charset="0"/>
+                <a:ea typeface="Arial" pitchFamily="34" charset="-122"/>
+                <a:cs typeface="Arial" pitchFamily="34" charset="-120"/>
+              </a:rPr>
+              <a:t>5</a:t>
+            </a:r>
+            <a:pPr algn="l" indent="0" marL="0">
+              <a:lnSpc>
+                <a:spcPts val="1620"/>
+              </a:lnSpc>
+              <a:spcAft>
+                <a:spcPts val="300"/>
+              </a:spcAft>
+              <a:buNone/>
+            </a:pPr>
+            <a:r>
+              <a:rPr lang="en-US" sz="1200" dirty="0">
+                <a:solidFill>
+                  <a:srgbClr val="1C2833"/>
+                </a:solidFill>
+                <a:latin typeface="Arial" pitchFamily="34" charset="0"/>
+                <a:ea typeface="Arial" pitchFamily="34" charset="-122"/>
+                <a:cs typeface="Arial" pitchFamily="34" charset="-120"/>
+              </a:rPr>
+              <a:t> — 10 pm – 2 am · </a:t>
+            </a:r>
+            <a:pPr algn="l" indent="0" marL="0">
+              <a:lnSpc>
+                <a:spcPts val="1620"/>
+              </a:lnSpc>
+              <a:spcAft>
+                <a:spcPts val="300"/>
+              </a:spcAft>
+              <a:buNone/>
+            </a:pPr>
+            <a:r>
+              <a:rPr lang="en-US" sz="1200" i="1" dirty="0">
+                <a:solidFill>
+                  <a:srgbClr val="1C2833"/>
+                </a:solidFill>
+                <a:latin typeface="Arial" pitchFamily="34" charset="0"/>
+                <a:ea typeface="Arial" pitchFamily="34" charset="-122"/>
+                <a:cs typeface="Arial" pitchFamily="34" charset="-120"/>
+              </a:rPr>
+              <a:t>pitta</a:t>
+            </a:r>
+            <a:pPr algn="l" indent="0" marL="0">
+              <a:lnSpc>
+                <a:spcPts val="1620"/>
+              </a:lnSpc>
+              <a:spcAft>
+                <a:spcPts val="300"/>
+              </a:spcAft>
+              <a:buNone/>
+            </a:pPr>
+            <a:r>
+              <a:rPr lang="en-US" sz="1200" dirty="0">
+                <a:solidFill>
+                  <a:srgbClr val="1C2833"/>
+                </a:solidFill>
+                <a:latin typeface="Arial" pitchFamily="34" charset="0"/>
+                <a:ea typeface="Arial" pitchFamily="34" charset="-122"/>
+                <a:cs typeface="Arial" pitchFamily="34" charset="-120"/>
+              </a:rPr>
+              <a:t> · Body's deep repair (liver, metabolism). Best for actual sleep — don't snack now.</a:t>
+            </a:r>
+            <a:endParaRPr lang="en-US" sz="1200" dirty="0"/>
+          </a:p>
         </p:txBody>
       </p:sp>
       <p:sp>
         <p:nvSpPr>
           <p:cNvPr id="5" name="Text 3"/>
-          <p:cNvSpPr/>
-          <p:nvPr/>
-        </p:nvSpPr>
-        <p:spPr>
-          <a:xfrm>
-            <a:off x="406301" y="1273373"/>
-            <a:ext cx="8498026" cy="213271"/>
-          </a:xfrm>
-          <a:prstGeom prst="rect">
-            <a:avLst/>
-          </a:prstGeom>
-          <a:noFill/>
-          <a:ln/>
-        </p:spPr>
-        <p:txBody>
-          <a:bodyPr wrap="square" lIns="0" tIns="0" rIns="0" bIns="0" rtlCol="0" anchor="t"/>
-          <a:lstStyle/>
-          <a:p>
-            <a:pPr algn="l" indent="0" marL="0">
-              <a:lnSpc>
-                <a:spcPts val="1680"/>
-              </a:lnSpc>
-              <a:spcBef>
-                <a:spcPts val="300"/>
-              </a:spcBef>
-              <a:spcAft>
-                <a:spcPts val="300"/>
-              </a:spcAft>
-              <a:buNone/>
-            </a:pPr>
-            <a:r>
-              <a:rPr lang="en-US" sz="1200" dirty="0">
-                <a:solidFill>
-                  <a:srgbClr val="1C2833"/>
-                </a:solidFill>
-                <a:latin typeface="Arial" pitchFamily="34" charset="0"/>
-                <a:ea typeface="Arial" pitchFamily="34" charset="-122"/>
-                <a:cs typeface="Arial" pitchFamily="34" charset="-120"/>
-              </a:rPr>
-              <a:t>– Collect. – Preview Day 6: </a:t>
-            </a:r>
-            <a:pPr algn="l" indent="0" marL="0">
-              <a:lnSpc>
-                <a:spcPts val="1680"/>
-              </a:lnSpc>
-              <a:spcBef>
-                <a:spcPts val="300"/>
-              </a:spcBef>
-              <a:spcAft>
-                <a:spcPts val="300"/>
-              </a:spcAft>
-              <a:buNone/>
-            </a:pPr>
-            <a:r>
-              <a:rPr lang="en-US" sz="1200" i="1" dirty="0">
-                <a:solidFill>
-                  <a:srgbClr val="1C2833"/>
-                </a:solidFill>
-                <a:latin typeface="Arial" pitchFamily="34" charset="0"/>
-                <a:ea typeface="Arial" pitchFamily="34" charset="-122"/>
-                <a:cs typeface="Arial" pitchFamily="34" charset="-120"/>
-              </a:rPr>
-              <a:t>"Tomorrow — the six tastes. Yes, we will taste things."</a:t>
-            </a:r>
-            <a:endParaRPr lang="en-US" sz="1200" dirty="0"/>
-          </a:p>
-        </p:txBody>
-      </p:sp>
-      <p:sp>
-        <p:nvSpPr>
-          <p:cNvPr id="6" name="Text 4"/>
           <p:cNvSpPr/>
           <p:nvPr/>
         </p:nvSpPr>
@@ -7112,7 +9837,7 @@
                 <a:ea typeface="Georgia" pitchFamily="34" charset="-122"/>
                 <a:cs typeface="Georgia" pitchFamily="34" charset="-120"/>
               </a:rPr>
-              <a:t>Student-facing content</a:t>
+              <a:t>Core (20 min) (cont.)</a:t>
             </a:r>
             <a:endParaRPr lang="en-US" sz="1800" dirty="0"/>
           </a:p>
@@ -7126,61 +9851,8 @@
         </p:nvSpPr>
         <p:spPr>
           <a:xfrm>
-            <a:off x="406301" y="883593"/>
-            <a:ext cx="8331398" cy="3074194"/>
-          </a:xfrm>
-          <a:prstGeom prst="rect">
-            <a:avLst/>
-          </a:prstGeom>
-          <a:solidFill>
-            <a:srgbClr val="F4F8F9"/>
-          </a:solidFill>
-          <a:ln/>
-        </p:spPr>
-        <p:txBody>
-          <a:bodyPr wrap="square" rtlCol="0" anchor="ctr"/>
-          <a:lstStyle/>
-          <a:p>
-            <a:pPr indent="0" marL="0">
-              <a:buNone/>
-            </a:pPr>
-            <a:endParaRPr lang="en-US" dirty="0"/>
-          </a:p>
-        </p:txBody>
-      </p:sp>
-      <p:sp>
-        <p:nvSpPr>
-          <p:cNvPr id="5" name="Shape 3"/>
-          <p:cNvSpPr/>
-          <p:nvPr/>
-        </p:nvSpPr>
-        <p:spPr>
-          <a:xfrm>
-            <a:off x="434876" y="883593"/>
-            <a:ext cx="0" cy="3074194"/>
-          </a:xfrm>
-          <a:prstGeom prst="line">
-            <a:avLst/>
-          </a:prstGeom>
-          <a:noFill/>
-          <a:ln w="57150">
-            <a:solidFill>
-              <a:srgbClr val="FE4447"/>
-            </a:solidFill>
-            <a:prstDash val="solid"/>
-          </a:ln>
-        </p:spPr>
-      </p:sp>
-      <p:sp>
-        <p:nvSpPr>
-          <p:cNvPr id="6" name="Text 4"/>
-          <p:cNvSpPr/>
-          <p:nvPr/>
-        </p:nvSpPr>
-        <p:spPr>
-          <a:xfrm>
-            <a:off x="692051" y="1074093"/>
-            <a:ext cx="7973389" cy="230981"/>
+            <a:off x="634901" y="883593"/>
+            <a:ext cx="8102798" cy="281880"/>
           </a:xfrm>
           <a:prstGeom prst="rect">
             <a:avLst/>
@@ -7192,43 +9864,101 @@
           <a:bodyPr wrap="square" lIns="0" tIns="0" rIns="0" bIns="0" rtlCol="0" anchor="t"/>
           <a:lstStyle/>
           <a:p>
-            <a:pPr algn="l" indent="0" marL="0">
-              <a:lnSpc>
-                <a:spcPts val="1820"/>
-              </a:lnSpc>
-              <a:spcBef>
-                <a:spcPts val="300"/>
-              </a:spcBef>
-              <a:spcAft>
-                <a:spcPts val="300"/>
-              </a:spcAft>
-              <a:buNone/>
-            </a:pPr>
-            <a:r>
-              <a:rPr lang="en-US" sz="1300" b="1" i="1" dirty="0">
-                <a:solidFill>
-                  <a:srgbClr val="1C2833"/>
-                </a:solidFill>
-                <a:latin typeface="Georgia" pitchFamily="34" charset="0"/>
-                <a:ea typeface="Georgia" pitchFamily="34" charset="-122"/>
-                <a:cs typeface="Georgia" pitchFamily="34" charset="-120"/>
-              </a:rPr>
-              <a:t>The doṣa day-clock:</a:t>
-            </a:r>
-            <a:endParaRPr lang="en-US" sz="1300" dirty="0"/>
-          </a:p>
-        </p:txBody>
-      </p:sp>
-      <p:sp>
-        <p:nvSpPr>
-          <p:cNvPr id="7" name="Text 5"/>
+            <a:pPr algn="l" marL="342900" indent="-342900">
+              <a:lnSpc>
+                <a:spcPts val="1620"/>
+              </a:lnSpc>
+              <a:spcAft>
+                <a:spcPts val="300"/>
+              </a:spcAft>
+              <a:buSzPct val="100000"/>
+              <a:buChar char="•"/>
+            </a:pPr>
+            <a:r>
+              <a:rPr lang="en-US" sz="1200" b="1" dirty="0">
+                <a:solidFill>
+                  <a:srgbClr val="1C2833"/>
+                </a:solidFill>
+                <a:latin typeface="Arial" pitchFamily="34" charset="0"/>
+                <a:ea typeface="Arial" pitchFamily="34" charset="-122"/>
+                <a:cs typeface="Arial" pitchFamily="34" charset="-120"/>
+              </a:rPr>
+              <a:t>6</a:t>
+            </a:r>
+            <a:pPr algn="l" indent="0" marL="0">
+              <a:lnSpc>
+                <a:spcPts val="1620"/>
+              </a:lnSpc>
+              <a:spcAft>
+                <a:spcPts val="300"/>
+              </a:spcAft>
+              <a:buNone/>
+            </a:pPr>
+            <a:r>
+              <a:rPr lang="en-US" sz="1200" dirty="0">
+                <a:solidFill>
+                  <a:srgbClr val="1C2833"/>
+                </a:solidFill>
+                <a:latin typeface="Arial" pitchFamily="34" charset="0"/>
+                <a:ea typeface="Arial" pitchFamily="34" charset="-122"/>
+                <a:cs typeface="Arial" pitchFamily="34" charset="-120"/>
+              </a:rPr>
+              <a:t> — 2 am – 6 am · </a:t>
+            </a:r>
+            <a:pPr algn="l" indent="0" marL="0">
+              <a:lnSpc>
+                <a:spcPts val="1620"/>
+              </a:lnSpc>
+              <a:spcAft>
+                <a:spcPts val="300"/>
+              </a:spcAft>
+              <a:buNone/>
+            </a:pPr>
+            <a:r>
+              <a:rPr lang="en-US" sz="1200" i="1" dirty="0">
+                <a:solidFill>
+                  <a:srgbClr val="1C2833"/>
+                </a:solidFill>
+                <a:latin typeface="Arial" pitchFamily="34" charset="0"/>
+                <a:ea typeface="Arial" pitchFamily="34" charset="-122"/>
+                <a:cs typeface="Arial" pitchFamily="34" charset="-120"/>
+              </a:rPr>
+              <a:t>vāta</a:t>
+            </a:r>
+            <a:pPr algn="l" indent="0" marL="0">
+              <a:lnSpc>
+                <a:spcPts val="1620"/>
+              </a:lnSpc>
+              <a:spcAft>
+                <a:spcPts val="300"/>
+              </a:spcAft>
+              <a:buNone/>
+            </a:pPr>
+            <a:r>
+              <a:rPr lang="en-US" sz="1200" dirty="0">
+                <a:solidFill>
+                  <a:srgbClr val="1C2833"/>
+                </a:solidFill>
+                <a:latin typeface="Arial" pitchFamily="34" charset="0"/>
+                <a:ea typeface="Arial" pitchFamily="34" charset="-122"/>
+                <a:cs typeface="Arial" pitchFamily="34" charset="-120"/>
+              </a:rPr>
+              <a:t> · Light sleep, dreams; body cycles toward waking. Wake at end of window.</a:t>
+            </a:r>
+            <a:endParaRPr lang="en-US" sz="1200" dirty="0"/>
+          </a:p>
+        </p:txBody>
+      </p:sp>
+      <p:sp>
+        <p:nvSpPr>
+          <p:cNvPr id="5" name="Text 3"/>
           <p:cNvSpPr/>
           <p:nvPr/>
         </p:nvSpPr>
         <p:spPr>
           <a:xfrm>
-            <a:off x="692051" y="1343174"/>
-            <a:ext cx="7973389" cy="923925"/>
+            <a:off x="406301" y="1254323"/>
+            <a:ext cx="8498026" cy="213271"/>
           </a:xfrm>
           <a:prstGeom prst="rect">
             <a:avLst/>
@@ -7242,7 +9972,7 @@
           <a:p>
             <a:pPr algn="l" indent="0" marL="0">
               <a:lnSpc>
-                <a:spcPts val="1820"/>
+                <a:spcPts val="1680"/>
               </a:lnSpc>
               <a:spcBef>
                 <a:spcPts val="300"/>
@@ -7253,306 +9983,30 @@
               <a:buNone/>
             </a:pPr>
             <a:r>
-              <a:rPr lang="en-US" sz="1300" dirty="0">
-                <a:solidFill>
-                  <a:srgbClr val="1C2833"/>
-                </a:solidFill>
-                <a:latin typeface="Georgia" pitchFamily="34" charset="0"/>
-                <a:ea typeface="Georgia" pitchFamily="34" charset="-122"/>
-                <a:cs typeface="Georgia" pitchFamily="34" charset="-120"/>
-              </a:rPr>
-              <a:t>| Window | Time | Doṣa | Best for | |--------|------|-------|----------| | 1 | 6 am – 10 am | </a:t>
-            </a:r>
-            <a:pPr algn="l" indent="0" marL="0">
-              <a:lnSpc>
-                <a:spcPts val="1820"/>
-              </a:lnSpc>
-              <a:spcBef>
-                <a:spcPts val="300"/>
-              </a:spcBef>
-              <a:spcAft>
-                <a:spcPts val="300"/>
-              </a:spcAft>
-              <a:buNone/>
-            </a:pPr>
-            <a:r>
-              <a:rPr lang="en-US" sz="1300" i="1" dirty="0">
-                <a:solidFill>
-                  <a:srgbClr val="1C2833"/>
-                </a:solidFill>
-                <a:latin typeface="Georgia" pitchFamily="34" charset="0"/>
-                <a:ea typeface="Georgia" pitchFamily="34" charset="-122"/>
-                <a:cs typeface="Georgia" pitchFamily="34" charset="-120"/>
-              </a:rPr>
-              <a:t>kapha</a:t>
-            </a:r>
-            <a:pPr algn="l" indent="0" marL="0">
-              <a:lnSpc>
-                <a:spcPts val="1820"/>
-              </a:lnSpc>
-              <a:spcBef>
-                <a:spcPts val="300"/>
-              </a:spcBef>
-              <a:spcAft>
-                <a:spcPts val="300"/>
-              </a:spcAft>
-              <a:buNone/>
-            </a:pPr>
-            <a:r>
-              <a:rPr lang="en-US" sz="1300" dirty="0">
-                <a:solidFill>
-                  <a:srgbClr val="1C2833"/>
-                </a:solidFill>
-                <a:latin typeface="Georgia" pitchFamily="34" charset="0"/>
-                <a:ea typeface="Georgia" pitchFamily="34" charset="-122"/>
-                <a:cs typeface="Georgia" pitchFamily="34" charset="-120"/>
-              </a:rPr>
-              <a:t> | wake, light exercise, solid breakfast | | 2 | 10 am – 2 pm | </a:t>
-            </a:r>
-            <a:pPr algn="l" indent="0" marL="0">
-              <a:lnSpc>
-                <a:spcPts val="1820"/>
-              </a:lnSpc>
-              <a:spcBef>
-                <a:spcPts val="300"/>
-              </a:spcBef>
-              <a:spcAft>
-                <a:spcPts val="300"/>
-              </a:spcAft>
-              <a:buNone/>
-            </a:pPr>
-            <a:r>
-              <a:rPr lang="en-US" sz="1300" i="1" dirty="0">
-                <a:solidFill>
-                  <a:srgbClr val="1C2833"/>
-                </a:solidFill>
-                <a:latin typeface="Georgia" pitchFamily="34" charset="0"/>
-                <a:ea typeface="Georgia" pitchFamily="34" charset="-122"/>
-                <a:cs typeface="Georgia" pitchFamily="34" charset="-120"/>
-              </a:rPr>
-              <a:t>pitta</a:t>
-            </a:r>
-            <a:pPr algn="l" indent="0" marL="0">
-              <a:lnSpc>
-                <a:spcPts val="1820"/>
-              </a:lnSpc>
-              <a:spcBef>
-                <a:spcPts val="300"/>
-              </a:spcBef>
-              <a:spcAft>
-                <a:spcPts val="300"/>
-              </a:spcAft>
-              <a:buNone/>
-            </a:pPr>
-            <a:r>
-              <a:rPr lang="en-US" sz="1300" dirty="0">
-                <a:solidFill>
-                  <a:srgbClr val="1C2833"/>
-                </a:solidFill>
-                <a:latin typeface="Georgia" pitchFamily="34" charset="0"/>
-                <a:ea typeface="Georgia" pitchFamily="34" charset="-122"/>
-                <a:cs typeface="Georgia" pitchFamily="34" charset="-120"/>
-              </a:rPr>
-              <a:t> | main meal of the day, focused work | | 3 | 2 pm – 6 pm | </a:t>
-            </a:r>
-            <a:pPr algn="l" indent="0" marL="0">
-              <a:lnSpc>
-                <a:spcPts val="1820"/>
-              </a:lnSpc>
-              <a:spcBef>
-                <a:spcPts val="300"/>
-              </a:spcBef>
-              <a:spcAft>
-                <a:spcPts val="300"/>
-              </a:spcAft>
-              <a:buNone/>
-            </a:pPr>
-            <a:r>
-              <a:rPr lang="en-US" sz="1300" i="1" dirty="0">
-                <a:solidFill>
-                  <a:srgbClr val="1C2833"/>
-                </a:solidFill>
-                <a:latin typeface="Georgia" pitchFamily="34" charset="0"/>
-                <a:ea typeface="Georgia" pitchFamily="34" charset="-122"/>
-                <a:cs typeface="Georgia" pitchFamily="34" charset="-120"/>
-              </a:rPr>
-              <a:t>vāta</a:t>
-            </a:r>
-            <a:pPr algn="l" indent="0" marL="0">
-              <a:lnSpc>
-                <a:spcPts val="1820"/>
-              </a:lnSpc>
-              <a:spcBef>
-                <a:spcPts val="300"/>
-              </a:spcBef>
-              <a:spcAft>
-                <a:spcPts val="300"/>
-              </a:spcAft>
-              <a:buNone/>
-            </a:pPr>
-            <a:r>
-              <a:rPr lang="en-US" sz="1300" dirty="0">
-                <a:solidFill>
-                  <a:srgbClr val="1C2833"/>
-                </a:solidFill>
-                <a:latin typeface="Georgia" pitchFamily="34" charset="0"/>
-                <a:ea typeface="Georgia" pitchFamily="34" charset="-122"/>
-                <a:cs typeface="Georgia" pitchFamily="34" charset="-120"/>
-              </a:rPr>
-              <a:t> | quick work, short snacks | | 4 | 6 pm – 10 pm | </a:t>
-            </a:r>
-            <a:pPr algn="l" indent="0" marL="0">
-              <a:lnSpc>
-                <a:spcPts val="1820"/>
-              </a:lnSpc>
-              <a:spcBef>
-                <a:spcPts val="300"/>
-              </a:spcBef>
-              <a:spcAft>
-                <a:spcPts val="300"/>
-              </a:spcAft>
-              <a:buNone/>
-            </a:pPr>
-            <a:r>
-              <a:rPr lang="en-US" sz="1300" i="1" dirty="0">
-                <a:solidFill>
-                  <a:srgbClr val="1C2833"/>
-                </a:solidFill>
-                <a:latin typeface="Georgia" pitchFamily="34" charset="0"/>
-                <a:ea typeface="Georgia" pitchFamily="34" charset="-122"/>
-                <a:cs typeface="Georgia" pitchFamily="34" charset="-120"/>
-              </a:rPr>
-              <a:t>kapha</a:t>
-            </a:r>
-            <a:pPr algn="l" indent="0" marL="0">
-              <a:lnSpc>
-                <a:spcPts val="1820"/>
-              </a:lnSpc>
-              <a:spcBef>
-                <a:spcPts val="300"/>
-              </a:spcBef>
-              <a:spcAft>
-                <a:spcPts val="300"/>
-              </a:spcAft>
-              <a:buNone/>
-            </a:pPr>
-            <a:r>
-              <a:rPr lang="en-US" sz="1300" dirty="0">
-                <a:solidFill>
-                  <a:srgbClr val="1C2833"/>
-                </a:solidFill>
-                <a:latin typeface="Georgia" pitchFamily="34" charset="0"/>
-                <a:ea typeface="Georgia" pitchFamily="34" charset="-122"/>
-                <a:cs typeface="Georgia" pitchFamily="34" charset="-120"/>
-              </a:rPr>
-              <a:t> | light dinner, wind down | | 5 | 10 pm – 2 am | </a:t>
-            </a:r>
-            <a:pPr algn="l" indent="0" marL="0">
-              <a:lnSpc>
-                <a:spcPts val="1820"/>
-              </a:lnSpc>
-              <a:spcBef>
-                <a:spcPts val="300"/>
-              </a:spcBef>
-              <a:spcAft>
-                <a:spcPts val="300"/>
-              </a:spcAft>
-              <a:buNone/>
-            </a:pPr>
-            <a:r>
-              <a:rPr lang="en-US" sz="1300" i="1" dirty="0">
-                <a:solidFill>
-                  <a:srgbClr val="1C2833"/>
-                </a:solidFill>
-                <a:latin typeface="Georgia" pitchFamily="34" charset="0"/>
-                <a:ea typeface="Georgia" pitchFamily="34" charset="-122"/>
-                <a:cs typeface="Georgia" pitchFamily="34" charset="-120"/>
-              </a:rPr>
-              <a:t>pitta</a:t>
-            </a:r>
-            <a:pPr algn="l" indent="0" marL="0">
-              <a:lnSpc>
-                <a:spcPts val="1820"/>
-              </a:lnSpc>
-              <a:spcBef>
-                <a:spcPts val="300"/>
-              </a:spcBef>
-              <a:spcAft>
-                <a:spcPts val="300"/>
-              </a:spcAft>
-              <a:buNone/>
-            </a:pPr>
-            <a:r>
-              <a:rPr lang="en-US" sz="1300" dirty="0">
-                <a:solidFill>
-                  <a:srgbClr val="1C2833"/>
-                </a:solidFill>
-                <a:latin typeface="Georgia" pitchFamily="34" charset="0"/>
-                <a:ea typeface="Georgia" pitchFamily="34" charset="-122"/>
-                <a:cs typeface="Georgia" pitchFamily="34" charset="-120"/>
-              </a:rPr>
-              <a:t> | deep sleep (body's repair) | | 6 | 2 am – 6 am | </a:t>
-            </a:r>
-            <a:pPr algn="l" indent="0" marL="0">
-              <a:lnSpc>
-                <a:spcPts val="1820"/>
-              </a:lnSpc>
-              <a:spcBef>
-                <a:spcPts val="300"/>
-              </a:spcBef>
-              <a:spcAft>
-                <a:spcPts val="300"/>
-              </a:spcAft>
-              <a:buNone/>
-            </a:pPr>
-            <a:r>
-              <a:rPr lang="en-US" sz="1300" i="1" dirty="0">
-                <a:solidFill>
-                  <a:srgbClr val="1C2833"/>
-                </a:solidFill>
-                <a:latin typeface="Georgia" pitchFamily="34" charset="0"/>
-                <a:ea typeface="Georgia" pitchFamily="34" charset="-122"/>
-                <a:cs typeface="Georgia" pitchFamily="34" charset="-120"/>
-              </a:rPr>
-              <a:t>vāta</a:t>
-            </a:r>
-            <a:pPr algn="l" indent="0" marL="0">
-              <a:lnSpc>
-                <a:spcPts val="1820"/>
-              </a:lnSpc>
-              <a:spcBef>
-                <a:spcPts val="300"/>
-              </a:spcBef>
-              <a:spcAft>
-                <a:spcPts val="300"/>
-              </a:spcAft>
-              <a:buNone/>
-            </a:pPr>
-            <a:r>
-              <a:rPr lang="en-US" sz="1300" dirty="0">
-                <a:solidFill>
-                  <a:srgbClr val="1C2833"/>
-                </a:solidFill>
-                <a:latin typeface="Georgia" pitchFamily="34" charset="0"/>
-                <a:ea typeface="Georgia" pitchFamily="34" charset="-122"/>
-                <a:cs typeface="Georgia" pitchFamily="34" charset="-120"/>
-              </a:rPr>
-              <a:t> | wake at the end of this window |</a:t>
-            </a:r>
-            <a:endParaRPr lang="en-US" sz="1300" dirty="0"/>
-          </a:p>
-        </p:txBody>
-      </p:sp>
-      <p:sp>
-        <p:nvSpPr>
-          <p:cNvPr id="8" name="Text 6"/>
+              <a:rPr lang="en-US" sz="1200" i="1" dirty="0">
+                <a:solidFill>
+                  <a:srgbClr val="1C2833"/>
+                </a:solidFill>
+                <a:latin typeface="Arial" pitchFamily="34" charset="0"/>
+                <a:ea typeface="Arial" pitchFamily="34" charset="-122"/>
+                <a:cs typeface="Arial" pitchFamily="34" charset="-120"/>
+              </a:rPr>
+              <a:t>"Each doṣa shows up twice — once during the day, once at night."</a:t>
+            </a:r>
+            <a:endParaRPr lang="en-US" sz="1200" dirty="0"/>
+          </a:p>
+        </p:txBody>
+      </p:sp>
+      <p:sp>
+        <p:nvSpPr>
+          <p:cNvPr id="6" name="Text 4"/>
           <p:cNvSpPr/>
           <p:nvPr/>
         </p:nvSpPr>
         <p:spPr>
           <a:xfrm>
-            <a:off x="692051" y="2305199"/>
-            <a:ext cx="7973389" cy="230981"/>
+            <a:off x="634901" y="1556445"/>
+            <a:ext cx="8102798" cy="281880"/>
           </a:xfrm>
           <a:prstGeom prst="rect">
             <a:avLst/>
@@ -7564,247 +10018,54 @@
           <a:bodyPr wrap="square" lIns="0" tIns="0" rIns="0" bIns="0" rtlCol="0" anchor="t"/>
           <a:lstStyle/>
           <a:p>
-            <a:pPr algn="l" indent="0" marL="0">
-              <a:lnSpc>
-                <a:spcPts val="1820"/>
-              </a:lnSpc>
-              <a:spcBef>
-                <a:spcPts val="300"/>
-              </a:spcBef>
-              <a:spcAft>
-                <a:spcPts val="300"/>
-              </a:spcAft>
-              <a:buNone/>
-            </a:pPr>
-            <a:r>
-              <a:rPr lang="en-US" sz="1300" i="1" dirty="0">
-                <a:solidFill>
-                  <a:srgbClr val="1C2833"/>
-                </a:solidFill>
-                <a:latin typeface="Georgia" pitchFamily="34" charset="0"/>
-                <a:ea typeface="Georgia" pitchFamily="34" charset="-122"/>
-                <a:cs typeface="Georgia" pitchFamily="34" charset="-120"/>
-              </a:rPr>
-              <a:t>The principle: align activities with the dominant doṣa of the time.</a:t>
-            </a:r>
-            <a:endParaRPr lang="en-US" sz="1300" dirty="0"/>
-          </a:p>
-        </p:txBody>
-      </p:sp>
-      <p:sp>
-        <p:nvSpPr>
-          <p:cNvPr id="9" name="Text 7"/>
-          <p:cNvSpPr/>
-          <p:nvPr/>
-        </p:nvSpPr>
-        <p:spPr>
-          <a:xfrm>
-            <a:off x="692051" y="2574280"/>
-            <a:ext cx="7973389" cy="230981"/>
-          </a:xfrm>
-          <a:prstGeom prst="rect">
-            <a:avLst/>
-          </a:prstGeom>
-          <a:noFill/>
-          <a:ln/>
-        </p:spPr>
-        <p:txBody>
-          <a:bodyPr wrap="square" lIns="0" tIns="0" rIns="0" bIns="0" rtlCol="0" anchor="t"/>
-          <a:lstStyle/>
-          <a:p>
-            <a:pPr algn="l" indent="0" marL="0">
-              <a:lnSpc>
-                <a:spcPts val="1820"/>
-              </a:lnSpc>
-              <a:spcBef>
-                <a:spcPts val="300"/>
-              </a:spcBef>
-              <a:spcAft>
-                <a:spcPts val="300"/>
-              </a:spcAft>
-              <a:buNone/>
-            </a:pPr>
-            <a:r>
-              <a:rPr lang="en-US" sz="1300" i="1" dirty="0">
-                <a:solidFill>
-                  <a:srgbClr val="1C2833"/>
-                </a:solidFill>
-                <a:latin typeface="Georgia" pitchFamily="34" charset="0"/>
-                <a:ea typeface="Georgia" pitchFamily="34" charset="-122"/>
-                <a:cs typeface="Georgia" pitchFamily="34" charset="-120"/>
-              </a:rPr>
-              <a:t>— paraphrased from Aṣṭāṅga Hṛdaya, Sūtrasthāna 1</a:t>
-            </a:r>
-            <a:endParaRPr lang="en-US" sz="1300" dirty="0"/>
-          </a:p>
-        </p:txBody>
-      </p:sp>
-      <p:sp>
-        <p:nvSpPr>
-          <p:cNvPr id="10" name="Text 8"/>
-          <p:cNvSpPr/>
-          <p:nvPr/>
-        </p:nvSpPr>
-        <p:spPr>
-          <a:xfrm>
-            <a:off x="692051" y="2843361"/>
-            <a:ext cx="7973389" cy="923925"/>
-          </a:xfrm>
-          <a:prstGeom prst="rect">
-            <a:avLst/>
-          </a:prstGeom>
-          <a:noFill/>
-          <a:ln/>
-        </p:spPr>
-        <p:txBody>
-          <a:bodyPr wrap="square" lIns="0" tIns="0" rIns="0" bIns="0" rtlCol="0" anchor="t"/>
-          <a:lstStyle/>
-          <a:p>
-            <a:pPr algn="l" indent="0" marL="0">
-              <a:lnSpc>
-                <a:spcPts val="1820"/>
-              </a:lnSpc>
-              <a:spcBef>
-                <a:spcPts val="300"/>
-              </a:spcBef>
-              <a:spcAft>
-                <a:spcPts val="300"/>
-              </a:spcAft>
-              <a:buNone/>
-            </a:pPr>
-            <a:r>
-              <a:rPr lang="en-US" sz="1300" b="1" i="1" dirty="0">
-                <a:solidFill>
-                  <a:srgbClr val="1C2833"/>
-                </a:solidFill>
-                <a:latin typeface="Georgia" pitchFamily="34" charset="0"/>
-                <a:ea typeface="Georgia" pitchFamily="34" charset="-122"/>
-                <a:cs typeface="Georgia" pitchFamily="34" charset="-120"/>
-              </a:rPr>
-              <a:t>Modern parallel:</a:t>
-            </a:r>
-            <a:pPr algn="l" indent="0" marL="0">
-              <a:lnSpc>
-                <a:spcPts val="1820"/>
-              </a:lnSpc>
-              <a:spcBef>
-                <a:spcPts val="300"/>
-              </a:spcBef>
-              <a:spcAft>
-                <a:spcPts val="300"/>
-              </a:spcAft>
-              <a:buNone/>
-            </a:pPr>
-            <a:r>
-              <a:rPr lang="en-US" sz="1300" dirty="0">
-                <a:solidFill>
-                  <a:srgbClr val="1C2833"/>
-                </a:solidFill>
-                <a:latin typeface="Georgia" pitchFamily="34" charset="0"/>
-                <a:ea typeface="Georgia" pitchFamily="34" charset="-122"/>
-                <a:cs typeface="Georgia" pitchFamily="34" charset="-120"/>
-              </a:rPr>
-              <a:t> chronobiology. The body has rhythms. Insulin works better in the morning. Cortisol peaks at dawn. Body temperature peaks late afternoon. The general shape matches; the exact timing doesn't precisely line up. Both frameworks point to the same underlying observation: </a:t>
-            </a:r>
-            <a:pPr algn="l" indent="0" marL="0">
-              <a:lnSpc>
-                <a:spcPts val="1820"/>
-              </a:lnSpc>
-              <a:spcBef>
-                <a:spcPts val="300"/>
-              </a:spcBef>
-              <a:spcAft>
-                <a:spcPts val="300"/>
-              </a:spcAft>
-              <a:buNone/>
-            </a:pPr>
-            <a:r>
-              <a:rPr lang="en-US" sz="1300" i="1" dirty="0">
-                <a:solidFill>
-                  <a:srgbClr val="1C2833"/>
-                </a:solidFill>
-                <a:latin typeface="Georgia" pitchFamily="34" charset="0"/>
-                <a:ea typeface="Georgia" pitchFamily="34" charset="-122"/>
-                <a:cs typeface="Georgia" pitchFamily="34" charset="-120"/>
-              </a:rPr>
-              <a:t>when</a:t>
-            </a:r>
-            <a:pPr algn="l" indent="0" marL="0">
-              <a:lnSpc>
-                <a:spcPts val="1820"/>
-              </a:lnSpc>
-              <a:spcBef>
-                <a:spcPts val="300"/>
-              </a:spcBef>
-              <a:spcAft>
-                <a:spcPts val="300"/>
-              </a:spcAft>
-              <a:buNone/>
-            </a:pPr>
-            <a:r>
-              <a:rPr lang="en-US" sz="1300" dirty="0">
-                <a:solidFill>
-                  <a:srgbClr val="1C2833"/>
-                </a:solidFill>
-                <a:latin typeface="Georgia" pitchFamily="34" charset="0"/>
-                <a:ea typeface="Georgia" pitchFamily="34" charset="-122"/>
-                <a:cs typeface="Georgia" pitchFamily="34" charset="-120"/>
-              </a:rPr>
-              <a:t> matters as much as </a:t>
-            </a:r>
-            <a:pPr algn="l" indent="0" marL="0">
-              <a:lnSpc>
-                <a:spcPts val="1820"/>
-              </a:lnSpc>
-              <a:spcBef>
-                <a:spcPts val="300"/>
-              </a:spcBef>
-              <a:spcAft>
-                <a:spcPts val="300"/>
-              </a:spcAft>
-              <a:buNone/>
-            </a:pPr>
-            <a:r>
-              <a:rPr lang="en-US" sz="1300" i="1" dirty="0">
-                <a:solidFill>
-                  <a:srgbClr val="1C2833"/>
-                </a:solidFill>
-                <a:latin typeface="Georgia" pitchFamily="34" charset="0"/>
-                <a:ea typeface="Georgia" pitchFamily="34" charset="-122"/>
-                <a:cs typeface="Georgia" pitchFamily="34" charset="-120"/>
-              </a:rPr>
-              <a:t>what</a:t>
-            </a:r>
-            <a:pPr algn="l" indent="0" marL="0">
-              <a:lnSpc>
-                <a:spcPts val="1820"/>
-              </a:lnSpc>
-              <a:spcBef>
-                <a:spcPts val="300"/>
-              </a:spcBef>
-              <a:spcAft>
-                <a:spcPts val="300"/>
-              </a:spcAft>
-              <a:buNone/>
-            </a:pPr>
-            <a:r>
-              <a:rPr lang="en-US" sz="1300" dirty="0">
-                <a:solidFill>
-                  <a:srgbClr val="1C2833"/>
-                </a:solidFill>
-                <a:latin typeface="Georgia" pitchFamily="34" charset="0"/>
-                <a:ea typeface="Georgia" pitchFamily="34" charset="-122"/>
-                <a:cs typeface="Georgia" pitchFamily="34" charset="-120"/>
-              </a:rPr>
-              <a:t>.</a:t>
-            </a:r>
-            <a:endParaRPr lang="en-US" sz="1300" dirty="0"/>
-          </a:p>
-        </p:txBody>
-      </p:sp>
-      <p:sp>
-        <p:nvSpPr>
-          <p:cNvPr id="11" name="Text 9"/>
+            <a:pPr algn="l" marL="342900" indent="-342900">
+              <a:lnSpc>
+                <a:spcPts val="1620"/>
+              </a:lnSpc>
+              <a:spcAft>
+                <a:spcPts val="300"/>
+              </a:spcAft>
+              <a:buSzPct val="100000"/>
+              <a:buChar char="•"/>
+            </a:pPr>
+            <a:r>
+              <a:rPr lang="en-US" sz="1200" b="1" dirty="0">
+                <a:solidFill>
+                  <a:srgbClr val="1C2833"/>
+                </a:solidFill>
+                <a:latin typeface="Arial" pitchFamily="34" charset="0"/>
+                <a:ea typeface="Arial" pitchFamily="34" charset="-122"/>
+                <a:cs typeface="Arial" pitchFamily="34" charset="-120"/>
+              </a:rPr>
+              <a:t>The classical principle.</a:t>
+            </a:r>
+            <a:pPr algn="l" indent="0" marL="0">
+              <a:lnSpc>
+                <a:spcPts val="1620"/>
+              </a:lnSpc>
+              <a:spcAft>
+                <a:spcPts val="300"/>
+              </a:spcAft>
+              <a:buNone/>
+            </a:pPr>
+            <a:r>
+              <a:rPr lang="en-US" sz="1200" dirty="0">
+                <a:solidFill>
+                  <a:srgbClr val="1C2833"/>
+                </a:solidFill>
+                <a:latin typeface="Arial" pitchFamily="34" charset="0"/>
+                <a:ea typeface="Arial" pitchFamily="34" charset="-122"/>
+                <a:cs typeface="Arial" pitchFamily="34" charset="-120"/>
+              </a:rPr>
+              <a:t> Source paraphrase:</a:t>
+            </a:r>
+            <a:endParaRPr lang="en-US" sz="1200" dirty="0"/>
+          </a:p>
+        </p:txBody>
+      </p:sp>
+      <p:sp>
+        <p:nvSpPr>
+          <p:cNvPr id="7" name="Text 5"/>
           <p:cNvSpPr/>
           <p:nvPr/>
         </p:nvSpPr>
